--- a/presentations/output/P5_Функциональные_точки.pptx
+++ b/presentations/output/P5_Функциональные_точки.pptx
@@ -9944,7 +9944,7 @@
           <a:bodyPr wrap="square" rtlCol="0" anchor="ctr"/>
           <a:lstStyle/>
           <a:p>
-            <a:pPr indent="0" marL="0">
+            <a:pPr algn="l" indent="0" marL="0">
               <a:buNone/>
             </a:pPr>
             <a:r>

--- a/presentations/output/P5_Функциональные_точки.pptx
+++ b/presentations/output/P5_Функциональные_точки.pptx
@@ -20,9 +20,10 @@
     <p:sldId id="268" r:id="rId14"/>
     <p:sldId id="269" r:id="rId15"/>
     <p:sldId id="270" r:id="rId16"/>
+    <p:sldId id="271" r:id="rId17"/>
   </p:sldIdLst>
   <p:notesMasterIdLst>
-    <p:notesMasterId r:id="rId17"/>
+    <p:notesMasterId r:id="rId18"/>
   </p:notesMasterIdLst>
   <p:sldSz cx="9144000" cy="5143500"/>
   <p:notesSz cx="5143500" cy="9144000"/>
@@ -1068,6 +1069,94 @@
             <a:fld id="{F7021451-1387-4CA6-816F-3879F97B5CBC}" type="slidenum">
               <a:rPr lang="en-US"/>
               <a:t>15</a:t>
+            </a:fld>
+            <a:endParaRPr lang="en-US"/>
+          </a:p>
+        </p:txBody>
+      </p:sp>
+    </p:spTree>
+    <p:extLst>
+      <p:ext uri="{BB962C8B-B14F-4D97-AF65-F5344CB8AC3E}">
+        <p14:creationId xmlns:p14="http://schemas.microsoft.com/office/powerpoint/2010/main" val="1024086991"/>
+      </p:ext>
+    </p:extLst>
+  </p:cSld>
+  <p:clrMapOvr>
+    <a:masterClrMapping/>
+  </p:clrMapOvr>
+</p:notes>
+</file>
+
+<file path=ppt/notesSlides/notesSlide16.xml><?xml version="1.0" encoding="utf-8"?>
+<p:notes xmlns:a="http://schemas.openxmlformats.org/drawingml/2006/main" xmlns:r="http://schemas.openxmlformats.org/officeDocument/2006/relationships" xmlns:p="http://schemas.openxmlformats.org/presentationml/2006/main">
+  <p:cSld>
+    <p:spTree>
+      <p:nvGrpSpPr>
+        <p:cNvPr id="1" name=""/>
+        <p:cNvGrpSpPr/>
+        <p:nvPr/>
+      </p:nvGrpSpPr>
+      <p:grpSpPr>
+        <a:xfrm>
+          <a:off x="0" y="0"/>
+          <a:ext cx="0" cy="0"/>
+          <a:chOff x="0" y="0"/>
+          <a:chExt cx="0" cy="0"/>
+        </a:xfrm>
+      </p:grpSpPr>
+      <p:sp>
+        <p:nvSpPr>
+          <p:cNvPr id="2" name="Slide Image Placeholder 1"/>
+          <p:cNvSpPr>
+            <a:spLocks noGrp="1" noRot="1" noChangeAspect="1"/>
+          </p:cNvSpPr>
+          <p:nvPr>
+            <p:ph type="sldImg"/>
+          </p:nvPr>
+        </p:nvSpPr>
+        <p:spPr/>
+      </p:sp>
+      <p:sp>
+        <p:nvSpPr>
+          <p:cNvPr id="3" name="Notes Placeholder 2"/>
+          <p:cNvSpPr>
+            <a:spLocks noGrp="1"/>
+          </p:cNvSpPr>
+          <p:nvPr>
+            <p:ph type="body" idx="1"/>
+          </p:nvPr>
+        </p:nvSpPr>
+        <p:spPr/>
+        <p:txBody>
+          <a:bodyPr/>
+          <a:lstStyle/>
+          <a:p>
+            <a:r>
+              <a:rPr lang="en-US" dirty="0"/>
+              <a:t/>
+            </a:r>
+            <a:endParaRPr lang="en-US" dirty="0"/>
+          </a:p>
+        </p:txBody>
+      </p:sp>
+      <p:sp>
+        <p:nvSpPr>
+          <p:cNvPr id="4" name="Slide Number Placeholder 3"/>
+          <p:cNvSpPr>
+            <a:spLocks noGrp="1"/>
+          </p:cNvSpPr>
+          <p:nvPr>
+            <p:ph type="sldNum" sz="quarter" idx="10"/>
+          </p:nvPr>
+        </p:nvSpPr>
+        <p:spPr/>
+        <p:txBody>
+          <a:bodyPr/>
+          <a:lstStyle/>
+          <a:p>
+            <a:fld id="{F7021451-1387-4CA6-816F-3879F97B5CBC}" type="slidenum">
+              <a:rPr lang="en-US"/>
+              <a:t>16</a:t>
             </a:fld>
             <a:endParaRPr lang="en-US"/>
           </a:p>
@@ -2515,7 +2604,7 @@
                         <a:buNone/>
                       </a:pPr>
                       <a:r>
-                        <a:rPr lang="en-US" sz="1100" b="1" dirty="0">
+                        <a:rPr lang="en-US" sz="1300" b="1" dirty="0">
                           <a:solidFill>
                             <a:srgbClr val="FFFFFF"/>
                           </a:solidFill>
@@ -2525,7 +2614,7 @@
                         </a:rPr>
                         <a:t>Тип компонента</a:t>
                       </a:r>
-                      <a:endParaRPr lang="en-US" sz="1100" dirty="0">
+                      <a:endParaRPr lang="en-US" sz="1300" dirty="0">
                         <a:latin typeface="Times New Roman" charset="0"/>
                         <a:ea typeface="Times New Roman" charset="0"/>
                         <a:cs typeface="Times New Roman" charset="0"/>
@@ -2583,7 +2672,7 @@
                         <a:buNone/>
                       </a:pPr>
                       <a:r>
-                        <a:rPr lang="en-US" sz="1100" b="1" dirty="0">
+                        <a:rPr lang="en-US" sz="1300" b="1" dirty="0">
                           <a:solidFill>
                             <a:srgbClr val="FFFFFF"/>
                           </a:solidFill>
@@ -2593,7 +2682,7 @@
                         </a:rPr>
                         <a:t>Описание элемента</a:t>
                       </a:r>
-                      <a:endParaRPr lang="en-US" sz="1100" dirty="0">
+                      <a:endParaRPr lang="en-US" sz="1300" dirty="0">
                         <a:latin typeface="Times New Roman" charset="0"/>
                         <a:ea typeface="Times New Roman" charset="0"/>
                         <a:cs typeface="Times New Roman" charset="0"/>
@@ -2651,7 +2740,7 @@
                         <a:buNone/>
                       </a:pPr>
                       <a:r>
-                        <a:rPr lang="en-US" sz="1100" b="1" dirty="0">
+                        <a:rPr lang="en-US" sz="1300" b="1" dirty="0">
                           <a:solidFill>
                             <a:srgbClr val="FFFFFF"/>
                           </a:solidFill>
@@ -2661,7 +2750,7 @@
                         </a:rPr>
                         <a:t>Сложность</a:t>
                       </a:r>
-                      <a:endParaRPr lang="en-US" sz="1100" dirty="0">
+                      <a:endParaRPr lang="en-US" sz="1300" dirty="0">
                         <a:latin typeface="Times New Roman" charset="0"/>
                         <a:ea typeface="Times New Roman" charset="0"/>
                         <a:cs typeface="Times New Roman" charset="0"/>
@@ -2719,7 +2808,7 @@
                         <a:buNone/>
                       </a:pPr>
                       <a:r>
-                        <a:rPr lang="en-US" sz="1100" b="1" dirty="0">
+                        <a:rPr lang="en-US" sz="1300" b="1" dirty="0">
                           <a:solidFill>
                             <a:srgbClr val="FFFFFF"/>
                           </a:solidFill>
@@ -2729,7 +2818,7 @@
                         </a:rPr>
                         <a:t>Количество</a:t>
                       </a:r>
-                      <a:endParaRPr lang="en-US" sz="1100" dirty="0">
+                      <a:endParaRPr lang="en-US" sz="1300" dirty="0">
                         <a:latin typeface="Times New Roman" charset="0"/>
                         <a:ea typeface="Times New Roman" charset="0"/>
                         <a:cs typeface="Times New Roman" charset="0"/>
@@ -2787,7 +2876,7 @@
                         <a:buNone/>
                       </a:pPr>
                       <a:r>
-                        <a:rPr lang="en-US" sz="1100" b="1" dirty="0">
+                        <a:rPr lang="en-US" sz="1300" b="1" dirty="0">
                           <a:solidFill>
                             <a:srgbClr val="FFFFFF"/>
                           </a:solidFill>
@@ -2797,7 +2886,7 @@
                         </a:rPr>
                         <a:t>Вес</a:t>
                       </a:r>
-                      <a:endParaRPr lang="en-US" sz="1100" dirty="0">
+                      <a:endParaRPr lang="en-US" sz="1300" dirty="0">
                         <a:latin typeface="Times New Roman" charset="0"/>
                         <a:ea typeface="Times New Roman" charset="0"/>
                         <a:cs typeface="Times New Roman" charset="0"/>
@@ -2855,7 +2944,7 @@
                         <a:buNone/>
                       </a:pPr>
                       <a:r>
-                        <a:rPr lang="en-US" sz="1100" b="1" dirty="0">
+                        <a:rPr lang="en-US" sz="1300" b="1" dirty="0">
                           <a:solidFill>
                             <a:srgbClr val="FFFFFF"/>
                           </a:solidFill>
@@ -2865,7 +2954,7 @@
                         </a:rPr>
                         <a:t>UFP</a:t>
                       </a:r>
-                      <a:endParaRPr lang="en-US" sz="1100" dirty="0">
+                      <a:endParaRPr lang="en-US" sz="1300" dirty="0">
                         <a:latin typeface="Times New Roman" charset="0"/>
                         <a:ea typeface="Times New Roman" charset="0"/>
                         <a:cs typeface="Times New Roman" charset="0"/>
@@ -2925,7 +3014,7 @@
                         <a:buNone/>
                       </a:pPr>
                       <a:r>
-                        <a:rPr lang="en-US" sz="1100" dirty="0">
+                        <a:rPr lang="en-US" sz="1300" dirty="0">
                           <a:solidFill>
                             <a:srgbClr val="2D2D3A"/>
                           </a:solidFill>
@@ -2935,7 +3024,7 @@
                         </a:rPr>
                         <a:t>EI (Вводы)</a:t>
                       </a:r>
-                      <a:endParaRPr lang="en-US" sz="1100" dirty="0">
+                      <a:endParaRPr lang="en-US" sz="1300" dirty="0">
                         <a:latin typeface="Times New Roman" charset="0"/>
                         <a:ea typeface="Times New Roman" charset="0"/>
                         <a:cs typeface="Times New Roman" charset="0"/>
@@ -2993,7 +3082,7 @@
                         <a:buNone/>
                       </a:pPr>
                       <a:r>
-                        <a:rPr lang="en-US" sz="1100" dirty="0">
+                        <a:rPr lang="en-US" sz="1300" dirty="0">
                           <a:solidFill>
                             <a:srgbClr val="2D2D3A"/>
                           </a:solidFill>
@@ -3003,7 +3092,7 @@
                         </a:rPr>
                         <a:t>Формы создания обращений, звонков, чаты, OTP вход</a:t>
                       </a:r>
-                      <a:endParaRPr lang="en-US" sz="1100" dirty="0">
+                      <a:endParaRPr lang="en-US" sz="1300" dirty="0">
                         <a:latin typeface="Times New Roman" charset="0"/>
                         <a:ea typeface="Times New Roman" charset="0"/>
                         <a:cs typeface="Times New Roman" charset="0"/>
@@ -3061,7 +3150,7 @@
                         <a:buNone/>
                       </a:pPr>
                       <a:r>
-                        <a:rPr lang="en-US" sz="1100" dirty="0">
+                        <a:rPr lang="en-US" sz="1300" dirty="0">
                           <a:solidFill>
                             <a:srgbClr val="2D2D3A"/>
                           </a:solidFill>
@@ -3071,7 +3160,7 @@
                         </a:rPr>
                         <a:t>Средняя</a:t>
                       </a:r>
-                      <a:endParaRPr lang="en-US" sz="1100" dirty="0">
+                      <a:endParaRPr lang="en-US" sz="1300" dirty="0">
                         <a:latin typeface="Times New Roman" charset="0"/>
                         <a:ea typeface="Times New Roman" charset="0"/>
                         <a:cs typeface="Times New Roman" charset="0"/>
@@ -3129,7 +3218,7 @@
                         <a:buNone/>
                       </a:pPr>
                       <a:r>
-                        <a:rPr lang="en-US" sz="1100" dirty="0">
+                        <a:rPr lang="en-US" sz="1300" dirty="0">
                           <a:solidFill>
                             <a:srgbClr val="2D2D3A"/>
                           </a:solidFill>
@@ -3139,7 +3228,7 @@
                         </a:rPr>
                         <a:t>5</a:t>
                       </a:r>
-                      <a:endParaRPr lang="en-US" sz="1100" dirty="0">
+                      <a:endParaRPr lang="en-US" sz="1300" dirty="0">
                         <a:latin typeface="Times New Roman" charset="0"/>
                         <a:ea typeface="Times New Roman" charset="0"/>
                         <a:cs typeface="Times New Roman" charset="0"/>
@@ -3197,7 +3286,7 @@
                         <a:buNone/>
                       </a:pPr>
                       <a:r>
-                        <a:rPr lang="en-US" sz="1100" dirty="0">
+                        <a:rPr lang="en-US" sz="1300" dirty="0">
                           <a:solidFill>
                             <a:srgbClr val="2D2D3A"/>
                           </a:solidFill>
@@ -3207,7 +3296,7 @@
                         </a:rPr>
                         <a:t>4</a:t>
                       </a:r>
-                      <a:endParaRPr lang="en-US" sz="1100" dirty="0">
+                      <a:endParaRPr lang="en-US" sz="1300" dirty="0">
                         <a:latin typeface="Times New Roman" charset="0"/>
                         <a:ea typeface="Times New Roman" charset="0"/>
                         <a:cs typeface="Times New Roman" charset="0"/>
@@ -3265,7 +3354,7 @@
                         <a:buNone/>
                       </a:pPr>
                       <a:r>
-                        <a:rPr lang="en-US" sz="1100" dirty="0">
+                        <a:rPr lang="en-US" sz="1300" dirty="0">
                           <a:solidFill>
                             <a:srgbClr val="2D2D3A"/>
                           </a:solidFill>
@@ -3275,7 +3364,7 @@
                         </a:rPr>
                         <a:t>20</a:t>
                       </a:r>
-                      <a:endParaRPr lang="en-US" sz="1100" dirty="0">
+                      <a:endParaRPr lang="en-US" sz="1300" dirty="0">
                         <a:latin typeface="Times New Roman" charset="0"/>
                         <a:ea typeface="Times New Roman" charset="0"/>
                         <a:cs typeface="Times New Roman" charset="0"/>
@@ -3335,7 +3424,7 @@
                         <a:buNone/>
                       </a:pPr>
                       <a:r>
-                        <a:rPr lang="en-US" sz="1100" dirty="0">
+                        <a:rPr lang="en-US" sz="1300" dirty="0">
                           <a:solidFill>
                             <a:srgbClr val="2D2D3A"/>
                           </a:solidFill>
@@ -3345,7 +3434,7 @@
                         </a:rPr>
                         <a:t>EO (Выводы)</a:t>
                       </a:r>
-                      <a:endParaRPr lang="en-US" sz="1100" dirty="0">
+                      <a:endParaRPr lang="en-US" sz="1300" dirty="0">
                         <a:latin typeface="Times New Roman" charset="0"/>
                         <a:ea typeface="Times New Roman" charset="0"/>
                         <a:cs typeface="Times New Roman" charset="0"/>
@@ -3403,7 +3492,7 @@
                         <a:buNone/>
                       </a:pPr>
                       <a:r>
-                        <a:rPr lang="en-US" sz="1100" dirty="0">
+                        <a:rPr lang="en-US" sz="1300" dirty="0">
                           <a:solidFill>
                             <a:srgbClr val="2D2D3A"/>
                           </a:solidFill>
@@ -3413,7 +3502,7 @@
                         </a:rPr>
                         <a:t>WebSocket push-оповещения, выгрузка отчетов PDF</a:t>
                       </a:r>
-                      <a:endParaRPr lang="en-US" sz="1100" dirty="0">
+                      <a:endParaRPr lang="en-US" sz="1300" dirty="0">
                         <a:latin typeface="Times New Roman" charset="0"/>
                         <a:ea typeface="Times New Roman" charset="0"/>
                         <a:cs typeface="Times New Roman" charset="0"/>
@@ -3471,7 +3560,7 @@
                         <a:buNone/>
                       </a:pPr>
                       <a:r>
-                        <a:rPr lang="en-US" sz="1100" dirty="0">
+                        <a:rPr lang="en-US" sz="1300" dirty="0">
                           <a:solidFill>
                             <a:srgbClr val="2D2D3A"/>
                           </a:solidFill>
@@ -3481,7 +3570,7 @@
                         </a:rPr>
                         <a:t>Средняя</a:t>
                       </a:r>
-                      <a:endParaRPr lang="en-US" sz="1100" dirty="0">
+                      <a:endParaRPr lang="en-US" sz="1300" dirty="0">
                         <a:latin typeface="Times New Roman" charset="0"/>
                         <a:ea typeface="Times New Roman" charset="0"/>
                         <a:cs typeface="Times New Roman" charset="0"/>
@@ -3539,7 +3628,7 @@
                         <a:buNone/>
                       </a:pPr>
                       <a:r>
-                        <a:rPr lang="en-US" sz="1100" dirty="0">
+                        <a:rPr lang="en-US" sz="1300" dirty="0">
                           <a:solidFill>
                             <a:srgbClr val="2D2D3A"/>
                           </a:solidFill>
@@ -3549,7 +3638,7 @@
                         </a:rPr>
                         <a:t>2</a:t>
                       </a:r>
-                      <a:endParaRPr lang="en-US" sz="1100" dirty="0">
+                      <a:endParaRPr lang="en-US" sz="1300" dirty="0">
                         <a:latin typeface="Times New Roman" charset="0"/>
                         <a:ea typeface="Times New Roman" charset="0"/>
                         <a:cs typeface="Times New Roman" charset="0"/>
@@ -3607,7 +3696,7 @@
                         <a:buNone/>
                       </a:pPr>
                       <a:r>
-                        <a:rPr lang="en-US" sz="1100" dirty="0">
+                        <a:rPr lang="en-US" sz="1300" dirty="0">
                           <a:solidFill>
                             <a:srgbClr val="2D2D3A"/>
                           </a:solidFill>
@@ -3617,7 +3706,7 @@
                         </a:rPr>
                         <a:t>5</a:t>
                       </a:r>
-                      <a:endParaRPr lang="en-US" sz="1100" dirty="0">
+                      <a:endParaRPr lang="en-US" sz="1300" dirty="0">
                         <a:latin typeface="Times New Roman" charset="0"/>
                         <a:ea typeface="Times New Roman" charset="0"/>
                         <a:cs typeface="Times New Roman" charset="0"/>
@@ -3675,7 +3764,7 @@
                         <a:buNone/>
                       </a:pPr>
                       <a:r>
-                        <a:rPr lang="en-US" sz="1100" dirty="0">
+                        <a:rPr lang="en-US" sz="1300" dirty="0">
                           <a:solidFill>
                             <a:srgbClr val="2D2D3A"/>
                           </a:solidFill>
@@ -3685,7 +3774,7 @@
                         </a:rPr>
                         <a:t>10</a:t>
                       </a:r>
-                      <a:endParaRPr lang="en-US" sz="1100" dirty="0">
+                      <a:endParaRPr lang="en-US" sz="1300" dirty="0">
                         <a:latin typeface="Times New Roman" charset="0"/>
                         <a:ea typeface="Times New Roman" charset="0"/>
                         <a:cs typeface="Times New Roman" charset="0"/>
@@ -3745,7 +3834,7 @@
                         <a:buNone/>
                       </a:pPr>
                       <a:r>
-                        <a:rPr lang="en-US" sz="1100" dirty="0">
+                        <a:rPr lang="en-US" sz="1300" dirty="0">
                           <a:solidFill>
                             <a:srgbClr val="2D2D3A"/>
                           </a:solidFill>
@@ -3755,7 +3844,7 @@
                         </a:rPr>
                         <a:t>EQ (Запросы)</a:t>
                       </a:r>
-                      <a:endParaRPr lang="en-US" sz="1100" dirty="0">
+                      <a:endParaRPr lang="en-US" sz="1300" dirty="0">
                         <a:latin typeface="Times New Roman" charset="0"/>
                         <a:ea typeface="Times New Roman" charset="0"/>
                         <a:cs typeface="Times New Roman" charset="0"/>
@@ -3813,7 +3902,7 @@
                         <a:buNone/>
                       </a:pPr>
                       <a:r>
-                        <a:rPr lang="en-US" sz="1100" dirty="0">
+                        <a:rPr lang="en-US" sz="1300" dirty="0">
                           <a:solidFill>
                             <a:srgbClr val="2D2D3A"/>
                           </a:solidFill>
@@ -3823,7 +3912,7 @@
                         </a:rPr>
                         <a:t>Список обращений, карточка деталей, настройки</a:t>
                       </a:r>
-                      <a:endParaRPr lang="en-US" sz="1100" dirty="0">
+                      <a:endParaRPr lang="en-US" sz="1300" dirty="0">
                         <a:latin typeface="Times New Roman" charset="0"/>
                         <a:ea typeface="Times New Roman" charset="0"/>
                         <a:cs typeface="Times New Roman" charset="0"/>
@@ -3881,7 +3970,7 @@
                         <a:buNone/>
                       </a:pPr>
                       <a:r>
-                        <a:rPr lang="en-US" sz="1100" dirty="0">
+                        <a:rPr lang="en-US" sz="1300" dirty="0">
                           <a:solidFill>
                             <a:srgbClr val="2D2D3A"/>
                           </a:solidFill>
@@ -3891,7 +3980,7 @@
                         </a:rPr>
                         <a:t>Средняя</a:t>
                       </a:r>
-                      <a:endParaRPr lang="en-US" sz="1100" dirty="0">
+                      <a:endParaRPr lang="en-US" sz="1300" dirty="0">
                         <a:latin typeface="Times New Roman" charset="0"/>
                         <a:ea typeface="Times New Roman" charset="0"/>
                         <a:cs typeface="Times New Roman" charset="0"/>
@@ -3949,7 +4038,7 @@
                         <a:buNone/>
                       </a:pPr>
                       <a:r>
-                        <a:rPr lang="en-US" sz="1100" dirty="0">
+                        <a:rPr lang="en-US" sz="1300" dirty="0">
                           <a:solidFill>
                             <a:srgbClr val="2D2D3A"/>
                           </a:solidFill>
@@ -3959,7 +4048,7 @@
                         </a:rPr>
                         <a:t>4</a:t>
                       </a:r>
-                      <a:endParaRPr lang="en-US" sz="1100" dirty="0">
+                      <a:endParaRPr lang="en-US" sz="1300" dirty="0">
                         <a:latin typeface="Times New Roman" charset="0"/>
                         <a:ea typeface="Times New Roman" charset="0"/>
                         <a:cs typeface="Times New Roman" charset="0"/>
@@ -4017,7 +4106,7 @@
                         <a:buNone/>
                       </a:pPr>
                       <a:r>
-                        <a:rPr lang="en-US" sz="1100" dirty="0">
+                        <a:rPr lang="en-US" sz="1300" dirty="0">
                           <a:solidFill>
                             <a:srgbClr val="2D2D3A"/>
                           </a:solidFill>
@@ -4027,7 +4116,7 @@
                         </a:rPr>
                         <a:t>4</a:t>
                       </a:r>
-                      <a:endParaRPr lang="en-US" sz="1100" dirty="0">
+                      <a:endParaRPr lang="en-US" sz="1300" dirty="0">
                         <a:latin typeface="Times New Roman" charset="0"/>
                         <a:ea typeface="Times New Roman" charset="0"/>
                         <a:cs typeface="Times New Roman" charset="0"/>
@@ -4085,7 +4174,7 @@
                         <a:buNone/>
                       </a:pPr>
                       <a:r>
-                        <a:rPr lang="en-US" sz="1100" dirty="0">
+                        <a:rPr lang="en-US" sz="1300" dirty="0">
                           <a:solidFill>
                             <a:srgbClr val="2D2D3A"/>
                           </a:solidFill>
@@ -4095,7 +4184,7 @@
                         </a:rPr>
                         <a:t>16</a:t>
                       </a:r>
-                      <a:endParaRPr lang="en-US" sz="1100" dirty="0">
+                      <a:endParaRPr lang="en-US" sz="1300" dirty="0">
                         <a:latin typeface="Times New Roman" charset="0"/>
                         <a:ea typeface="Times New Roman" charset="0"/>
                         <a:cs typeface="Times New Roman" charset="0"/>
@@ -4155,7 +4244,7 @@
                         <a:buNone/>
                       </a:pPr>
                       <a:r>
-                        <a:rPr lang="en-US" sz="1100" dirty="0">
+                        <a:rPr lang="en-US" sz="1300" dirty="0">
                           <a:solidFill>
                             <a:srgbClr val="2D2D3A"/>
                           </a:solidFill>
@@ -4165,7 +4254,7 @@
                         </a:rPr>
                         <a:t>ILF (Локальные файлы)</a:t>
                       </a:r>
-                      <a:endParaRPr lang="en-US" sz="1100" dirty="0">
+                      <a:endParaRPr lang="en-US" sz="1300" dirty="0">
                         <a:latin typeface="Times New Roman" charset="0"/>
                         <a:ea typeface="Times New Roman" charset="0"/>
                         <a:cs typeface="Times New Roman" charset="0"/>
@@ -4223,7 +4312,7 @@
                         <a:buNone/>
                       </a:pPr>
                       <a:r>
-                        <a:rPr lang="en-US" sz="1100" dirty="0">
+                        <a:rPr lang="en-US" sz="1300" dirty="0">
                           <a:solidFill>
                             <a:srgbClr val="2D2D3A"/>
                           </a:solidFill>
@@ -4233,7 +4322,7 @@
                         </a:rPr>
                         <a:t>Таблицы users, tickets, messages, files, outbox</a:t>
                       </a:r>
-                      <a:endParaRPr lang="en-US" sz="1100" dirty="0">
+                      <a:endParaRPr lang="en-US" sz="1300" dirty="0">
                         <a:latin typeface="Times New Roman" charset="0"/>
                         <a:ea typeface="Times New Roman" charset="0"/>
                         <a:cs typeface="Times New Roman" charset="0"/>
@@ -4291,7 +4380,7 @@
                         <a:buNone/>
                       </a:pPr>
                       <a:r>
-                        <a:rPr lang="en-US" sz="1100" dirty="0">
+                        <a:rPr lang="en-US" sz="1300" dirty="0">
                           <a:solidFill>
                             <a:srgbClr val="2D2D3A"/>
                           </a:solidFill>
@@ -4301,7 +4390,7 @@
                         </a:rPr>
                         <a:t>Средняя</a:t>
                       </a:r>
-                      <a:endParaRPr lang="en-US" sz="1100" dirty="0">
+                      <a:endParaRPr lang="en-US" sz="1300" dirty="0">
                         <a:latin typeface="Times New Roman" charset="0"/>
                         <a:ea typeface="Times New Roman" charset="0"/>
                         <a:cs typeface="Times New Roman" charset="0"/>
@@ -4359,7 +4448,7 @@
                         <a:buNone/>
                       </a:pPr>
                       <a:r>
-                        <a:rPr lang="en-US" sz="1100" dirty="0">
+                        <a:rPr lang="en-US" sz="1300" dirty="0">
                           <a:solidFill>
                             <a:srgbClr val="2D2D3A"/>
                           </a:solidFill>
@@ -4369,7 +4458,7 @@
                         </a:rPr>
                         <a:t>5</a:t>
                       </a:r>
-                      <a:endParaRPr lang="en-US" sz="1100" dirty="0">
+                      <a:endParaRPr lang="en-US" sz="1300" dirty="0">
                         <a:latin typeface="Times New Roman" charset="0"/>
                         <a:ea typeface="Times New Roman" charset="0"/>
                         <a:cs typeface="Times New Roman" charset="0"/>
@@ -4427,7 +4516,7 @@
                         <a:buNone/>
                       </a:pPr>
                       <a:r>
-                        <a:rPr lang="en-US" sz="1100" dirty="0">
+                        <a:rPr lang="en-US" sz="1300" dirty="0">
                           <a:solidFill>
                             <a:srgbClr val="2D2D3A"/>
                           </a:solidFill>
@@ -4437,7 +4526,7 @@
                         </a:rPr>
                         <a:t>10</a:t>
                       </a:r>
-                      <a:endParaRPr lang="en-US" sz="1100" dirty="0">
+                      <a:endParaRPr lang="en-US" sz="1300" dirty="0">
                         <a:latin typeface="Times New Roman" charset="0"/>
                         <a:ea typeface="Times New Roman" charset="0"/>
                         <a:cs typeface="Times New Roman" charset="0"/>
@@ -4495,7 +4584,7 @@
                         <a:buNone/>
                       </a:pPr>
                       <a:r>
-                        <a:rPr lang="en-US" sz="1100" dirty="0">
+                        <a:rPr lang="en-US" sz="1300" dirty="0">
                           <a:solidFill>
                             <a:srgbClr val="2D2D3A"/>
                           </a:solidFill>
@@ -4505,7 +4594,7 @@
                         </a:rPr>
                         <a:t>50</a:t>
                       </a:r>
-                      <a:endParaRPr lang="en-US" sz="1100" dirty="0">
+                      <a:endParaRPr lang="en-US" sz="1300" dirty="0">
                         <a:latin typeface="Times New Roman" charset="0"/>
                         <a:ea typeface="Times New Roman" charset="0"/>
                         <a:cs typeface="Times New Roman" charset="0"/>
@@ -4565,7 +4654,7 @@
                         <a:buNone/>
                       </a:pPr>
                       <a:r>
-                        <a:rPr lang="en-US" sz="1100" dirty="0">
+                        <a:rPr lang="en-US" sz="1300" dirty="0">
                           <a:solidFill>
                             <a:srgbClr val="2D2D3A"/>
                           </a:solidFill>
@@ -4575,7 +4664,7 @@
                         </a:rPr>
                         <a:t>EIF (Внешние файлы)</a:t>
                       </a:r>
-                      <a:endParaRPr lang="en-US" sz="1100" dirty="0">
+                      <a:endParaRPr lang="en-US" sz="1300" dirty="0">
                         <a:latin typeface="Times New Roman" charset="0"/>
                         <a:ea typeface="Times New Roman" charset="0"/>
                         <a:cs typeface="Times New Roman" charset="0"/>
@@ -4633,7 +4722,7 @@
                         <a:buNone/>
                       </a:pPr>
                       <a:r>
-                        <a:rPr lang="en-US" sz="1100" dirty="0">
+                        <a:rPr lang="en-US" sz="1300" dirty="0">
                           <a:solidFill>
                             <a:srgbClr val="2D2D3A"/>
                           </a:solidFill>
@@ -4643,7 +4732,7 @@
                         </a:rPr>
                         <a:t>Внешняя база справочников реплики 1С</a:t>
                       </a:r>
-                      <a:endParaRPr lang="en-US" sz="1100" dirty="0">
+                      <a:endParaRPr lang="en-US" sz="1300" dirty="0">
                         <a:latin typeface="Times New Roman" charset="0"/>
                         <a:ea typeface="Times New Roman" charset="0"/>
                         <a:cs typeface="Times New Roman" charset="0"/>
@@ -4701,7 +4790,7 @@
                         <a:buNone/>
                       </a:pPr>
                       <a:r>
-                        <a:rPr lang="en-US" sz="1100" dirty="0">
+                        <a:rPr lang="en-US" sz="1300" dirty="0">
                           <a:solidFill>
                             <a:srgbClr val="2D2D3A"/>
                           </a:solidFill>
@@ -4711,7 +4800,7 @@
                         </a:rPr>
                         <a:t>Низкая</a:t>
                       </a:r>
-                      <a:endParaRPr lang="en-US" sz="1100" dirty="0">
+                      <a:endParaRPr lang="en-US" sz="1300" dirty="0">
                         <a:latin typeface="Times New Roman" charset="0"/>
                         <a:ea typeface="Times New Roman" charset="0"/>
                         <a:cs typeface="Times New Roman" charset="0"/>
@@ -4769,7 +4858,7 @@
                         <a:buNone/>
                       </a:pPr>
                       <a:r>
-                        <a:rPr lang="en-US" sz="1100" dirty="0">
+                        <a:rPr lang="en-US" sz="1300" dirty="0">
                           <a:solidFill>
                             <a:srgbClr val="2D2D3A"/>
                           </a:solidFill>
@@ -4779,7 +4868,7 @@
                         </a:rPr>
                         <a:t>1</a:t>
                       </a:r>
-                      <a:endParaRPr lang="en-US" sz="1100" dirty="0">
+                      <a:endParaRPr lang="en-US" sz="1300" dirty="0">
                         <a:latin typeface="Times New Roman" charset="0"/>
                         <a:ea typeface="Times New Roman" charset="0"/>
                         <a:cs typeface="Times New Roman" charset="0"/>
@@ -4837,7 +4926,7 @@
                         <a:buNone/>
                       </a:pPr>
                       <a:r>
-                        <a:rPr lang="en-US" sz="1100" dirty="0">
+                        <a:rPr lang="en-US" sz="1300" dirty="0">
                           <a:solidFill>
                             <a:srgbClr val="2D2D3A"/>
                           </a:solidFill>
@@ -4847,7 +4936,7 @@
                         </a:rPr>
                         <a:t>5</a:t>
                       </a:r>
-                      <a:endParaRPr lang="en-US" sz="1100" dirty="0">
+                      <a:endParaRPr lang="en-US" sz="1300" dirty="0">
                         <a:latin typeface="Times New Roman" charset="0"/>
                         <a:ea typeface="Times New Roman" charset="0"/>
                         <a:cs typeface="Times New Roman" charset="0"/>
@@ -4905,7 +4994,7 @@
                         <a:buNone/>
                       </a:pPr>
                       <a:r>
-                        <a:rPr lang="en-US" sz="1100" dirty="0">
+                        <a:rPr lang="en-US" sz="1300" dirty="0">
                           <a:solidFill>
                             <a:srgbClr val="2D2D3A"/>
                           </a:solidFill>
@@ -4915,7 +5004,7 @@
                         </a:rPr>
                         <a:t>5</a:t>
                       </a:r>
-                      <a:endParaRPr lang="en-US" sz="1100" dirty="0">
+                      <a:endParaRPr lang="en-US" sz="1300" dirty="0">
                         <a:latin typeface="Times New Roman" charset="0"/>
                         <a:ea typeface="Times New Roman" charset="0"/>
                         <a:cs typeface="Times New Roman" charset="0"/>
@@ -4975,7 +5064,7 @@
                         <a:buNone/>
                       </a:pPr>
                       <a:r>
-                        <a:rPr lang="en-US" sz="1100" b="1" dirty="0">
+                        <a:rPr lang="en-US" sz="1300" b="1" dirty="0">
                           <a:solidFill>
                             <a:srgbClr val="FFFFFF"/>
                           </a:solidFill>
@@ -4985,7 +5074,7 @@
                         </a:rPr>
                         <a:t>Итого UFP</a:t>
                       </a:r>
-                      <a:endParaRPr lang="en-US" sz="1100" dirty="0">
+                      <a:endParaRPr lang="en-US" sz="1300" dirty="0">
                         <a:latin typeface="Times New Roman" charset="0"/>
                         <a:ea typeface="Times New Roman" charset="0"/>
                         <a:cs typeface="Times New Roman" charset="0"/>
@@ -5043,7 +5132,7 @@
                         <a:buNone/>
                       </a:pPr>
                       <a:r>
-                        <a:rPr lang="en-US" sz="1100" dirty="0">
+                        <a:rPr lang="en-US" sz="1300" dirty="0">
                           <a:solidFill>
                             <a:srgbClr val="FFFFFF"/>
                           </a:solidFill>
@@ -5053,7 +5142,7 @@
                         </a:rPr>
                         <a:t>Невыровненный функциональный объем</a:t>
                       </a:r>
-                      <a:endParaRPr lang="en-US" sz="1100" dirty="0">
+                      <a:endParaRPr lang="en-US" sz="1300" dirty="0">
                         <a:latin typeface="Times New Roman" charset="0"/>
                         <a:ea typeface="Times New Roman" charset="0"/>
                         <a:cs typeface="Times New Roman" charset="0"/>
@@ -5111,7 +5200,7 @@
                         <a:buNone/>
                       </a:pPr>
                       <a:r>
-                        <a:rPr lang="en-US" sz="1100" dirty="0">
+                        <a:rPr lang="en-US" sz="1300" dirty="0">
                           <a:solidFill>
                             <a:srgbClr val="FFFFFF"/>
                           </a:solidFill>
@@ -5121,7 +5210,7 @@
                         </a:rPr>
                         <a:t>—</a:t>
                       </a:r>
-                      <a:endParaRPr lang="en-US" sz="1100" dirty="0">
+                      <a:endParaRPr lang="en-US" sz="1300" dirty="0">
                         <a:latin typeface="Times New Roman" charset="0"/>
                         <a:ea typeface="Times New Roman" charset="0"/>
                         <a:cs typeface="Times New Roman" charset="0"/>
@@ -5179,7 +5268,7 @@
                         <a:buNone/>
                       </a:pPr>
                       <a:r>
-                        <a:rPr lang="en-US" sz="1100" dirty="0">
+                        <a:rPr lang="en-US" sz="1300" dirty="0">
                           <a:solidFill>
                             <a:srgbClr val="FFFFFF"/>
                           </a:solidFill>
@@ -5189,7 +5278,7 @@
                         </a:rPr>
                         <a:t>—</a:t>
                       </a:r>
-                      <a:endParaRPr lang="en-US" sz="1100" dirty="0">
+                      <a:endParaRPr lang="en-US" sz="1300" dirty="0">
                         <a:latin typeface="Times New Roman" charset="0"/>
                         <a:ea typeface="Times New Roman" charset="0"/>
                         <a:cs typeface="Times New Roman" charset="0"/>
@@ -5247,7 +5336,7 @@
                         <a:buNone/>
                       </a:pPr>
                       <a:r>
-                        <a:rPr lang="en-US" sz="1100" dirty="0">
+                        <a:rPr lang="en-US" sz="1300" dirty="0">
                           <a:solidFill>
                             <a:srgbClr val="FFFFFF"/>
                           </a:solidFill>
@@ -5257,7 +5346,7 @@
                         </a:rPr>
                         <a:t>Количество</a:t>
                       </a:r>
-                      <a:endParaRPr lang="en-US" sz="1100" dirty="0">
+                      <a:endParaRPr lang="en-US" sz="1300" dirty="0">
                         <a:latin typeface="Times New Roman" charset="0"/>
                         <a:ea typeface="Times New Roman" charset="0"/>
                         <a:cs typeface="Times New Roman" charset="0"/>
@@ -5315,7 +5404,7 @@
                         <a:buNone/>
                       </a:pPr>
                       <a:r>
-                        <a:rPr lang="en-US" sz="1100" b="1" dirty="0">
+                        <a:rPr lang="en-US" sz="1300" b="1" dirty="0">
                           <a:solidFill>
                             <a:srgbClr val="FFFFFF"/>
                           </a:solidFill>
@@ -5325,7 +5414,7 @@
                         </a:rPr>
                         <a:t>101 FP</a:t>
                       </a:r>
-                      <a:endParaRPr lang="en-US" sz="1100" dirty="0">
+                      <a:endParaRPr lang="en-US" sz="1300" dirty="0">
                         <a:latin typeface="Times New Roman" charset="0"/>
                         <a:ea typeface="Times New Roman" charset="0"/>
                         <a:cs typeface="Times New Roman" charset="0"/>
@@ -5509,7 +5598,7 @@
               <a:buNone/>
             </a:pPr>
             <a:r>
-              <a:rPr lang="en-US" sz="1200" b="1" dirty="0">
+              <a:rPr lang="en-US" sz="1400" b="1" dirty="0">
                 <a:solidFill>
                   <a:srgbClr val="1A1A2E"/>
                 </a:solidFill>
@@ -5519,7 +5608,7 @@
               </a:rPr>
               <a:t>Назначение поправок (VAF) и шкала оценок</a:t>
             </a:r>
-            <a:endParaRPr lang="en-US" sz="1200" dirty="0"/>
+            <a:endParaRPr lang="en-US" sz="1400" dirty="0"/>
           </a:p>
         </p:txBody>
       </p:sp>
@@ -5548,7 +5637,7 @@
               <a:buNone/>
             </a:pPr>
             <a:r>
-              <a:rPr lang="en-US" sz="1600" dirty="0">
+              <a:rPr lang="en-US" sz="1800" dirty="0">
                 <a:solidFill>
                   <a:srgbClr val="2D2D3A"/>
                 </a:solidFill>
@@ -5558,20 +5647,20 @@
               </a:rPr>
               <a:t>Невыровненные функциональные точки UFP оценивают только объем данных. Но сложность написания кода зависит еще от нефункциональных параметров: производительности, распределенности, надежности и т.д.</a:t>
             </a:r>
-            <a:endParaRPr lang="en-US" sz="1600" dirty="0"/>
+            <a:endParaRPr lang="en-US" sz="1800" dirty="0"/>
           </a:p>
           <a:p>
             <a:pPr algn="l" indent="0" marL="0">
               <a:buNone/>
             </a:pPr>
-            <a:endParaRPr lang="en-US" sz="1600" dirty="0"/>
+            <a:endParaRPr lang="en-US" sz="1800" dirty="0"/>
           </a:p>
           <a:p>
             <a:pPr algn="l" indent="0" marL="0">
               <a:buNone/>
             </a:pPr>
             <a:r>
-              <a:rPr lang="en-US" sz="1600" dirty="0">
+              <a:rPr lang="en-US" sz="1800" dirty="0">
                 <a:solidFill>
                   <a:srgbClr val="2D2D3A"/>
                 </a:solidFill>
@@ -5581,20 +5670,20 @@
               </a:rPr>
               <a:t>Для этого IFPUG вводит коэффициент VAF на основе оценки 14 системных характеристик от 0 до 5.</a:t>
             </a:r>
-            <a:endParaRPr lang="en-US" sz="1600" dirty="0"/>
+            <a:endParaRPr lang="en-US" sz="1800" dirty="0"/>
           </a:p>
           <a:p>
             <a:pPr algn="l" indent="0" marL="0">
               <a:buNone/>
             </a:pPr>
-            <a:endParaRPr lang="en-US" sz="1600" dirty="0"/>
+            <a:endParaRPr lang="en-US" sz="1800" dirty="0"/>
           </a:p>
           <a:p>
             <a:pPr algn="l" indent="0" marL="0">
               <a:buNone/>
             </a:pPr>
             <a:r>
-              <a:rPr lang="en-US" sz="1600" dirty="0">
+              <a:rPr lang="en-US" sz="1800" dirty="0">
                 <a:solidFill>
                   <a:srgbClr val="2D2D3A"/>
                 </a:solidFill>
@@ -5604,14 +5693,14 @@
               </a:rPr>
               <a:t>Шкала оценок характеристик:</a:t>
             </a:r>
-            <a:endParaRPr lang="en-US" sz="1600" dirty="0"/>
+            <a:endParaRPr lang="en-US" sz="1800" dirty="0"/>
           </a:p>
           <a:p>
             <a:pPr algn="l" indent="0" marL="0">
               <a:buNone/>
             </a:pPr>
             <a:r>
-              <a:rPr lang="en-US" sz="1600" dirty="0">
+              <a:rPr lang="en-US" sz="1800" dirty="0">
                 <a:solidFill>
                   <a:srgbClr val="2D2D3A"/>
                 </a:solidFill>
@@ -5621,14 +5710,14 @@
               </a:rPr>
               <a:t>• 0 — Отсутствует или не имеет влияния.</a:t>
             </a:r>
-            <a:endParaRPr lang="en-US" sz="1600" dirty="0"/>
+            <a:endParaRPr lang="en-US" sz="1800" dirty="0"/>
           </a:p>
           <a:p>
             <a:pPr algn="l" indent="0" marL="0">
               <a:buNone/>
             </a:pPr>
             <a:r>
-              <a:rPr lang="en-US" sz="1600" dirty="0">
+              <a:rPr lang="en-US" sz="1800" dirty="0">
                 <a:solidFill>
                   <a:srgbClr val="2D2D3A"/>
                 </a:solidFill>
@@ -5638,14 +5727,14 @@
               </a:rPr>
               <a:t>• 1 — Минимальное влияние.</a:t>
             </a:r>
-            <a:endParaRPr lang="en-US" sz="1600" dirty="0"/>
+            <a:endParaRPr lang="en-US" sz="1800" dirty="0"/>
           </a:p>
           <a:p>
             <a:pPr algn="l" indent="0" marL="0">
               <a:buNone/>
             </a:pPr>
             <a:r>
-              <a:rPr lang="en-US" sz="1600" dirty="0">
+              <a:rPr lang="en-US" sz="1800" dirty="0">
                 <a:solidFill>
                   <a:srgbClr val="2D2D3A"/>
                 </a:solidFill>
@@ -5655,14 +5744,14 @@
               </a:rPr>
               <a:t>• 2 — Умеренное влияние.</a:t>
             </a:r>
-            <a:endParaRPr lang="en-US" sz="1600" dirty="0"/>
+            <a:endParaRPr lang="en-US" sz="1800" dirty="0"/>
           </a:p>
           <a:p>
             <a:pPr algn="l" indent="0" marL="0">
               <a:buNone/>
             </a:pPr>
             <a:r>
-              <a:rPr lang="en-US" sz="1600" dirty="0">
+              <a:rPr lang="en-US" sz="1800" dirty="0">
                 <a:solidFill>
                   <a:srgbClr val="2D2D3A"/>
                 </a:solidFill>
@@ -5672,14 +5761,14 @@
               </a:rPr>
               <a:t>• 3 — Среднее влияние.</a:t>
             </a:r>
-            <a:endParaRPr lang="en-US" sz="1600" dirty="0"/>
+            <a:endParaRPr lang="en-US" sz="1800" dirty="0"/>
           </a:p>
           <a:p>
             <a:pPr algn="l" indent="0" marL="0">
               <a:buNone/>
             </a:pPr>
             <a:r>
-              <a:rPr lang="en-US" sz="1600" dirty="0">
+              <a:rPr lang="en-US" sz="1800" dirty="0">
                 <a:solidFill>
                   <a:srgbClr val="2D2D3A"/>
                 </a:solidFill>
@@ -5689,14 +5778,14 @@
               </a:rPr>
               <a:t>• 4 — Сильное влияние.</a:t>
             </a:r>
-            <a:endParaRPr lang="en-US" sz="1600" dirty="0"/>
+            <a:endParaRPr lang="en-US" sz="1800" dirty="0"/>
           </a:p>
           <a:p>
             <a:pPr algn="l" indent="0" marL="0">
               <a:buNone/>
             </a:pPr>
             <a:r>
-              <a:rPr lang="en-US" sz="1600" dirty="0">
+              <a:rPr lang="en-US" sz="1800" dirty="0">
                 <a:solidFill>
                   <a:srgbClr val="2D2D3A"/>
                 </a:solidFill>
@@ -5706,7 +5795,7 @@
               </a:rPr>
               <a:t>• 5 — Критическое влияние на всех уровнях.</a:t>
             </a:r>
-            <a:endParaRPr lang="en-US" sz="1600" dirty="0"/>
+            <a:endParaRPr lang="en-US" sz="1800" dirty="0"/>
           </a:p>
         </p:txBody>
       </p:sp>
@@ -5819,7 +5908,7 @@
                         <a:buNone/>
                       </a:pPr>
                       <a:r>
-                        <a:rPr lang="en-US" sz="1000" b="1" dirty="0">
+                        <a:rPr lang="en-US" sz="1300" b="1" dirty="0">
                           <a:solidFill>
                             <a:srgbClr val="FFFFFF"/>
                           </a:solidFill>
@@ -5829,7 +5918,7 @@
                         </a:rPr>
                         <a:t>№</a:t>
                       </a:r>
-                      <a:endParaRPr lang="en-US" sz="1000" dirty="0">
+                      <a:endParaRPr lang="en-US" sz="1300" dirty="0">
                         <a:latin typeface="Times New Roman" charset="0"/>
                         <a:ea typeface="Times New Roman" charset="0"/>
                         <a:cs typeface="Times New Roman" charset="0"/>
@@ -5887,7 +5976,7 @@
                         <a:buNone/>
                       </a:pPr>
                       <a:r>
-                        <a:rPr lang="en-US" sz="1000" b="1" dirty="0">
+                        <a:rPr lang="en-US" sz="1300" b="1" dirty="0">
                           <a:solidFill>
                             <a:srgbClr val="FFFFFF"/>
                           </a:solidFill>
@@ -5897,7 +5986,7 @@
                         </a:rPr>
                         <a:t>Характеристика GSC</a:t>
                       </a:r>
-                      <a:endParaRPr lang="en-US" sz="1000" dirty="0">
+                      <a:endParaRPr lang="en-US" sz="1300" dirty="0">
                         <a:latin typeface="Times New Roman" charset="0"/>
                         <a:ea typeface="Times New Roman" charset="0"/>
                         <a:cs typeface="Times New Roman" charset="0"/>
@@ -5955,7 +6044,7 @@
                         <a:buNone/>
                       </a:pPr>
                       <a:r>
-                        <a:rPr lang="en-US" sz="1000" b="1" dirty="0">
+                        <a:rPr lang="en-US" sz="1300" b="1" dirty="0">
                           <a:solidFill>
                             <a:srgbClr val="FFFFFF"/>
                           </a:solidFill>
@@ -5965,7 +6054,7 @@
                         </a:rPr>
                         <a:t>Балл</a:t>
                       </a:r>
-                      <a:endParaRPr lang="en-US" sz="1000" dirty="0">
+                      <a:endParaRPr lang="en-US" sz="1300" dirty="0">
                         <a:latin typeface="Times New Roman" charset="0"/>
                         <a:ea typeface="Times New Roman" charset="0"/>
                         <a:cs typeface="Times New Roman" charset="0"/>
@@ -6023,7 +6112,7 @@
                         <a:buNone/>
                       </a:pPr>
                       <a:r>
-                        <a:rPr lang="en-US" sz="1000" b="1" dirty="0">
+                        <a:rPr lang="en-US" sz="1300" b="1" dirty="0">
                           <a:solidFill>
                             <a:srgbClr val="FFFFFF"/>
                           </a:solidFill>
@@ -6033,7 +6122,7 @@
                         </a:rPr>
                         <a:t>Обоснование для client-portal</a:t>
                       </a:r>
-                      <a:endParaRPr lang="en-US" sz="1000" dirty="0">
+                      <a:endParaRPr lang="en-US" sz="1300" dirty="0">
                         <a:latin typeface="Times New Roman" charset="0"/>
                         <a:ea typeface="Times New Roman" charset="0"/>
                         <a:cs typeface="Times New Roman" charset="0"/>
@@ -6093,7 +6182,7 @@
                         <a:buNone/>
                       </a:pPr>
                       <a:r>
-                        <a:rPr lang="en-US" sz="1000" dirty="0">
+                        <a:rPr lang="en-US" sz="1300" dirty="0">
                           <a:solidFill>
                             <a:srgbClr val="2D2D3A"/>
                           </a:solidFill>
@@ -6103,7 +6192,7 @@
                         </a:rPr>
                         <a:t>1</a:t>
                       </a:r>
-                      <a:endParaRPr lang="en-US" sz="1000" dirty="0">
+                      <a:endParaRPr lang="en-US" sz="1300" dirty="0">
                         <a:latin typeface="Times New Roman" charset="0"/>
                         <a:ea typeface="Times New Roman" charset="0"/>
                         <a:cs typeface="Times New Roman" charset="0"/>
@@ -6161,7 +6250,7 @@
                         <a:buNone/>
                       </a:pPr>
                       <a:r>
-                        <a:rPr lang="en-US" sz="1000" dirty="0">
+                        <a:rPr lang="en-US" sz="1300" dirty="0">
                           <a:solidFill>
                             <a:srgbClr val="2D2D3A"/>
                           </a:solidFill>
@@ -6171,7 +6260,7 @@
                         </a:rPr>
                         <a:t>Передача данных</a:t>
                       </a:r>
-                      <a:endParaRPr lang="en-US" sz="1000" dirty="0">
+                      <a:endParaRPr lang="en-US" sz="1300" dirty="0">
                         <a:latin typeface="Times New Roman" charset="0"/>
                         <a:ea typeface="Times New Roman" charset="0"/>
                         <a:cs typeface="Times New Roman" charset="0"/>
@@ -6229,7 +6318,7 @@
                         <a:buNone/>
                       </a:pPr>
                       <a:r>
-                        <a:rPr lang="en-US" sz="1000" dirty="0">
+                        <a:rPr lang="en-US" sz="1300" dirty="0">
                           <a:solidFill>
                             <a:srgbClr val="2D2D3A"/>
                           </a:solidFill>
@@ -6239,7 +6328,7 @@
                         </a:rPr>
                         <a:t>4</a:t>
                       </a:r>
-                      <a:endParaRPr lang="en-US" sz="1000" dirty="0">
+                      <a:endParaRPr lang="en-US" sz="1300" dirty="0">
                         <a:latin typeface="Times New Roman" charset="0"/>
                         <a:ea typeface="Times New Roman" charset="0"/>
                         <a:cs typeface="Times New Roman" charset="0"/>
@@ -6297,7 +6386,7 @@
                         <a:buNone/>
                       </a:pPr>
                       <a:r>
-                        <a:rPr lang="en-US" sz="1000" dirty="0">
+                        <a:rPr lang="en-US" sz="1300" dirty="0">
                           <a:solidFill>
                             <a:srgbClr val="2D2D3A"/>
                           </a:solidFill>
@@ -6307,7 +6396,7 @@
                         </a:rPr>
                         <a:t>Интенсивный обмен данными через REST API и WebSocket</a:t>
                       </a:r>
-                      <a:endParaRPr lang="en-US" sz="1000" dirty="0">
+                      <a:endParaRPr lang="en-US" sz="1300" dirty="0">
                         <a:latin typeface="Times New Roman" charset="0"/>
                         <a:ea typeface="Times New Roman" charset="0"/>
                         <a:cs typeface="Times New Roman" charset="0"/>
@@ -6367,7 +6456,7 @@
                         <a:buNone/>
                       </a:pPr>
                       <a:r>
-                        <a:rPr lang="en-US" sz="1000" dirty="0">
+                        <a:rPr lang="en-US" sz="1300" dirty="0">
                           <a:solidFill>
                             <a:srgbClr val="2D2D3A"/>
                           </a:solidFill>
@@ -6377,7 +6466,7 @@
                         </a:rPr>
                         <a:t>2</a:t>
                       </a:r>
-                      <a:endParaRPr lang="en-US" sz="1000" dirty="0">
+                      <a:endParaRPr lang="en-US" sz="1300" dirty="0">
                         <a:latin typeface="Times New Roman" charset="0"/>
                         <a:ea typeface="Times New Roman" charset="0"/>
                         <a:cs typeface="Times New Roman" charset="0"/>
@@ -6435,7 +6524,7 @@
                         <a:buNone/>
                       </a:pPr>
                       <a:r>
-                        <a:rPr lang="en-US" sz="1000" dirty="0">
+                        <a:rPr lang="en-US" sz="1300" dirty="0">
                           <a:solidFill>
                             <a:srgbClr val="2D2D3A"/>
                           </a:solidFill>
@@ -6445,7 +6534,7 @@
                         </a:rPr>
                         <a:t>Распределенная обработка</a:t>
                       </a:r>
-                      <a:endParaRPr lang="en-US" sz="1000" dirty="0">
+                      <a:endParaRPr lang="en-US" sz="1300" dirty="0">
                         <a:latin typeface="Times New Roman" charset="0"/>
                         <a:ea typeface="Times New Roman" charset="0"/>
                         <a:cs typeface="Times New Roman" charset="0"/>
@@ -6503,7 +6592,7 @@
                         <a:buNone/>
                       </a:pPr>
                       <a:r>
-                        <a:rPr lang="en-US" sz="1000" dirty="0">
+                        <a:rPr lang="en-US" sz="1300" dirty="0">
                           <a:solidFill>
                             <a:srgbClr val="2D2D3A"/>
                           </a:solidFill>
@@ -6513,7 +6602,7 @@
                         </a:rPr>
                         <a:t>3</a:t>
                       </a:r>
-                      <a:endParaRPr lang="en-US" sz="1000" dirty="0">
+                      <a:endParaRPr lang="en-US" sz="1300" dirty="0">
                         <a:latin typeface="Times New Roman" charset="0"/>
                         <a:ea typeface="Times New Roman" charset="0"/>
                         <a:cs typeface="Times New Roman" charset="0"/>
@@ -6571,7 +6660,7 @@
                         <a:buNone/>
                       </a:pPr>
                       <a:r>
-                        <a:rPr lang="en-US" sz="1000" dirty="0">
+                        <a:rPr lang="en-US" sz="1300" dirty="0">
                           <a:solidFill>
                             <a:srgbClr val="2D2D3A"/>
                           </a:solidFill>
@@ -6581,7 +6670,7 @@
                         </a:rPr>
                         <a:t>Клиент-серверная архитектура (React SPA, Node.js, Postgres)</a:t>
                       </a:r>
-                      <a:endParaRPr lang="en-US" sz="1000" dirty="0">
+                      <a:endParaRPr lang="en-US" sz="1300" dirty="0">
                         <a:latin typeface="Times New Roman" charset="0"/>
                         <a:ea typeface="Times New Roman" charset="0"/>
                         <a:cs typeface="Times New Roman" charset="0"/>
@@ -6641,7 +6730,7 @@
                         <a:buNone/>
                       </a:pPr>
                       <a:r>
-                        <a:rPr lang="en-US" sz="1000" dirty="0">
+                        <a:rPr lang="en-US" sz="1300" dirty="0">
                           <a:solidFill>
                             <a:srgbClr val="2D2D3A"/>
                           </a:solidFill>
@@ -6651,7 +6740,7 @@
                         </a:rPr>
                         <a:t>3</a:t>
                       </a:r>
-                      <a:endParaRPr lang="en-US" sz="1000" dirty="0">
+                      <a:endParaRPr lang="en-US" sz="1300" dirty="0">
                         <a:latin typeface="Times New Roman" charset="0"/>
                         <a:ea typeface="Times New Roman" charset="0"/>
                         <a:cs typeface="Times New Roman" charset="0"/>
@@ -6709,7 +6798,7 @@
                         <a:buNone/>
                       </a:pPr>
                       <a:r>
-                        <a:rPr lang="en-US" sz="1000" dirty="0">
+                        <a:rPr lang="en-US" sz="1300" dirty="0">
                           <a:solidFill>
                             <a:srgbClr val="2D2D3A"/>
                           </a:solidFill>
@@ -6719,7 +6808,7 @@
                         </a:rPr>
                         <a:t>Производительность</a:t>
                       </a:r>
-                      <a:endParaRPr lang="en-US" sz="1000" dirty="0">
+                      <a:endParaRPr lang="en-US" sz="1300" dirty="0">
                         <a:latin typeface="Times New Roman" charset="0"/>
                         <a:ea typeface="Times New Roman" charset="0"/>
                         <a:cs typeface="Times New Roman" charset="0"/>
@@ -6777,7 +6866,7 @@
                         <a:buNone/>
                       </a:pPr>
                       <a:r>
-                        <a:rPr lang="en-US" sz="1000" dirty="0">
+                        <a:rPr lang="en-US" sz="1300" dirty="0">
                           <a:solidFill>
                             <a:srgbClr val="2D2D3A"/>
                           </a:solidFill>
@@ -6787,7 +6876,7 @@
                         </a:rPr>
                         <a:t>3</a:t>
                       </a:r>
-                      <a:endParaRPr lang="en-US" sz="1000" dirty="0">
+                      <a:endParaRPr lang="en-US" sz="1300" dirty="0">
                         <a:latin typeface="Times New Roman" charset="0"/>
                         <a:ea typeface="Times New Roman" charset="0"/>
                         <a:cs typeface="Times New Roman" charset="0"/>
@@ -6845,7 +6934,7 @@
                         <a:buNone/>
                       </a:pPr>
                       <a:r>
-                        <a:rPr lang="en-US" sz="1000" dirty="0">
+                        <a:rPr lang="en-US" sz="1300" dirty="0">
                           <a:solidFill>
                             <a:srgbClr val="2D2D3A"/>
                           </a:solidFill>
@@ -6855,7 +6944,7 @@
                         </a:rPr>
                         <a:t>Требование времени отклика API &lt;150 мс для поддержки чата</a:t>
                       </a:r>
-                      <a:endParaRPr lang="en-US" sz="1000" dirty="0">
+                      <a:endParaRPr lang="en-US" sz="1300" dirty="0">
                         <a:latin typeface="Times New Roman" charset="0"/>
                         <a:ea typeface="Times New Roman" charset="0"/>
                         <a:cs typeface="Times New Roman" charset="0"/>
@@ -6915,7 +7004,7 @@
                         <a:buNone/>
                       </a:pPr>
                       <a:r>
-                        <a:rPr lang="en-US" sz="1000" dirty="0">
+                        <a:rPr lang="en-US" sz="1300" dirty="0">
                           <a:solidFill>
                             <a:srgbClr val="2D2D3A"/>
                           </a:solidFill>
@@ -6925,7 +7014,7 @@
                         </a:rPr>
                         <a:t>4</a:t>
                       </a:r>
-                      <a:endParaRPr lang="en-US" sz="1000" dirty="0">
+                      <a:endParaRPr lang="en-US" sz="1300" dirty="0">
                         <a:latin typeface="Times New Roman" charset="0"/>
                         <a:ea typeface="Times New Roman" charset="0"/>
                         <a:cs typeface="Times New Roman" charset="0"/>
@@ -6983,7 +7072,7 @@
                         <a:buNone/>
                       </a:pPr>
                       <a:r>
-                        <a:rPr lang="en-US" sz="1000" dirty="0">
+                        <a:rPr lang="en-US" sz="1300" dirty="0">
                           <a:solidFill>
                             <a:srgbClr val="2D2D3A"/>
                           </a:solidFill>
@@ -6993,7 +7082,7 @@
                         </a:rPr>
                         <a:t>Конфигурационная нагрузка</a:t>
                       </a:r>
-                      <a:endParaRPr lang="en-US" sz="1000" dirty="0">
+                      <a:endParaRPr lang="en-US" sz="1300" dirty="0">
                         <a:latin typeface="Times New Roman" charset="0"/>
                         <a:ea typeface="Times New Roman" charset="0"/>
                         <a:cs typeface="Times New Roman" charset="0"/>
@@ -7051,7 +7140,7 @@
                         <a:buNone/>
                       </a:pPr>
                       <a:r>
-                        <a:rPr lang="en-US" sz="1000" dirty="0">
+                        <a:rPr lang="en-US" sz="1300" dirty="0">
                           <a:solidFill>
                             <a:srgbClr val="2D2D3A"/>
                           </a:solidFill>
@@ -7061,7 +7150,7 @@
                         </a:rPr>
                         <a:t>2</a:t>
                       </a:r>
-                      <a:endParaRPr lang="en-US" sz="1000" dirty="0">
+                      <a:endParaRPr lang="en-US" sz="1300" dirty="0">
                         <a:latin typeface="Times New Roman" charset="0"/>
                         <a:ea typeface="Times New Roman" charset="0"/>
                         <a:cs typeface="Times New Roman" charset="0"/>
@@ -7119,7 +7208,7 @@
                         <a:buNone/>
                       </a:pPr>
                       <a:r>
-                        <a:rPr lang="en-US" sz="1000" dirty="0">
+                        <a:rPr lang="en-US" sz="1300" dirty="0">
                           <a:solidFill>
                             <a:srgbClr val="2D2D3A"/>
                           </a:solidFill>
@@ -7129,7 +7218,7 @@
                         </a:rPr>
                         <a:t>Настройка окружения через .env переменные среды</a:t>
                       </a:r>
-                      <a:endParaRPr lang="en-US" sz="1000" dirty="0">
+                      <a:endParaRPr lang="en-US" sz="1300" dirty="0">
                         <a:latin typeface="Times New Roman" charset="0"/>
                         <a:ea typeface="Times New Roman" charset="0"/>
                         <a:cs typeface="Times New Roman" charset="0"/>
@@ -7189,7 +7278,7 @@
                         <a:buNone/>
                       </a:pPr>
                       <a:r>
-                        <a:rPr lang="en-US" sz="1000" dirty="0">
+                        <a:rPr lang="en-US" sz="1300" dirty="0">
                           <a:solidFill>
                             <a:srgbClr val="2D2D3A"/>
                           </a:solidFill>
@@ -7199,7 +7288,7 @@
                         </a:rPr>
                         <a:t>5</a:t>
                       </a:r>
-                      <a:endParaRPr lang="en-US" sz="1000" dirty="0">
+                      <a:endParaRPr lang="en-US" sz="1300" dirty="0">
                         <a:latin typeface="Times New Roman" charset="0"/>
                         <a:ea typeface="Times New Roman" charset="0"/>
                         <a:cs typeface="Times New Roman" charset="0"/>
@@ -7257,7 +7346,7 @@
                         <a:buNone/>
                       </a:pPr>
                       <a:r>
-                        <a:rPr lang="en-US" sz="1000" dirty="0">
+                        <a:rPr lang="en-US" sz="1300" dirty="0">
                           <a:solidFill>
                             <a:srgbClr val="2D2D3A"/>
                           </a:solidFill>
@@ -7267,7 +7356,7 @@
                         </a:rPr>
                         <a:t>Частота транзакций</a:t>
                       </a:r>
-                      <a:endParaRPr lang="en-US" sz="1000" dirty="0">
+                      <a:endParaRPr lang="en-US" sz="1300" dirty="0">
                         <a:latin typeface="Times New Roman" charset="0"/>
                         <a:ea typeface="Times New Roman" charset="0"/>
                         <a:cs typeface="Times New Roman" charset="0"/>
@@ -7325,7 +7414,7 @@
                         <a:buNone/>
                       </a:pPr>
                       <a:r>
-                        <a:rPr lang="en-US" sz="1000" dirty="0">
+                        <a:rPr lang="en-US" sz="1300" dirty="0">
                           <a:solidFill>
                             <a:srgbClr val="2D2D3A"/>
                           </a:solidFill>
@@ -7335,7 +7424,7 @@
                         </a:rPr>
                         <a:t>4</a:t>
                       </a:r>
-                      <a:endParaRPr lang="en-US" sz="1000" dirty="0">
+                      <a:endParaRPr lang="en-US" sz="1300" dirty="0">
                         <a:latin typeface="Times New Roman" charset="0"/>
                         <a:ea typeface="Times New Roman" charset="0"/>
                         <a:cs typeface="Times New Roman" charset="0"/>
@@ -7393,7 +7482,7 @@
                         <a:buNone/>
                       </a:pPr>
                       <a:r>
-                        <a:rPr lang="en-US" sz="1000" dirty="0">
+                        <a:rPr lang="en-US" sz="1300" dirty="0">
                           <a:solidFill>
                             <a:srgbClr val="2D2D3A"/>
                           </a:solidFill>
@@ -7403,7 +7492,7 @@
                         </a:rPr>
                         <a:t>Высокая частота обращений к БД и чату в пиковые часы</a:t>
                       </a:r>
-                      <a:endParaRPr lang="en-US" sz="1000" dirty="0">
+                      <a:endParaRPr lang="en-US" sz="1300" dirty="0">
                         <a:latin typeface="Times New Roman" charset="0"/>
                         <a:ea typeface="Times New Roman" charset="0"/>
                         <a:cs typeface="Times New Roman" charset="0"/>
@@ -7463,7 +7552,7 @@
                         <a:buNone/>
                       </a:pPr>
                       <a:r>
-                        <a:rPr lang="en-US" sz="1000" dirty="0">
+                        <a:rPr lang="en-US" sz="1300" dirty="0">
                           <a:solidFill>
                             <a:srgbClr val="2D2D3A"/>
                           </a:solidFill>
@@ -7473,7 +7562,7 @@
                         </a:rPr>
                         <a:t>6</a:t>
                       </a:r>
-                      <a:endParaRPr lang="en-US" sz="1000" dirty="0">
+                      <a:endParaRPr lang="en-US" sz="1300" dirty="0">
                         <a:latin typeface="Times New Roman" charset="0"/>
                         <a:ea typeface="Times New Roman" charset="0"/>
                         <a:cs typeface="Times New Roman" charset="0"/>
@@ -7531,7 +7620,7 @@
                         <a:buNone/>
                       </a:pPr>
                       <a:r>
-                        <a:rPr lang="en-US" sz="1000" dirty="0">
+                        <a:rPr lang="en-US" sz="1300" dirty="0">
                           <a:solidFill>
                             <a:srgbClr val="2D2D3A"/>
                           </a:solidFill>
@@ -7541,7 +7630,7 @@
                         </a:rPr>
                         <a:t>Interactive Input (Ввод)</a:t>
                       </a:r>
-                      <a:endParaRPr lang="en-US" sz="1000" dirty="0">
+                      <a:endParaRPr lang="en-US" sz="1300" dirty="0">
                         <a:latin typeface="Times New Roman" charset="0"/>
                         <a:ea typeface="Times New Roman" charset="0"/>
                         <a:cs typeface="Times New Roman" charset="0"/>
@@ -7599,7 +7688,7 @@
                         <a:buNone/>
                       </a:pPr>
                       <a:r>
-                        <a:rPr lang="en-US" sz="1000" dirty="0">
+                        <a:rPr lang="en-US" sz="1300" dirty="0">
                           <a:solidFill>
                             <a:srgbClr val="2D2D3A"/>
                           </a:solidFill>
@@ -7609,7 +7698,7 @@
                         </a:rPr>
                         <a:t>4</a:t>
                       </a:r>
-                      <a:endParaRPr lang="en-US" sz="1000" dirty="0">
+                      <a:endParaRPr lang="en-US" sz="1300" dirty="0">
                         <a:latin typeface="Times New Roman" charset="0"/>
                         <a:ea typeface="Times New Roman" charset="0"/>
                         <a:cs typeface="Times New Roman" charset="0"/>
@@ -7667,7 +7756,7 @@
                         <a:buNone/>
                       </a:pPr>
                       <a:r>
-                        <a:rPr lang="en-US" sz="1000" dirty="0">
+                        <a:rPr lang="en-US" sz="1300" dirty="0">
                           <a:solidFill>
                             <a:srgbClr val="2D2D3A"/>
                           </a:solidFill>
@@ -7677,7 +7766,7 @@
                         </a:rPr>
                         <a:t>Множество интерактивных форм (создание тикета, чаты)</a:t>
                       </a:r>
-                      <a:endParaRPr lang="en-US" sz="1000" dirty="0">
+                      <a:endParaRPr lang="en-US" sz="1300" dirty="0">
                         <a:latin typeface="Times New Roman" charset="0"/>
                         <a:ea typeface="Times New Roman" charset="0"/>
                         <a:cs typeface="Times New Roman" charset="0"/>
@@ -7737,7 +7826,7 @@
                         <a:buNone/>
                       </a:pPr>
                       <a:r>
-                        <a:rPr lang="en-US" sz="1000" dirty="0">
+                        <a:rPr lang="en-US" sz="1300" dirty="0">
                           <a:solidFill>
                             <a:srgbClr val="2D2D3A"/>
                           </a:solidFill>
@@ -7747,7 +7836,7 @@
                         </a:rPr>
                         <a:t>7</a:t>
                       </a:r>
-                      <a:endParaRPr lang="en-US" sz="1000" dirty="0">
+                      <a:endParaRPr lang="en-US" sz="1300" dirty="0">
                         <a:latin typeface="Times New Roman" charset="0"/>
                         <a:ea typeface="Times New Roman" charset="0"/>
                         <a:cs typeface="Times New Roman" charset="0"/>
@@ -7805,7 +7894,7 @@
                         <a:buNone/>
                       </a:pPr>
                       <a:r>
-                        <a:rPr lang="en-US" sz="1000" dirty="0">
+                        <a:rPr lang="en-US" sz="1300" dirty="0">
                           <a:solidFill>
                             <a:srgbClr val="2D2D3A"/>
                           </a:solidFill>
@@ -7815,7 +7904,7 @@
                         </a:rPr>
                         <a:t>Удобство пользователя</a:t>
                       </a:r>
-                      <a:endParaRPr lang="en-US" sz="1000" dirty="0">
+                      <a:endParaRPr lang="en-US" sz="1300" dirty="0">
                         <a:latin typeface="Times New Roman" charset="0"/>
                         <a:ea typeface="Times New Roman" charset="0"/>
                         <a:cs typeface="Times New Roman" charset="0"/>
@@ -7873,7 +7962,7 @@
                         <a:buNone/>
                       </a:pPr>
                       <a:r>
-                        <a:rPr lang="en-US" sz="1000" dirty="0">
+                        <a:rPr lang="en-US" sz="1300" dirty="0">
                           <a:solidFill>
                             <a:srgbClr val="2D2D3A"/>
                           </a:solidFill>
@@ -7883,7 +7972,7 @@
                         </a:rPr>
                         <a:t>4</a:t>
                       </a:r>
-                      <a:endParaRPr lang="en-US" sz="1000" dirty="0">
+                      <a:endParaRPr lang="en-US" sz="1300" dirty="0">
                         <a:latin typeface="Times New Roman" charset="0"/>
                         <a:ea typeface="Times New Roman" charset="0"/>
                         <a:cs typeface="Times New Roman" charset="0"/>
@@ -7941,7 +8030,7 @@
                         <a:buNone/>
                       </a:pPr>
                       <a:r>
-                        <a:rPr lang="en-US" sz="1000" dirty="0">
+                        <a:rPr lang="en-US" sz="1300" dirty="0">
                           <a:solidFill>
                             <a:srgbClr val="2D2D3A"/>
                           </a:solidFill>
@@ -7951,7 +8040,7 @@
                         </a:rPr>
                         <a:t>Оптимизированный UI/UX, автодополнение, валидация полей</a:t>
                       </a:r>
-                      <a:endParaRPr lang="en-US" sz="1000" dirty="0">
+                      <a:endParaRPr lang="en-US" sz="1300" dirty="0">
                         <a:latin typeface="Times New Roman" charset="0"/>
                         <a:ea typeface="Times New Roman" charset="0"/>
                         <a:cs typeface="Times New Roman" charset="0"/>
@@ -8011,7 +8100,7 @@
                         <a:buNone/>
                       </a:pPr>
                       <a:r>
-                        <a:rPr lang="en-US" sz="1000" dirty="0">
+                        <a:rPr lang="en-US" sz="1300" dirty="0">
                           <a:solidFill>
                             <a:srgbClr val="2D2D3A"/>
                           </a:solidFill>
@@ -8021,7 +8110,7 @@
                         </a:rPr>
                         <a:t>8</a:t>
                       </a:r>
-                      <a:endParaRPr lang="en-US" sz="1000" dirty="0">
+                      <a:endParaRPr lang="en-US" sz="1300" dirty="0">
                         <a:latin typeface="Times New Roman" charset="0"/>
                         <a:ea typeface="Times New Roman" charset="0"/>
                         <a:cs typeface="Times New Roman" charset="0"/>
@@ -8079,7 +8168,7 @@
                         <a:buNone/>
                       </a:pPr>
                       <a:r>
-                        <a:rPr lang="en-US" sz="1000" dirty="0">
+                        <a:rPr lang="en-US" sz="1300" dirty="0">
                           <a:solidFill>
                             <a:srgbClr val="2D2D3A"/>
                           </a:solidFill>
@@ -8089,7 +8178,7 @@
                         </a:rPr>
                         <a:t>Оперативное обновление</a:t>
                       </a:r>
-                      <a:endParaRPr lang="en-US" sz="1000" dirty="0">
+                      <a:endParaRPr lang="en-US" sz="1300" dirty="0">
                         <a:latin typeface="Times New Roman" charset="0"/>
                         <a:ea typeface="Times New Roman" charset="0"/>
                         <a:cs typeface="Times New Roman" charset="0"/>
@@ -8147,7 +8236,7 @@
                         <a:buNone/>
                       </a:pPr>
                       <a:r>
-                        <a:rPr lang="en-US" sz="1000" dirty="0">
+                        <a:rPr lang="en-US" sz="1300" dirty="0">
                           <a:solidFill>
                             <a:srgbClr val="2D2D3A"/>
                           </a:solidFill>
@@ -8157,7 +8246,7 @@
                         </a:rPr>
                         <a:t>4</a:t>
                       </a:r>
-                      <a:endParaRPr lang="en-US" sz="1000" dirty="0">
+                      <a:endParaRPr lang="en-US" sz="1300" dirty="0">
                         <a:latin typeface="Times New Roman" charset="0"/>
                         <a:ea typeface="Times New Roman" charset="0"/>
                         <a:cs typeface="Times New Roman" charset="0"/>
@@ -8215,7 +8304,7 @@
                         <a:buNone/>
                       </a:pPr>
                       <a:r>
-                        <a:rPr lang="en-US" sz="1000" dirty="0">
+                        <a:rPr lang="en-US" sz="1300" dirty="0">
                           <a:solidFill>
                             <a:srgbClr val="2D2D3A"/>
                           </a:solidFill>
@@ -8225,7 +8314,7 @@
                         </a:rPr>
                         <a:t>Мгновенное обновление статусов сообщений через WebSockets</a:t>
                       </a:r>
-                      <a:endParaRPr lang="en-US" sz="1000" dirty="0">
+                      <a:endParaRPr lang="en-US" sz="1300" dirty="0">
                         <a:latin typeface="Times New Roman" charset="0"/>
                         <a:ea typeface="Times New Roman" charset="0"/>
                         <a:cs typeface="Times New Roman" charset="0"/>
@@ -8285,7 +8374,7 @@
                         <a:buNone/>
                       </a:pPr>
                       <a:r>
-                        <a:rPr lang="en-US" sz="1000" dirty="0">
+                        <a:rPr lang="en-US" sz="1300" dirty="0">
                           <a:solidFill>
                             <a:srgbClr val="2D2D3A"/>
                           </a:solidFill>
@@ -8295,7 +8384,7 @@
                         </a:rPr>
                         <a:t>9</a:t>
                       </a:r>
-                      <a:endParaRPr lang="en-US" sz="1000" dirty="0">
+                      <a:endParaRPr lang="en-US" sz="1300" dirty="0">
                         <a:latin typeface="Times New Roman" charset="0"/>
                         <a:ea typeface="Times New Roman" charset="0"/>
                         <a:cs typeface="Times New Roman" charset="0"/>
@@ -8353,7 +8442,7 @@
                         <a:buNone/>
                       </a:pPr>
                       <a:r>
-                        <a:rPr lang="en-US" sz="1000" dirty="0">
+                        <a:rPr lang="en-US" sz="1300" dirty="0">
                           <a:solidFill>
                             <a:srgbClr val="2D2D3A"/>
                           </a:solidFill>
@@ -8363,7 +8452,7 @@
                         </a:rPr>
                         <a:t>Сложность обработки</a:t>
                       </a:r>
-                      <a:endParaRPr lang="en-US" sz="1000" dirty="0">
+                      <a:endParaRPr lang="en-US" sz="1300" dirty="0">
                         <a:latin typeface="Times New Roman" charset="0"/>
                         <a:ea typeface="Times New Roman" charset="0"/>
                         <a:cs typeface="Times New Roman" charset="0"/>
@@ -8421,7 +8510,7 @@
                         <a:buNone/>
                       </a:pPr>
                       <a:r>
-                        <a:rPr lang="en-US" sz="1000" dirty="0">
+                        <a:rPr lang="en-US" sz="1300" dirty="0">
                           <a:solidFill>
                             <a:srgbClr val="2D2D3A"/>
                           </a:solidFill>
@@ -8431,7 +8520,7 @@
                         </a:rPr>
                         <a:t>3</a:t>
                       </a:r>
-                      <a:endParaRPr lang="en-US" sz="1000" dirty="0">
+                      <a:endParaRPr lang="en-US" sz="1300" dirty="0">
                         <a:latin typeface="Times New Roman" charset="0"/>
                         <a:ea typeface="Times New Roman" charset="0"/>
                         <a:cs typeface="Times New Roman" charset="0"/>
@@ -8489,7 +8578,7 @@
                         <a:buNone/>
                       </a:pPr>
                       <a:r>
-                        <a:rPr lang="en-US" sz="1000" dirty="0">
+                        <a:rPr lang="en-US" sz="1300" dirty="0">
                           <a:solidFill>
                             <a:srgbClr val="2D2D3A"/>
                           </a:solidFill>
@@ -8499,7 +8588,7 @@
                         </a:rPr>
                         <a:t>Оптимистичная блокировка, транзакционный Outbox, JWT</a:t>
                       </a:r>
-                      <a:endParaRPr lang="en-US" sz="1000" dirty="0">
+                      <a:endParaRPr lang="en-US" sz="1300" dirty="0">
                         <a:latin typeface="Times New Roman" charset="0"/>
                         <a:ea typeface="Times New Roman" charset="0"/>
                         <a:cs typeface="Times New Roman" charset="0"/>
@@ -8559,7 +8648,7 @@
                         <a:buNone/>
                       </a:pPr>
                       <a:r>
-                        <a:rPr lang="en-US" sz="1000" dirty="0">
+                        <a:rPr lang="en-US" sz="1300" dirty="0">
                           <a:solidFill>
                             <a:srgbClr val="2D2D3A"/>
                           </a:solidFill>
@@ -8569,7 +8658,7 @@
                         </a:rPr>
                         <a:t>10</a:t>
                       </a:r>
-                      <a:endParaRPr lang="en-US" sz="1000" dirty="0">
+                      <a:endParaRPr lang="en-US" sz="1300" dirty="0">
                         <a:latin typeface="Times New Roman" charset="0"/>
                         <a:ea typeface="Times New Roman" charset="0"/>
                         <a:cs typeface="Times New Roman" charset="0"/>
@@ -8627,7 +8716,7 @@
                         <a:buNone/>
                       </a:pPr>
                       <a:r>
-                        <a:rPr lang="en-US" sz="1000" dirty="0">
+                        <a:rPr lang="en-US" sz="1300" dirty="0">
                           <a:solidFill>
                             <a:srgbClr val="2D2D3A"/>
                           </a:solidFill>
@@ -8637,7 +8726,7 @@
                         </a:rPr>
                         <a:t>Повторное использование</a:t>
                       </a:r>
-                      <a:endParaRPr lang="en-US" sz="1000" dirty="0">
+                      <a:endParaRPr lang="en-US" sz="1300" dirty="0">
                         <a:latin typeface="Times New Roman" charset="0"/>
                         <a:ea typeface="Times New Roman" charset="0"/>
                         <a:cs typeface="Times New Roman" charset="0"/>
@@ -8695,7 +8784,7 @@
                         <a:buNone/>
                       </a:pPr>
                       <a:r>
-                        <a:rPr lang="en-US" sz="1000" dirty="0">
+                        <a:rPr lang="en-US" sz="1300" dirty="0">
                           <a:solidFill>
                             <a:srgbClr val="2D2D3A"/>
                           </a:solidFill>
@@ -8705,7 +8794,7 @@
                         </a:rPr>
                         <a:t>3</a:t>
                       </a:r>
-                      <a:endParaRPr lang="en-US" sz="1000" dirty="0">
+                      <a:endParaRPr lang="en-US" sz="1300" dirty="0">
                         <a:latin typeface="Times New Roman" charset="0"/>
                         <a:ea typeface="Times New Roman" charset="0"/>
                         <a:cs typeface="Times New Roman" charset="0"/>
@@ -8763,7 +8852,7 @@
                         <a:buNone/>
                       </a:pPr>
                       <a:r>
-                        <a:rPr lang="en-US" sz="1000" dirty="0">
+                        <a:rPr lang="en-US" sz="1300" dirty="0">
                           <a:solidFill>
                             <a:srgbClr val="2D2D3A"/>
                           </a:solidFill>
@@ -8773,7 +8862,7 @@
                         </a:rPr>
                         <a:t>Модульные сервисы, общие компоненты React UI, типы TS</a:t>
                       </a:r>
-                      <a:endParaRPr lang="en-US" sz="1000" dirty="0">
+                      <a:endParaRPr lang="en-US" sz="1300" dirty="0">
                         <a:latin typeface="Times New Roman" charset="0"/>
                         <a:ea typeface="Times New Roman" charset="0"/>
                         <a:cs typeface="Times New Roman" charset="0"/>
@@ -8833,7 +8922,7 @@
                         <a:buNone/>
                       </a:pPr>
                       <a:r>
-                        <a:rPr lang="en-US" sz="1000" dirty="0">
+                        <a:rPr lang="en-US" sz="1300" dirty="0">
                           <a:solidFill>
                             <a:srgbClr val="2D2D3A"/>
                           </a:solidFill>
@@ -8843,7 +8932,7 @@
                         </a:rPr>
                         <a:t>11</a:t>
                       </a:r>
-                      <a:endParaRPr lang="en-US" sz="1000" dirty="0">
+                      <a:endParaRPr lang="en-US" sz="1300" dirty="0">
                         <a:latin typeface="Times New Roman" charset="0"/>
                         <a:ea typeface="Times New Roman" charset="0"/>
                         <a:cs typeface="Times New Roman" charset="0"/>
@@ -8901,7 +8990,7 @@
                         <a:buNone/>
                       </a:pPr>
                       <a:r>
-                        <a:rPr lang="en-US" sz="1000" dirty="0">
+                        <a:rPr lang="en-US" sz="1300" dirty="0">
                           <a:solidFill>
                             <a:srgbClr val="2D2D3A"/>
                           </a:solidFill>
@@ -8911,7 +9000,7 @@
                         </a:rPr>
                         <a:t>Легкость инсталляции</a:t>
                       </a:r>
-                      <a:endParaRPr lang="en-US" sz="1000" dirty="0">
+                      <a:endParaRPr lang="en-US" sz="1300" dirty="0">
                         <a:latin typeface="Times New Roman" charset="0"/>
                         <a:ea typeface="Times New Roman" charset="0"/>
                         <a:cs typeface="Times New Roman" charset="0"/>
@@ -8969,7 +9058,7 @@
                         <a:buNone/>
                       </a:pPr>
                       <a:r>
-                        <a:rPr lang="en-US" sz="1000" dirty="0">
+                        <a:rPr lang="en-US" sz="1300" dirty="0">
                           <a:solidFill>
                             <a:srgbClr val="2D2D3A"/>
                           </a:solidFill>
@@ -8979,7 +9068,7 @@
                         </a:rPr>
                         <a:t>3</a:t>
                       </a:r>
-                      <a:endParaRPr lang="en-US" sz="1000" dirty="0">
+                      <a:endParaRPr lang="en-US" sz="1300" dirty="0">
                         <a:latin typeface="Times New Roman" charset="0"/>
                         <a:ea typeface="Times New Roman" charset="0"/>
                         <a:cs typeface="Times New Roman" charset="0"/>
@@ -9037,7 +9126,7 @@
                         <a:buNone/>
                       </a:pPr>
                       <a:r>
-                        <a:rPr lang="en-US" sz="1000" dirty="0">
+                        <a:rPr lang="en-US" sz="1300" dirty="0">
                           <a:solidFill>
                             <a:srgbClr val="2D2D3A"/>
                           </a:solidFill>
@@ -9047,7 +9136,7 @@
                         </a:rPr>
                         <a:t>Контейнеризация через Docker Compose, миграции Drizzle</a:t>
                       </a:r>
-                      <a:endParaRPr lang="en-US" sz="1000" dirty="0">
+                      <a:endParaRPr lang="en-US" sz="1300" dirty="0">
                         <a:latin typeface="Times New Roman" charset="0"/>
                         <a:ea typeface="Times New Roman" charset="0"/>
                         <a:cs typeface="Times New Roman" charset="0"/>
@@ -9107,7 +9196,7 @@
                         <a:buNone/>
                       </a:pPr>
                       <a:r>
-                        <a:rPr lang="en-US" sz="1000" dirty="0">
+                        <a:rPr lang="en-US" sz="1300" dirty="0">
                           <a:solidFill>
                             <a:srgbClr val="2D2D3A"/>
                           </a:solidFill>
@@ -9117,7 +9206,7 @@
                         </a:rPr>
                         <a:t>12</a:t>
                       </a:r>
-                      <a:endParaRPr lang="en-US" sz="1000" dirty="0">
+                      <a:endParaRPr lang="en-US" sz="1300" dirty="0">
                         <a:latin typeface="Times New Roman" charset="0"/>
                         <a:ea typeface="Times New Roman" charset="0"/>
                         <a:cs typeface="Times New Roman" charset="0"/>
@@ -9175,7 +9264,7 @@
                         <a:buNone/>
                       </a:pPr>
                       <a:r>
-                        <a:rPr lang="en-US" sz="1000" dirty="0">
+                        <a:rPr lang="en-US" sz="1300" dirty="0">
                           <a:solidFill>
                             <a:srgbClr val="2D2D3A"/>
                           </a:solidFill>
@@ -9185,7 +9274,7 @@
                         </a:rPr>
                         <a:t>Простота эксплуатации</a:t>
                       </a:r>
-                      <a:endParaRPr lang="en-US" sz="1000" dirty="0">
+                      <a:endParaRPr lang="en-US" sz="1300" dirty="0">
                         <a:latin typeface="Times New Roman" charset="0"/>
                         <a:ea typeface="Times New Roman" charset="0"/>
                         <a:cs typeface="Times New Roman" charset="0"/>
@@ -9243,7 +9332,7 @@
                         <a:buNone/>
                       </a:pPr>
                       <a:r>
-                        <a:rPr lang="en-US" sz="1000" dirty="0">
+                        <a:rPr lang="en-US" sz="1300" dirty="0">
                           <a:solidFill>
                             <a:srgbClr val="2D2D3A"/>
                           </a:solidFill>
@@ -9253,7 +9342,7 @@
                         </a:rPr>
                         <a:t>3</a:t>
                       </a:r>
-                      <a:endParaRPr lang="en-US" sz="1000" dirty="0">
+                      <a:endParaRPr lang="en-US" sz="1300" dirty="0">
                         <a:latin typeface="Times New Roman" charset="0"/>
                         <a:ea typeface="Times New Roman" charset="0"/>
                         <a:cs typeface="Times New Roman" charset="0"/>
@@ -9311,7 +9400,7 @@
                         <a:buNone/>
                       </a:pPr>
                       <a:r>
-                        <a:rPr lang="en-US" sz="1000" dirty="0">
+                        <a:rPr lang="en-US" sz="1300" dirty="0">
                           <a:solidFill>
                             <a:srgbClr val="2D2D3A"/>
                           </a:solidFill>
@@ -9321,7 +9410,7 @@
                         </a:rPr>
                         <a:t>Автоматический перезапуск контейнеров, стандартные логи</a:t>
                       </a:r>
-                      <a:endParaRPr lang="en-US" sz="1000" dirty="0">
+                      <a:endParaRPr lang="en-US" sz="1300" dirty="0">
                         <a:latin typeface="Times New Roman" charset="0"/>
                         <a:ea typeface="Times New Roman" charset="0"/>
                         <a:cs typeface="Times New Roman" charset="0"/>
@@ -9381,7 +9470,7 @@
                         <a:buNone/>
                       </a:pPr>
                       <a:r>
-                        <a:rPr lang="en-US" sz="1000" dirty="0">
+                        <a:rPr lang="en-US" sz="1300" dirty="0">
                           <a:solidFill>
                             <a:srgbClr val="2D2D3A"/>
                           </a:solidFill>
@@ -9391,7 +9480,7 @@
                         </a:rPr>
                         <a:t>13</a:t>
                       </a:r>
-                      <a:endParaRPr lang="en-US" sz="1000" dirty="0">
+                      <a:endParaRPr lang="en-US" sz="1300" dirty="0">
                         <a:latin typeface="Times New Roman" charset="0"/>
                         <a:ea typeface="Times New Roman" charset="0"/>
                         <a:cs typeface="Times New Roman" charset="0"/>
@@ -9449,7 +9538,7 @@
                         <a:buNone/>
                       </a:pPr>
                       <a:r>
-                        <a:rPr lang="en-US" sz="1000" dirty="0">
+                        <a:rPr lang="en-US" sz="1300" dirty="0">
                           <a:solidFill>
                             <a:srgbClr val="2D2D3A"/>
                           </a:solidFill>
@@ -9459,7 +9548,7 @@
                         </a:rPr>
                         <a:t>Множественность площадок</a:t>
                       </a:r>
-                      <a:endParaRPr lang="en-US" sz="1000" dirty="0">
+                      <a:endParaRPr lang="en-US" sz="1300" dirty="0">
                         <a:latin typeface="Times New Roman" charset="0"/>
                         <a:ea typeface="Times New Roman" charset="0"/>
                         <a:cs typeface="Times New Roman" charset="0"/>
@@ -9517,7 +9606,7 @@
                         <a:buNone/>
                       </a:pPr>
                       <a:r>
-                        <a:rPr lang="en-US" sz="1000" dirty="0">
+                        <a:rPr lang="en-US" sz="1300" dirty="0">
                           <a:solidFill>
                             <a:srgbClr val="2D2D3A"/>
                           </a:solidFill>
@@ -9527,7 +9616,7 @@
                         </a:rPr>
                         <a:t>2</a:t>
                       </a:r>
-                      <a:endParaRPr lang="en-US" sz="1000" dirty="0">
+                      <a:endParaRPr lang="en-US" sz="1300" dirty="0">
                         <a:latin typeface="Times New Roman" charset="0"/>
                         <a:ea typeface="Times New Roman" charset="0"/>
                         <a:cs typeface="Times New Roman" charset="0"/>
@@ -9585,7 +9674,7 @@
                         <a:buNone/>
                       </a:pPr>
                       <a:r>
-                        <a:rPr lang="en-US" sz="1000" dirty="0">
+                        <a:rPr lang="en-US" sz="1300" dirty="0">
                           <a:solidFill>
                             <a:srgbClr val="2D2D3A"/>
                           </a:solidFill>
@@ -9595,7 +9684,7 @@
                         </a:rPr>
                         <a:t>Развертывание на одной облачной платформе Cloud Run</a:t>
                       </a:r>
-                      <a:endParaRPr lang="en-US" sz="1000" dirty="0">
+                      <a:endParaRPr lang="en-US" sz="1300" dirty="0">
                         <a:latin typeface="Times New Roman" charset="0"/>
                         <a:ea typeface="Times New Roman" charset="0"/>
                         <a:cs typeface="Times New Roman" charset="0"/>
@@ -9655,7 +9744,7 @@
                         <a:buNone/>
                       </a:pPr>
                       <a:r>
-                        <a:rPr lang="en-US" sz="1000" dirty="0">
+                        <a:rPr lang="en-US" sz="1300" dirty="0">
                           <a:solidFill>
                             <a:srgbClr val="2D2D3A"/>
                           </a:solidFill>
@@ -9665,7 +9754,7 @@
                         </a:rPr>
                         <a:t>14</a:t>
                       </a:r>
-                      <a:endParaRPr lang="en-US" sz="1000" dirty="0">
+                      <a:endParaRPr lang="en-US" sz="1300" dirty="0">
                         <a:latin typeface="Times New Roman" charset="0"/>
                         <a:ea typeface="Times New Roman" charset="0"/>
                         <a:cs typeface="Times New Roman" charset="0"/>
@@ -9723,7 +9812,7 @@
                         <a:buNone/>
                       </a:pPr>
                       <a:r>
-                        <a:rPr lang="en-US" sz="1000" dirty="0">
+                        <a:rPr lang="en-US" sz="1300" dirty="0">
                           <a:solidFill>
                             <a:srgbClr val="2D2D3A"/>
                           </a:solidFill>
@@ -9733,7 +9822,7 @@
                         </a:rPr>
                         <a:t>Легкость изменений</a:t>
                       </a:r>
-                      <a:endParaRPr lang="en-US" sz="1000" dirty="0">
+                      <a:endParaRPr lang="en-US" sz="1300" dirty="0">
                         <a:latin typeface="Times New Roman" charset="0"/>
                         <a:ea typeface="Times New Roman" charset="0"/>
                         <a:cs typeface="Times New Roman" charset="0"/>
@@ -9791,7 +9880,7 @@
                         <a:buNone/>
                       </a:pPr>
                       <a:r>
-                        <a:rPr lang="en-US" sz="1000" dirty="0">
+                        <a:rPr lang="en-US" sz="1300" dirty="0">
                           <a:solidFill>
                             <a:srgbClr val="2D2D3A"/>
                           </a:solidFill>
@@ -9801,7 +9890,7 @@
                         </a:rPr>
                         <a:t>4</a:t>
                       </a:r>
-                      <a:endParaRPr lang="en-US" sz="1000" dirty="0">
+                      <a:endParaRPr lang="en-US" sz="1300" dirty="0">
                         <a:latin typeface="Times New Roman" charset="0"/>
                         <a:ea typeface="Times New Roman" charset="0"/>
                         <a:cs typeface="Times New Roman" charset="0"/>
@@ -9859,7 +9948,7 @@
                         <a:buNone/>
                       </a:pPr>
                       <a:r>
-                        <a:rPr lang="en-US" sz="1000" dirty="0">
+                        <a:rPr lang="en-US" sz="1300" dirty="0">
                           <a:solidFill>
                             <a:srgbClr val="2D2D3A"/>
                           </a:solidFill>
@@ -9869,7 +9958,7 @@
                         </a:rPr>
                         <a:t>Гибкость за счет слоистой архитектуры и ORM Drizzle</a:t>
                       </a:r>
-                      <a:endParaRPr lang="en-US" sz="1000" dirty="0">
+                      <a:endParaRPr lang="en-US" sz="1300" dirty="0">
                         <a:latin typeface="Times New Roman" charset="0"/>
                         <a:ea typeface="Times New Roman" charset="0"/>
                         <a:cs typeface="Times New Roman" charset="0"/>
@@ -9948,7 +10037,7 @@
               <a:buNone/>
             </a:pPr>
             <a:r>
-              <a:rPr lang="en-US" sz="1100" b="1" dirty="0">
+              <a:rPr lang="en-US" sz="1300" b="1" dirty="0">
                 <a:solidFill>
                   <a:srgbClr val="1A1A2E"/>
                 </a:solidFill>
@@ -9958,7 +10047,7 @@
               </a:rPr>
               <a:t>Итого сумма баллов (DI) = 46 (арифметически точно!)  →  VAF = 0.65 + 46 * 0.01 = 1.11</a:t>
             </a:r>
-            <a:endParaRPr lang="en-US" sz="1100" dirty="0"/>
+            <a:endParaRPr lang="en-US" sz="1300" dirty="0"/>
           </a:p>
         </p:txBody>
       </p:sp>
@@ -10092,7 +10181,7 @@
               <a:buNone/>
             </a:pPr>
             <a:r>
-              <a:rPr lang="en-US" sz="1200" b="1" dirty="0">
+              <a:rPr lang="en-US" sz="1400" b="1" dirty="0">
                 <a:solidFill>
                   <a:srgbClr val="1A1A2E"/>
                 </a:solidFill>
@@ -10102,7 +10191,7 @@
               </a:rPr>
               <a:t>Математический расчет и значение для менеджмента</a:t>
             </a:r>
-            <a:endParaRPr lang="en-US" sz="1200" dirty="0"/>
+            <a:endParaRPr lang="en-US" sz="1400" dirty="0"/>
           </a:p>
         </p:txBody>
       </p:sp>
@@ -10131,7 +10220,7 @@
               <a:buNone/>
             </a:pPr>
             <a:r>
-              <a:rPr lang="en-US" sz="1600" dirty="0">
+              <a:rPr lang="en-US" sz="1800" dirty="0">
                 <a:solidFill>
                   <a:srgbClr val="2D2D3A"/>
                 </a:solidFill>
@@ -10141,14 +10230,14 @@
               </a:rPr>
               <a:t>Формула расчета выровненных функциональных точек:</a:t>
             </a:r>
-            <a:endParaRPr lang="en-US" sz="1600" dirty="0"/>
+            <a:endParaRPr lang="en-US" sz="1800" dirty="0"/>
           </a:p>
           <a:p>
             <a:pPr algn="l" indent="0" marL="0">
               <a:buNone/>
             </a:pPr>
             <a:r>
-              <a:rPr lang="en-US" sz="1600" dirty="0">
+              <a:rPr lang="en-US" sz="1800" dirty="0">
                 <a:solidFill>
                   <a:srgbClr val="2D2D3A"/>
                 </a:solidFill>
@@ -10158,20 +10247,20 @@
               </a:rPr>
               <a:t>  FP = UFP * VAF</a:t>
             </a:r>
-            <a:endParaRPr lang="en-US" sz="1600" dirty="0"/>
+            <a:endParaRPr lang="en-US" sz="1800" dirty="0"/>
           </a:p>
           <a:p>
             <a:pPr algn="l" indent="0" marL="0">
               <a:buNone/>
             </a:pPr>
-            <a:endParaRPr lang="en-US" sz="1600" dirty="0"/>
+            <a:endParaRPr lang="en-US" sz="1800" dirty="0"/>
           </a:p>
           <a:p>
             <a:pPr algn="l" indent="0" marL="0">
               <a:buNone/>
             </a:pPr>
             <a:r>
-              <a:rPr lang="en-US" sz="1600" dirty="0">
+              <a:rPr lang="en-US" sz="1800" dirty="0">
                 <a:solidFill>
                   <a:srgbClr val="2D2D3A"/>
                 </a:solidFill>
@@ -10181,14 +10270,14 @@
               </a:rPr>
               <a:t>Подставляем значения нашего проекта:</a:t>
             </a:r>
-            <a:endParaRPr lang="en-US" sz="1600" dirty="0"/>
+            <a:endParaRPr lang="en-US" sz="1800" dirty="0"/>
           </a:p>
           <a:p>
             <a:pPr algn="l" indent="0" marL="0">
               <a:buNone/>
             </a:pPr>
             <a:r>
-              <a:rPr lang="en-US" sz="1600" dirty="0">
+              <a:rPr lang="en-US" sz="1800" dirty="0">
                 <a:solidFill>
                   <a:srgbClr val="2D2D3A"/>
                 </a:solidFill>
@@ -10198,14 +10287,14 @@
               </a:rPr>
               <a:t>  UFP = 101</a:t>
             </a:r>
-            <a:endParaRPr lang="en-US" sz="1600" dirty="0"/>
+            <a:endParaRPr lang="en-US" sz="1800" dirty="0"/>
           </a:p>
           <a:p>
             <a:pPr algn="l" indent="0" marL="0">
               <a:buNone/>
             </a:pPr>
             <a:r>
-              <a:rPr lang="en-US" sz="1600" dirty="0">
+              <a:rPr lang="en-US" sz="1800" dirty="0">
                 <a:solidFill>
                   <a:srgbClr val="2D2D3A"/>
                 </a:solidFill>
@@ -10215,20 +10304,20 @@
               </a:rPr>
               <a:t>  VAF = 1.11</a:t>
             </a:r>
-            <a:endParaRPr lang="en-US" sz="1600" dirty="0"/>
+            <a:endParaRPr lang="en-US" sz="1800" dirty="0"/>
           </a:p>
           <a:p>
             <a:pPr algn="l" indent="0" marL="0">
               <a:buNone/>
             </a:pPr>
-            <a:endParaRPr lang="en-US" sz="1600" dirty="0"/>
+            <a:endParaRPr lang="en-US" sz="1800" dirty="0"/>
           </a:p>
           <a:p>
             <a:pPr algn="l" indent="0" marL="0">
               <a:buNone/>
             </a:pPr>
             <a:r>
-              <a:rPr lang="en-US" sz="1600" dirty="0">
+              <a:rPr lang="en-US" sz="1800" dirty="0">
                 <a:solidFill>
                   <a:srgbClr val="2D2D3A"/>
                 </a:solidFill>
@@ -10238,14 +10327,14 @@
               </a:rPr>
               <a:t>Итоговый объем:</a:t>
             </a:r>
-            <a:endParaRPr lang="en-US" sz="1600" dirty="0"/>
+            <a:endParaRPr lang="en-US" sz="1800" dirty="0"/>
           </a:p>
           <a:p>
             <a:pPr algn="l" indent="0" marL="0">
               <a:buNone/>
             </a:pPr>
             <a:r>
-              <a:rPr lang="en-US" sz="1600" dirty="0">
+              <a:rPr lang="en-US" sz="1800" dirty="0">
                 <a:solidFill>
                   <a:srgbClr val="2D2D3A"/>
                 </a:solidFill>
@@ -10255,20 +10344,20 @@
               </a:rPr>
               <a:t>  FP = 101 * 1.11 ≈ 112 точек</a:t>
             </a:r>
-            <a:endParaRPr lang="en-US" sz="1600" dirty="0"/>
+            <a:endParaRPr lang="en-US" sz="1800" dirty="0"/>
           </a:p>
           <a:p>
             <a:pPr algn="l" indent="0" marL="0">
               <a:buNone/>
             </a:pPr>
-            <a:endParaRPr lang="en-US" sz="1600" dirty="0"/>
+            <a:endParaRPr lang="en-US" sz="1800" dirty="0"/>
           </a:p>
           <a:p>
             <a:pPr algn="l" indent="0" marL="0">
               <a:buNone/>
             </a:pPr>
             <a:r>
-              <a:rPr lang="en-US" sz="1600" dirty="0">
+              <a:rPr lang="en-US" sz="1800" dirty="0">
                 <a:solidFill>
                   <a:srgbClr val="2D2D3A"/>
                 </a:solidFill>
@@ -10278,14 +10367,14 @@
               </a:rPr>
               <a:t>Значение для менеджмента:</a:t>
             </a:r>
-            <a:endParaRPr lang="en-US" sz="1600" dirty="0"/>
+            <a:endParaRPr lang="en-US" sz="1800" dirty="0"/>
           </a:p>
           <a:p>
             <a:pPr algn="l" indent="0" marL="0">
               <a:buNone/>
             </a:pPr>
             <a:r>
-              <a:rPr lang="en-US" sz="1600" dirty="0">
+              <a:rPr lang="en-US" sz="1800" dirty="0">
                 <a:solidFill>
                   <a:srgbClr val="2D2D3A"/>
                 </a:solidFill>
@@ -10295,14 +10384,14 @@
               </a:rPr>
               <a:t>• 112 функциональных точек характеризуют систему как проект средней сложности.</a:t>
             </a:r>
-            <a:endParaRPr lang="en-US" sz="1600" dirty="0"/>
+            <a:endParaRPr lang="en-US" sz="1800" dirty="0"/>
           </a:p>
           <a:p>
             <a:pPr algn="l" indent="0" marL="0">
               <a:buNone/>
             </a:pPr>
             <a:r>
-              <a:rPr lang="en-US" sz="1600" dirty="0">
+              <a:rPr lang="en-US" sz="1800" dirty="0">
                 <a:solidFill>
                   <a:srgbClr val="2D2D3A"/>
                 </a:solidFill>
@@ -10312,14 +10401,14 @@
               </a:rPr>
               <a:t>• Это число позволяет объективно обосновать перед руководством трудоемкость в человеко-часах без использования субъективного метода экспертных оценок.</a:t>
             </a:r>
-            <a:endParaRPr lang="en-US" sz="1600" dirty="0"/>
+            <a:endParaRPr lang="en-US" sz="1800" dirty="0"/>
           </a:p>
           <a:p>
             <a:pPr algn="l" indent="0" marL="0">
               <a:buNone/>
             </a:pPr>
             <a:r>
-              <a:rPr lang="en-US" sz="1600" dirty="0">
+              <a:rPr lang="en-US" sz="1800" dirty="0">
                 <a:solidFill>
                   <a:srgbClr val="2D2D3A"/>
                 </a:solidFill>
@@ -10329,7 +10418,7 @@
               </a:rPr>
               <a:t>• Прекрасная база для расчета плотности багов.</a:t>
             </a:r>
-            <a:endParaRPr lang="en-US" sz="1600" dirty="0"/>
+            <a:endParaRPr lang="en-US" sz="1800" dirty="0"/>
           </a:p>
         </p:txBody>
       </p:sp>
@@ -10463,7 +10552,7 @@
               <a:buNone/>
             </a:pPr>
             <a:r>
-              <a:rPr lang="en-US" sz="1200" b="1" dirty="0">
+              <a:rPr lang="en-US" sz="1400" b="1" dirty="0">
                 <a:solidFill>
                   <a:srgbClr val="1A1A2E"/>
                 </a:solidFill>
@@ -10473,7 +10562,7 @@
               </a:rPr>
               <a:t>Перевод FP в строки кода и трудоемкость по COCOMO II</a:t>
             </a:r>
-            <a:endParaRPr lang="en-US" sz="1200" dirty="0"/>
+            <a:endParaRPr lang="en-US" sz="1400" dirty="0"/>
           </a:p>
         </p:txBody>
       </p:sp>
@@ -10502,7 +10591,7 @@
               <a:buNone/>
             </a:pPr>
             <a:r>
-              <a:rPr lang="en-US" sz="1600" dirty="0">
+              <a:rPr lang="en-US" sz="1800" dirty="0">
                 <a:solidFill>
                   <a:srgbClr val="2D2D3A"/>
                 </a:solidFill>
@@ -10512,14 +10601,14 @@
               </a:rPr>
               <a:t>Согласно средним таблицам перевода QSM:</a:t>
             </a:r>
-            <a:endParaRPr lang="en-US" sz="1600" dirty="0"/>
+            <a:endParaRPr lang="en-US" sz="1800" dirty="0"/>
           </a:p>
           <a:p>
             <a:pPr algn="l" indent="0" marL="0">
               <a:buNone/>
             </a:pPr>
             <a:r>
-              <a:rPr lang="en-US" sz="1600" dirty="0">
+              <a:rPr lang="en-US" sz="1800" dirty="0">
                 <a:solidFill>
                   <a:srgbClr val="2D2D3A"/>
                 </a:solidFill>
@@ -10529,14 +10618,14 @@
               </a:rPr>
               <a:t>• 1 FP ≈ 53 строк кода (TypeScript/HTML)</a:t>
             </a:r>
-            <a:endParaRPr lang="en-US" sz="1600" dirty="0"/>
+            <a:endParaRPr lang="en-US" sz="1800" dirty="0"/>
           </a:p>
           <a:p>
             <a:pPr algn="l" indent="0" marL="0">
               <a:buNone/>
             </a:pPr>
             <a:r>
-              <a:rPr lang="en-US" sz="1600" dirty="0">
+              <a:rPr lang="en-US" sz="1800" dirty="0">
                 <a:solidFill>
                   <a:srgbClr val="2D2D3A"/>
                 </a:solidFill>
@@ -10546,20 +10635,20 @@
               </a:rPr>
               <a:t>• 112 FP ≈ 5 936 строк кода (5.94 KLOC)</a:t>
             </a:r>
-            <a:endParaRPr lang="en-US" sz="1600" dirty="0"/>
+            <a:endParaRPr lang="en-US" sz="1800" dirty="0"/>
           </a:p>
           <a:p>
             <a:pPr algn="l" indent="0" marL="0">
               <a:buNone/>
             </a:pPr>
-            <a:endParaRPr lang="en-US" sz="1600" dirty="0"/>
+            <a:endParaRPr lang="en-US" sz="1800" dirty="0"/>
           </a:p>
           <a:p>
             <a:pPr algn="l" indent="0" marL="0">
               <a:buNone/>
             </a:pPr>
             <a:r>
-              <a:rPr lang="en-US" sz="1600" dirty="0">
+              <a:rPr lang="en-US" sz="1800" dirty="0">
                 <a:solidFill>
                   <a:srgbClr val="2D2D3A"/>
                 </a:solidFill>
@@ -10569,20 +10658,20 @@
               </a:rPr>
               <a:t>Следовательно, размер кодовой базы Личного кабинета составит около 5.9 KLOC.</a:t>
             </a:r>
-            <a:endParaRPr lang="en-US" sz="1600" dirty="0"/>
+            <a:endParaRPr lang="en-US" sz="1800" dirty="0"/>
           </a:p>
           <a:p>
             <a:pPr algn="l" indent="0" marL="0">
               <a:buNone/>
             </a:pPr>
-            <a:endParaRPr lang="en-US" sz="1600" dirty="0"/>
+            <a:endParaRPr lang="en-US" sz="1800" dirty="0"/>
           </a:p>
           <a:p>
             <a:pPr algn="l" indent="0" marL="0">
               <a:buNone/>
             </a:pPr>
             <a:r>
-              <a:rPr lang="en-US" sz="1600" dirty="0">
+              <a:rPr lang="en-US" sz="1800" dirty="0">
                 <a:solidFill>
                   <a:srgbClr val="2D2D3A"/>
                 </a:solidFill>
@@ -10592,14 +10681,14 @@
               </a:rPr>
               <a:t>Трудоемкость по COCOMO II:</a:t>
             </a:r>
-            <a:endParaRPr lang="en-US" sz="1600" dirty="0"/>
+            <a:endParaRPr lang="en-US" sz="1800" dirty="0"/>
           </a:p>
           <a:p>
             <a:pPr algn="l" indent="0" marL="0">
               <a:buNone/>
             </a:pPr>
             <a:r>
-              <a:rPr lang="en-US" sz="1600" dirty="0">
+              <a:rPr lang="en-US" sz="1800" dirty="0">
                 <a:solidFill>
                   <a:srgbClr val="2D2D3A"/>
                 </a:solidFill>
@@ -10609,14 +10698,14 @@
               </a:rPr>
               <a:t>Формула базовой модели COCOMO II (органический тип):</a:t>
             </a:r>
-            <a:endParaRPr lang="en-US" sz="1600" dirty="0"/>
+            <a:endParaRPr lang="en-US" sz="1800" dirty="0"/>
           </a:p>
           <a:p>
             <a:pPr algn="l" indent="0" marL="0">
               <a:buNone/>
             </a:pPr>
             <a:r>
-              <a:rPr lang="en-US" sz="1600" dirty="0">
+              <a:rPr lang="en-US" sz="1800" dirty="0">
                 <a:solidFill>
                   <a:srgbClr val="2D2D3A"/>
                 </a:solidFill>
@@ -10626,20 +10715,20 @@
               </a:rPr>
               <a:t>  Effort = 2.4 * (KLOC)^1.05 = 2.4 * (5.94)^1.05 ≈ 15.5 чел.-месяцев</a:t>
             </a:r>
-            <a:endParaRPr lang="en-US" sz="1600" dirty="0"/>
+            <a:endParaRPr lang="en-US" sz="1800" dirty="0"/>
           </a:p>
           <a:p>
             <a:pPr algn="l" indent="0" marL="0">
               <a:buNone/>
             </a:pPr>
-            <a:endParaRPr lang="en-US" sz="1600" dirty="0"/>
+            <a:endParaRPr lang="en-US" sz="1800" dirty="0"/>
           </a:p>
           <a:p>
             <a:pPr algn="l" indent="0" marL="0">
               <a:buNone/>
             </a:pPr>
             <a:r>
-              <a:rPr lang="en-US" sz="1600" dirty="0">
+              <a:rPr lang="en-US" sz="1800" dirty="0">
                 <a:solidFill>
                   <a:srgbClr val="2D2D3A"/>
                 </a:solidFill>
@@ -10649,14 +10738,14 @@
               </a:rPr>
               <a:t>Срок разработки по формуле (TDEV):</a:t>
             </a:r>
-            <a:endParaRPr lang="en-US" sz="1600" dirty="0"/>
+            <a:endParaRPr lang="en-US" sz="1800" dirty="0"/>
           </a:p>
           <a:p>
             <a:pPr algn="l" indent="0" marL="0">
               <a:buNone/>
             </a:pPr>
             <a:r>
-              <a:rPr lang="en-US" sz="1600" dirty="0">
+              <a:rPr lang="en-US" sz="1800" dirty="0">
                 <a:solidFill>
                   <a:srgbClr val="2D2D3A"/>
                 </a:solidFill>
@@ -10666,20 +10755,20 @@
               </a:rPr>
               <a:t>  TDEV = 2.5 * (Effort)^0.38 = 2.5 * (15.5)^0.38 ≈ 7.1 месяцев</a:t>
             </a:r>
-            <a:endParaRPr lang="en-US" sz="1600" dirty="0"/>
+            <a:endParaRPr lang="en-US" sz="1800" dirty="0"/>
           </a:p>
           <a:p>
             <a:pPr algn="l" indent="0" marL="0">
               <a:buNone/>
             </a:pPr>
-            <a:endParaRPr lang="en-US" sz="1600" dirty="0"/>
+            <a:endParaRPr lang="en-US" sz="1800" dirty="0"/>
           </a:p>
           <a:p>
             <a:pPr algn="l" indent="0" marL="0">
               <a:buNone/>
             </a:pPr>
             <a:r>
-              <a:rPr lang="en-US" sz="1600" dirty="0">
+              <a:rPr lang="en-US" sz="1800" dirty="0">
                 <a:solidFill>
                   <a:srgbClr val="2D2D3A"/>
                 </a:solidFill>
@@ -10689,14 +10778,14 @@
               </a:rPr>
               <a:t>Закон Брукса и честный расчет:</a:t>
             </a:r>
-            <a:endParaRPr lang="en-US" sz="1600" dirty="0"/>
+            <a:endParaRPr lang="en-US" sz="1800" dirty="0"/>
           </a:p>
           <a:p>
             <a:pPr algn="l" indent="0" marL="0">
               <a:buNone/>
             </a:pPr>
             <a:r>
-              <a:rPr lang="en-US" sz="1600" dirty="0">
+              <a:rPr lang="en-US" sz="1800" dirty="0">
                 <a:solidFill>
                   <a:srgbClr val="2D2D3A"/>
                 </a:solidFill>
@@ -10706,14 +10795,14 @@
               </a:rPr>
               <a:t>• Срок TDEV (7.1 мес.) не делится линейно на 2 программистов.</a:t>
             </a:r>
-            <a:endParaRPr lang="en-US" sz="1600" dirty="0"/>
+            <a:endParaRPr lang="en-US" sz="1800" dirty="0"/>
           </a:p>
           <a:p>
             <a:pPr algn="l" indent="0" marL="0">
               <a:buNone/>
             </a:pPr>
             <a:r>
-              <a:rPr lang="en-US" sz="1600" dirty="0">
+              <a:rPr lang="en-US" sz="1800" dirty="0">
                 <a:solidFill>
                   <a:srgbClr val="2D2D3A"/>
                 </a:solidFill>
@@ -10723,14 +10812,14 @@
               </a:rPr>
               <a:t>• Требуемая численность: Effort / TDEV = 15.5 / 7.1 ≈ 2.2 человек.</a:t>
             </a:r>
-            <a:endParaRPr lang="en-US" sz="1600" dirty="0"/>
+            <a:endParaRPr lang="en-US" sz="1800" dirty="0"/>
           </a:p>
           <a:p>
             <a:pPr algn="l" indent="0" marL="0">
               <a:buNone/>
             </a:pPr>
             <a:r>
-              <a:rPr lang="en-US" sz="1600" dirty="0">
+              <a:rPr lang="en-US" sz="1800" dirty="0">
                 <a:solidFill>
                   <a:srgbClr val="2D2D3A"/>
                 </a:solidFill>
@@ -10740,7 +10829,7 @@
               </a:rPr>
               <a:t>• Вывод: команда из 2 разработчиков выполнит проект за ~7.8 месяцев реального времени (или 15.5 чел.-мес) с учетом коэффициента распределения.</a:t>
             </a:r>
-            <a:endParaRPr lang="en-US" sz="1600" dirty="0"/>
+            <a:endParaRPr lang="en-US" sz="1800" dirty="0"/>
           </a:p>
         </p:txBody>
       </p:sp>
@@ -10809,120 +10898,7 @@
                 <a:ea typeface="Georgia" pitchFamily="34" charset="-122"/>
                 <a:cs typeface="Georgia" pitchFamily="34" charset="-120"/>
               </a:rPr>
-              <a:t>Выводы по теме</a:t>
-            </a:r>
-            <a:endParaRPr lang="en-US" sz="1600" dirty="0"/>
-          </a:p>
-        </p:txBody>
-      </p:sp>
-      <p:sp>
-        <p:nvSpPr>
-          <p:cNvPr id="3" name="Text 1"/>
-          <p:cNvSpPr/>
-          <p:nvPr/>
-        </p:nvSpPr>
-        <p:spPr>
-          <a:xfrm>
-            <a:off x="475488" y="868680"/>
-            <a:ext cx="8193024" cy="4027932"/>
-          </a:xfrm>
-          <a:prstGeom prst="rect">
-            <a:avLst/>
-          </a:prstGeom>
-          <a:noFill/>
-          <a:ln/>
-        </p:spPr>
-        <p:txBody>
-          <a:bodyPr wrap="square" rtlCol="0" anchor="t"/>
-          <a:lstStyle/>
-          <a:p>
-            <a:pPr algn="l" indent="0" marL="0">
-              <a:lnSpc>
-                <a:spcPts val="3200"/>
-              </a:lnSpc>
-              <a:buNone/>
-            </a:pPr>
-            <a:r>
-              <a:rPr lang="en-US" sz="1800" dirty="0">
-                <a:solidFill>
-                  <a:srgbClr val="2D2D3A"/>
-                </a:solidFill>
-                <a:latin typeface="Times New Roman" pitchFamily="34" charset="0"/>
-                <a:ea typeface="Times New Roman" pitchFamily="34" charset="-122"/>
-                <a:cs typeface="Times New Roman" pitchFamily="34" charset="-120"/>
-              </a:rPr>
-              <a:t>Использование модели функциональных точек (Function Point Analysis) и формул COCOMO II предоставило нашей команде научно обоснованный способ оценки масштаба и сроков проекта. Логический объем Личного кабинета составил 112 FP (что эквивалентно 5.9 KLOC). Расчеты трудоемкости доказали реализуемость проекта силами команды из 2 разработчиков за 7.8 месяцев реального времени, что полностью подтверждает взвешенный план-график проекта без допущения ошибок линейного деления.</a:t>
-            </a:r>
-            <a:endParaRPr lang="en-US" sz="1800" dirty="0"/>
-          </a:p>
-        </p:txBody>
-      </p:sp>
-    </p:spTree>
-  </p:cSld>
-  <p:clrMapOvr>
-    <a:masterClrMapping/>
-  </p:clrMapOvr>
-</p:sld>
-</file>
-
-<file path=ppt/slides/slide2.xml><?xml version="1.0" encoding="utf-8"?>
-<p:sld xmlns:a="http://schemas.openxmlformats.org/drawingml/2006/main" xmlns:r="http://schemas.openxmlformats.org/officeDocument/2006/relationships" xmlns:p="http://schemas.openxmlformats.org/presentationml/2006/main">
-  <p:cSld name="Slide 2">
-    <p:bg>
-      <p:bgPr>
-        <a:solidFill>
-          <a:srgbClr val="FFFFFF"/>
-        </a:solidFill>
-      </p:bgPr>
-    </p:bg>
-    <p:spTree>
-      <p:nvGrpSpPr>
-        <p:cNvPr id="1" name=""/>
-        <p:cNvGrpSpPr/>
-        <p:nvPr/>
-      </p:nvGrpSpPr>
-      <p:grpSpPr>
-        <a:xfrm>
-          <a:off x="0" y="0"/>
-          <a:ext cx="0" cy="0"/>
-          <a:chOff x="0" y="0"/>
-          <a:chExt cx="0" cy="0"/>
-        </a:xfrm>
-      </p:grpSpPr>
-      <p:sp>
-        <p:nvSpPr>
-          <p:cNvPr id="2" name="Text 0"/>
-          <p:cNvSpPr/>
-          <p:nvPr/>
-        </p:nvSpPr>
-        <p:spPr>
-          <a:xfrm>
-            <a:off x="384048" y="164592"/>
-            <a:ext cx="8375904" cy="548640"/>
-          </a:xfrm>
-          <a:prstGeom prst="rect">
-            <a:avLst/>
-          </a:prstGeom>
-          <a:noFill/>
-          <a:ln/>
-        </p:spPr>
-        <p:txBody>
-          <a:bodyPr wrap="square" rtlCol="0" anchor="b"/>
-          <a:lstStyle/>
-          <a:p>
-            <a:pPr algn="l" indent="0" marL="0">
-              <a:buNone/>
-            </a:pPr>
-            <a:r>
-              <a:rPr lang="en-US" sz="1600" b="1" dirty="0">
-                <a:solidFill>
-                  <a:srgbClr val="1A1A2E"/>
-                </a:solidFill>
-                <a:latin typeface="Georgia" pitchFamily="34" charset="0"/>
-                <a:ea typeface="Georgia" pitchFamily="34" charset="-122"/>
-                <a:cs typeface="Georgia" pitchFamily="34" charset="-120"/>
-              </a:rPr>
-              <a:t>Постановка задачи моделирования</a:t>
+              <a:t>Сравнение ожидаемых и фактических результатов</a:t>
             </a:r>
             <a:endParaRPr lang="en-US" sz="1600" dirty="0"/>
           </a:p>
@@ -10987,7 +10963,7 @@
               <a:buNone/>
             </a:pPr>
             <a:r>
-              <a:rPr lang="en-US" sz="1200" b="1" dirty="0">
+              <a:rPr lang="en-US" sz="1400" b="1" dirty="0">
                 <a:solidFill>
                   <a:srgbClr val="1A1A2E"/>
                 </a:solidFill>
@@ -10995,22 +10971,1698 @@
                 <a:ea typeface="Cambria" pitchFamily="34" charset="-122"/>
                 <a:cs typeface="Cambria" pitchFamily="34" charset="-120"/>
               </a:rPr>
-              <a:t>Постановка практической задачи</a:t>
+              <a:t>Сопоставление плановых показателей (из FP и COCOMO) с реальными данными проекта</a:t>
             </a:r>
-            <a:endParaRPr lang="en-US" sz="1200" dirty="0"/>
+            <a:endParaRPr lang="en-US" sz="1400" dirty="0"/>
           </a:p>
         </p:txBody>
       </p:sp>
+      <p:graphicFrame>
+        <p:nvGraphicFramePr>
+          <p:cNvPr id="16" name="Table 0"/>
+          <p:cNvGraphicFramePr>
+            <a:graphicFrameLocks noGrp="1"/>
+          </p:cNvGraphicFramePr>
+          <p:nvPr>
+            <p:extLst>
+              <p:ext uri="{D42A27DB-BD31-4B8C-83A1-F6EECF244321}">
+                <p14:modId xmlns:p14="http://schemas.microsoft.com/office/powerpoint/2010/main" val="1579011935"/>
+              </p:ext>
+            </p:extLst>
+          </p:nvPr>
+        </p:nvGraphicFramePr>
+        <p:xfrm>
+          <a:off x="475488" y="1417320"/>
+          <a:ext cx="8193024" cy="3387852"/>
+        </p:xfrm>
+        <a:graphic>
+          <a:graphicData uri="http://schemas.openxmlformats.org/drawingml/2006/table">
+            <a:tbl>
+              <a:tblPr/>
+              <a:tblGrid>
+                <a:gridCol w="2286000"/>
+                <a:gridCol w="1828800"/>
+                <a:gridCol w="1828800"/>
+                <a:gridCol w="1828800"/>
+              </a:tblGrid>
+              <a:tr h="594360">
+                <a:tc>
+                  <a:txBody>
+                    <a:bodyPr/>
+                    <a:lstStyle/>
+                    <a:p>
+                      <a:pPr algn="ctr" indent="0" marL="0">
+                        <a:buNone/>
+                      </a:pPr>
+                      <a:r>
+                        <a:rPr lang="en-US" sz="1400" b="1" dirty="0">
+                          <a:solidFill>
+                            <a:srgbClr val="FFFFFF"/>
+                          </a:solidFill>
+                          <a:latin typeface="Times New Roman" pitchFamily="34" charset="0"/>
+                          <a:ea typeface="Times New Roman" pitchFamily="34" charset="-122"/>
+                          <a:cs typeface="Times New Roman" pitchFamily="34" charset="-120"/>
+                        </a:rPr>
+                        <a:t>Показатель</a:t>
+                      </a:r>
+                      <a:endParaRPr lang="en-US" sz="1400" dirty="0">
+                        <a:latin typeface="Times New Roman" charset="0"/>
+                        <a:ea typeface="Times New Roman" charset="0"/>
+                        <a:cs typeface="Times New Roman" charset="0"/>
+                      </a:endParaRPr>
+                    </a:p>
+                  </a:txBody>
+                  <a:tcPr marL="91440" marR="91440" marT="45720" marB="45720" anchor="ctr">
+                    <a:lnL w="6350" cap="flat" cmpd="sng" algn="ctr">
+                      <a:solidFill>
+                        <a:srgbClr val="EFEAE3"/>
+                      </a:solidFill>
+                      <a:prstDash val="solid"/>
+                      <a:round/>
+                      <a:headEnd type="none" w="med" len="med"/>
+                      <a:tailEnd type="none" w="med" len="med"/>
+                    </a:lnL>
+                    <a:lnR w="6350" cap="flat" cmpd="sng" algn="ctr">
+                      <a:solidFill>
+                        <a:srgbClr val="EFEAE3"/>
+                      </a:solidFill>
+                      <a:prstDash val="solid"/>
+                      <a:round/>
+                      <a:headEnd type="none" w="med" len="med"/>
+                      <a:tailEnd type="none" w="med" len="med"/>
+                    </a:lnR>
+                    <a:lnT w="6350" cap="flat" cmpd="sng" algn="ctr">
+                      <a:solidFill>
+                        <a:srgbClr val="EFEAE3"/>
+                      </a:solidFill>
+                      <a:prstDash val="solid"/>
+                      <a:round/>
+                      <a:headEnd type="none" w="med" len="med"/>
+                      <a:tailEnd type="none" w="med" len="med"/>
+                    </a:lnT>
+                    <a:lnB w="6350" cap="flat" cmpd="sng" algn="ctr">
+                      <a:solidFill>
+                        <a:srgbClr val="EFEAE3"/>
+                      </a:solidFill>
+                      <a:prstDash val="solid"/>
+                      <a:round/>
+                      <a:headEnd type="none" w="med" len="med"/>
+                      <a:tailEnd type="none" w="med" len="med"/>
+                    </a:lnB>
+                    <a:solidFill>
+                      <a:srgbClr val="1A1A2E"/>
+                    </a:solidFill>
+                  </a:tcPr>
+                </a:tc>
+                <a:tc>
+                  <a:txBody>
+                    <a:bodyPr/>
+                    <a:lstStyle/>
+                    <a:p>
+                      <a:pPr algn="ctr" indent="0" marL="0">
+                        <a:buNone/>
+                      </a:pPr>
+                      <a:r>
+                        <a:rPr lang="en-US" sz="1400" b="1" dirty="0">
+                          <a:solidFill>
+                            <a:srgbClr val="FFFFFF"/>
+                          </a:solidFill>
+                          <a:latin typeface="Times New Roman" pitchFamily="34" charset="0"/>
+                          <a:ea typeface="Times New Roman" pitchFamily="34" charset="-122"/>
+                          <a:cs typeface="Times New Roman" pitchFamily="34" charset="-120"/>
+                        </a:rPr>
+                        <a:t>Плановое значение</a:t>
+                      </a:r>
+                      <a:endParaRPr lang="en-US" sz="1400" dirty="0">
+                        <a:latin typeface="Times New Roman" charset="0"/>
+                        <a:ea typeface="Times New Roman" charset="0"/>
+                        <a:cs typeface="Times New Roman" charset="0"/>
+                      </a:endParaRPr>
+                    </a:p>
+                  </a:txBody>
+                  <a:tcPr marL="91440" marR="91440" marT="45720" marB="45720" anchor="ctr">
+                    <a:lnL w="6350" cap="flat" cmpd="sng" algn="ctr">
+                      <a:solidFill>
+                        <a:srgbClr val="EFEAE3"/>
+                      </a:solidFill>
+                      <a:prstDash val="solid"/>
+                      <a:round/>
+                      <a:headEnd type="none" w="med" len="med"/>
+                      <a:tailEnd type="none" w="med" len="med"/>
+                    </a:lnL>
+                    <a:lnR w="6350" cap="flat" cmpd="sng" algn="ctr">
+                      <a:solidFill>
+                        <a:srgbClr val="EFEAE3"/>
+                      </a:solidFill>
+                      <a:prstDash val="solid"/>
+                      <a:round/>
+                      <a:headEnd type="none" w="med" len="med"/>
+                      <a:tailEnd type="none" w="med" len="med"/>
+                    </a:lnR>
+                    <a:lnT w="6350" cap="flat" cmpd="sng" algn="ctr">
+                      <a:solidFill>
+                        <a:srgbClr val="EFEAE3"/>
+                      </a:solidFill>
+                      <a:prstDash val="solid"/>
+                      <a:round/>
+                      <a:headEnd type="none" w="med" len="med"/>
+                      <a:tailEnd type="none" w="med" len="med"/>
+                    </a:lnT>
+                    <a:lnB w="6350" cap="flat" cmpd="sng" algn="ctr">
+                      <a:solidFill>
+                        <a:srgbClr val="EFEAE3"/>
+                      </a:solidFill>
+                      <a:prstDash val="solid"/>
+                      <a:round/>
+                      <a:headEnd type="none" w="med" len="med"/>
+                      <a:tailEnd type="none" w="med" len="med"/>
+                    </a:lnB>
+                    <a:solidFill>
+                      <a:srgbClr val="1A1A2E"/>
+                    </a:solidFill>
+                  </a:tcPr>
+                </a:tc>
+                <a:tc>
+                  <a:txBody>
+                    <a:bodyPr/>
+                    <a:lstStyle/>
+                    <a:p>
+                      <a:pPr algn="ctr" indent="0" marL="0">
+                        <a:buNone/>
+                      </a:pPr>
+                      <a:r>
+                        <a:rPr lang="en-US" sz="1400" b="1" dirty="0">
+                          <a:solidFill>
+                            <a:srgbClr val="FFFFFF"/>
+                          </a:solidFill>
+                          <a:latin typeface="Times New Roman" pitchFamily="34" charset="0"/>
+                          <a:ea typeface="Times New Roman" pitchFamily="34" charset="-122"/>
+                          <a:cs typeface="Times New Roman" pitchFamily="34" charset="-120"/>
+                        </a:rPr>
+                        <a:t>Фактическое значение</a:t>
+                      </a:r>
+                      <a:endParaRPr lang="en-US" sz="1400" dirty="0">
+                        <a:latin typeface="Times New Roman" charset="0"/>
+                        <a:ea typeface="Times New Roman" charset="0"/>
+                        <a:cs typeface="Times New Roman" charset="0"/>
+                      </a:endParaRPr>
+                    </a:p>
+                  </a:txBody>
+                  <a:tcPr marL="91440" marR="91440" marT="45720" marB="45720" anchor="ctr">
+                    <a:lnL w="6350" cap="flat" cmpd="sng" algn="ctr">
+                      <a:solidFill>
+                        <a:srgbClr val="EFEAE3"/>
+                      </a:solidFill>
+                      <a:prstDash val="solid"/>
+                      <a:round/>
+                      <a:headEnd type="none" w="med" len="med"/>
+                      <a:tailEnd type="none" w="med" len="med"/>
+                    </a:lnL>
+                    <a:lnR w="6350" cap="flat" cmpd="sng" algn="ctr">
+                      <a:solidFill>
+                        <a:srgbClr val="EFEAE3"/>
+                      </a:solidFill>
+                      <a:prstDash val="solid"/>
+                      <a:round/>
+                      <a:headEnd type="none" w="med" len="med"/>
+                      <a:tailEnd type="none" w="med" len="med"/>
+                    </a:lnR>
+                    <a:lnT w="6350" cap="flat" cmpd="sng" algn="ctr">
+                      <a:solidFill>
+                        <a:srgbClr val="EFEAE3"/>
+                      </a:solidFill>
+                      <a:prstDash val="solid"/>
+                      <a:round/>
+                      <a:headEnd type="none" w="med" len="med"/>
+                      <a:tailEnd type="none" w="med" len="med"/>
+                    </a:lnT>
+                    <a:lnB w="6350" cap="flat" cmpd="sng" algn="ctr">
+                      <a:solidFill>
+                        <a:srgbClr val="EFEAE3"/>
+                      </a:solidFill>
+                      <a:prstDash val="solid"/>
+                      <a:round/>
+                      <a:headEnd type="none" w="med" len="med"/>
+                      <a:tailEnd type="none" w="med" len="med"/>
+                    </a:lnB>
+                    <a:solidFill>
+                      <a:srgbClr val="1A1A2E"/>
+                    </a:solidFill>
+                  </a:tcPr>
+                </a:tc>
+                <a:tc>
+                  <a:txBody>
+                    <a:bodyPr/>
+                    <a:lstStyle/>
+                    <a:p>
+                      <a:pPr algn="ctr" indent="0" marL="0">
+                        <a:buNone/>
+                      </a:pPr>
+                      <a:r>
+                        <a:rPr lang="en-US" sz="1400" b="1" dirty="0">
+                          <a:solidFill>
+                            <a:srgbClr val="FFFFFF"/>
+                          </a:solidFill>
+                          <a:latin typeface="Times New Roman" pitchFamily="34" charset="0"/>
+                          <a:ea typeface="Times New Roman" pitchFamily="34" charset="-122"/>
+                          <a:cs typeface="Times New Roman" pitchFamily="34" charset="-120"/>
+                        </a:rPr>
+                        <a:t>Отклонение</a:t>
+                      </a:r>
+                      <a:endParaRPr lang="en-US" sz="1400" dirty="0">
+                        <a:latin typeface="Times New Roman" charset="0"/>
+                        <a:ea typeface="Times New Roman" charset="0"/>
+                        <a:cs typeface="Times New Roman" charset="0"/>
+                      </a:endParaRPr>
+                    </a:p>
+                  </a:txBody>
+                  <a:tcPr marL="91440" marR="91440" marT="45720" marB="45720" anchor="ctr">
+                    <a:lnL w="6350" cap="flat" cmpd="sng" algn="ctr">
+                      <a:solidFill>
+                        <a:srgbClr val="EFEAE3"/>
+                      </a:solidFill>
+                      <a:prstDash val="solid"/>
+                      <a:round/>
+                      <a:headEnd type="none" w="med" len="med"/>
+                      <a:tailEnd type="none" w="med" len="med"/>
+                    </a:lnL>
+                    <a:lnR w="6350" cap="flat" cmpd="sng" algn="ctr">
+                      <a:solidFill>
+                        <a:srgbClr val="EFEAE3"/>
+                      </a:solidFill>
+                      <a:prstDash val="solid"/>
+                      <a:round/>
+                      <a:headEnd type="none" w="med" len="med"/>
+                      <a:tailEnd type="none" w="med" len="med"/>
+                    </a:lnR>
+                    <a:lnT w="6350" cap="flat" cmpd="sng" algn="ctr">
+                      <a:solidFill>
+                        <a:srgbClr val="EFEAE3"/>
+                      </a:solidFill>
+                      <a:prstDash val="solid"/>
+                      <a:round/>
+                      <a:headEnd type="none" w="med" len="med"/>
+                      <a:tailEnd type="none" w="med" len="med"/>
+                    </a:lnT>
+                    <a:lnB w="6350" cap="flat" cmpd="sng" algn="ctr">
+                      <a:solidFill>
+                        <a:srgbClr val="EFEAE3"/>
+                      </a:solidFill>
+                      <a:prstDash val="solid"/>
+                      <a:round/>
+                      <a:headEnd type="none" w="med" len="med"/>
+                      <a:tailEnd type="none" w="med" len="med"/>
+                    </a:lnB>
+                    <a:solidFill>
+                      <a:srgbClr val="1A1A2E"/>
+                    </a:solidFill>
+                  </a:tcPr>
+                </a:tc>
+              </a:tr>
+              <a:tr h="594360">
+                <a:tc>
+                  <a:txBody>
+                    <a:bodyPr/>
+                    <a:lstStyle/>
+                    <a:p>
+                      <a:pPr algn="l" indent="0" marL="0">
+                        <a:buNone/>
+                      </a:pPr>
+                      <a:r>
+                        <a:rPr lang="en-US" sz="1400" dirty="0">
+                          <a:solidFill>
+                            <a:srgbClr val="2D2D3A"/>
+                          </a:solidFill>
+                          <a:latin typeface="Times New Roman" pitchFamily="34" charset="0"/>
+                          <a:ea typeface="Times New Roman" pitchFamily="34" charset="-122"/>
+                          <a:cs typeface="Times New Roman" pitchFamily="34" charset="-120"/>
+                        </a:rPr>
+                        <a:t>Функциональные точки (FP)</a:t>
+                      </a:r>
+                      <a:endParaRPr lang="en-US" sz="1400" dirty="0">
+                        <a:latin typeface="Times New Roman" charset="0"/>
+                        <a:ea typeface="Times New Roman" charset="0"/>
+                        <a:cs typeface="Times New Roman" charset="0"/>
+                      </a:endParaRPr>
+                    </a:p>
+                  </a:txBody>
+                  <a:tcPr marL="91440" marR="91440" marT="45720" marB="45720" anchor="ctr">
+                    <a:lnL w="6350" cap="flat" cmpd="sng" algn="ctr">
+                      <a:solidFill>
+                        <a:srgbClr val="EFEAE3"/>
+                      </a:solidFill>
+                      <a:prstDash val="solid"/>
+                      <a:round/>
+                      <a:headEnd type="none" w="med" len="med"/>
+                      <a:tailEnd type="none" w="med" len="med"/>
+                    </a:lnL>
+                    <a:lnR w="6350" cap="flat" cmpd="sng" algn="ctr">
+                      <a:solidFill>
+                        <a:srgbClr val="EFEAE3"/>
+                      </a:solidFill>
+                      <a:prstDash val="solid"/>
+                      <a:round/>
+                      <a:headEnd type="none" w="med" len="med"/>
+                      <a:tailEnd type="none" w="med" len="med"/>
+                    </a:lnR>
+                    <a:lnT w="6350" cap="flat" cmpd="sng" algn="ctr">
+                      <a:solidFill>
+                        <a:srgbClr val="EFEAE3"/>
+                      </a:solidFill>
+                      <a:prstDash val="solid"/>
+                      <a:round/>
+                      <a:headEnd type="none" w="med" len="med"/>
+                      <a:tailEnd type="none" w="med" len="med"/>
+                    </a:lnT>
+                    <a:lnB w="6350" cap="flat" cmpd="sng" algn="ctr">
+                      <a:solidFill>
+                        <a:srgbClr val="EFEAE3"/>
+                      </a:solidFill>
+                      <a:prstDash val="solid"/>
+                      <a:round/>
+                      <a:headEnd type="none" w="med" len="med"/>
+                      <a:tailEnd type="none" w="med" len="med"/>
+                    </a:lnB>
+                    <a:solidFill>
+                      <a:srgbClr val="F8F4F0"/>
+                    </a:solidFill>
+                  </a:tcPr>
+                </a:tc>
+                <a:tc>
+                  <a:txBody>
+                    <a:bodyPr/>
+                    <a:lstStyle/>
+                    <a:p>
+                      <a:pPr algn="l" indent="0" marL="0">
+                        <a:buNone/>
+                      </a:pPr>
+                      <a:r>
+                        <a:rPr lang="en-US" sz="1400" dirty="0">
+                          <a:solidFill>
+                            <a:srgbClr val="2D2D3A"/>
+                          </a:solidFill>
+                          <a:latin typeface="Times New Roman" pitchFamily="34" charset="0"/>
+                          <a:ea typeface="Times New Roman" pitchFamily="34" charset="-122"/>
+                          <a:cs typeface="Times New Roman" pitchFamily="34" charset="-120"/>
+                        </a:rPr>
+                        <a:t>112</a:t>
+                      </a:r>
+                      <a:endParaRPr lang="en-US" sz="1400" dirty="0">
+                        <a:latin typeface="Times New Roman" charset="0"/>
+                        <a:ea typeface="Times New Roman" charset="0"/>
+                        <a:cs typeface="Times New Roman" charset="0"/>
+                      </a:endParaRPr>
+                    </a:p>
+                  </a:txBody>
+                  <a:tcPr marL="91440" marR="91440" marT="45720" marB="45720" anchor="ctr">
+                    <a:lnL w="6350" cap="flat" cmpd="sng" algn="ctr">
+                      <a:solidFill>
+                        <a:srgbClr val="EFEAE3"/>
+                      </a:solidFill>
+                      <a:prstDash val="solid"/>
+                      <a:round/>
+                      <a:headEnd type="none" w="med" len="med"/>
+                      <a:tailEnd type="none" w="med" len="med"/>
+                    </a:lnL>
+                    <a:lnR w="6350" cap="flat" cmpd="sng" algn="ctr">
+                      <a:solidFill>
+                        <a:srgbClr val="EFEAE3"/>
+                      </a:solidFill>
+                      <a:prstDash val="solid"/>
+                      <a:round/>
+                      <a:headEnd type="none" w="med" len="med"/>
+                      <a:tailEnd type="none" w="med" len="med"/>
+                    </a:lnR>
+                    <a:lnT w="6350" cap="flat" cmpd="sng" algn="ctr">
+                      <a:solidFill>
+                        <a:srgbClr val="EFEAE3"/>
+                      </a:solidFill>
+                      <a:prstDash val="solid"/>
+                      <a:round/>
+                      <a:headEnd type="none" w="med" len="med"/>
+                      <a:tailEnd type="none" w="med" len="med"/>
+                    </a:lnT>
+                    <a:lnB w="6350" cap="flat" cmpd="sng" algn="ctr">
+                      <a:solidFill>
+                        <a:srgbClr val="EFEAE3"/>
+                      </a:solidFill>
+                      <a:prstDash val="solid"/>
+                      <a:round/>
+                      <a:headEnd type="none" w="med" len="med"/>
+                      <a:tailEnd type="none" w="med" len="med"/>
+                    </a:lnB>
+                    <a:solidFill>
+                      <a:srgbClr val="F8F4F0"/>
+                    </a:solidFill>
+                  </a:tcPr>
+                </a:tc>
+                <a:tc>
+                  <a:txBody>
+                    <a:bodyPr/>
+                    <a:lstStyle/>
+                    <a:p>
+                      <a:pPr algn="l" indent="0" marL="0">
+                        <a:buNone/>
+                      </a:pPr>
+                      <a:r>
+                        <a:rPr lang="en-US" sz="1400" dirty="0">
+                          <a:solidFill>
+                            <a:srgbClr val="2D2D3A"/>
+                          </a:solidFill>
+                          <a:latin typeface="Times New Roman" pitchFamily="34" charset="0"/>
+                          <a:ea typeface="Times New Roman" pitchFamily="34" charset="-122"/>
+                          <a:cs typeface="Times New Roman" pitchFamily="34" charset="-120"/>
+                        </a:rPr>
+                        <a:t>112</a:t>
+                      </a:r>
+                      <a:endParaRPr lang="en-US" sz="1400" dirty="0">
+                        <a:latin typeface="Times New Roman" charset="0"/>
+                        <a:ea typeface="Times New Roman" charset="0"/>
+                        <a:cs typeface="Times New Roman" charset="0"/>
+                      </a:endParaRPr>
+                    </a:p>
+                  </a:txBody>
+                  <a:tcPr marL="91440" marR="91440" marT="45720" marB="45720" anchor="ctr">
+                    <a:lnL w="6350" cap="flat" cmpd="sng" algn="ctr">
+                      <a:solidFill>
+                        <a:srgbClr val="EFEAE3"/>
+                      </a:solidFill>
+                      <a:prstDash val="solid"/>
+                      <a:round/>
+                      <a:headEnd type="none" w="med" len="med"/>
+                      <a:tailEnd type="none" w="med" len="med"/>
+                    </a:lnL>
+                    <a:lnR w="6350" cap="flat" cmpd="sng" algn="ctr">
+                      <a:solidFill>
+                        <a:srgbClr val="EFEAE3"/>
+                      </a:solidFill>
+                      <a:prstDash val="solid"/>
+                      <a:round/>
+                      <a:headEnd type="none" w="med" len="med"/>
+                      <a:tailEnd type="none" w="med" len="med"/>
+                    </a:lnR>
+                    <a:lnT w="6350" cap="flat" cmpd="sng" algn="ctr">
+                      <a:solidFill>
+                        <a:srgbClr val="EFEAE3"/>
+                      </a:solidFill>
+                      <a:prstDash val="solid"/>
+                      <a:round/>
+                      <a:headEnd type="none" w="med" len="med"/>
+                      <a:tailEnd type="none" w="med" len="med"/>
+                    </a:lnT>
+                    <a:lnB w="6350" cap="flat" cmpd="sng" algn="ctr">
+                      <a:solidFill>
+                        <a:srgbClr val="EFEAE3"/>
+                      </a:solidFill>
+                      <a:prstDash val="solid"/>
+                      <a:round/>
+                      <a:headEnd type="none" w="med" len="med"/>
+                      <a:tailEnd type="none" w="med" len="med"/>
+                    </a:lnB>
+                    <a:solidFill>
+                      <a:srgbClr val="F8F4F0"/>
+                    </a:solidFill>
+                  </a:tcPr>
+                </a:tc>
+                <a:tc>
+                  <a:txBody>
+                    <a:bodyPr/>
+                    <a:lstStyle/>
+                    <a:p>
+                      <a:pPr algn="l" indent="0" marL="0">
+                        <a:buNone/>
+                      </a:pPr>
+                      <a:r>
+                        <a:rPr lang="en-US" sz="1400" dirty="0">
+                          <a:solidFill>
+                            <a:srgbClr val="2D2D3A"/>
+                          </a:solidFill>
+                          <a:latin typeface="Times New Roman" pitchFamily="34" charset="0"/>
+                          <a:ea typeface="Times New Roman" pitchFamily="34" charset="-122"/>
+                          <a:cs typeface="Times New Roman" pitchFamily="34" charset="-120"/>
+                        </a:rPr>
+                        <a:t>0%</a:t>
+                      </a:r>
+                      <a:endParaRPr lang="en-US" sz="1400" dirty="0">
+                        <a:latin typeface="Times New Roman" charset="0"/>
+                        <a:ea typeface="Times New Roman" charset="0"/>
+                        <a:cs typeface="Times New Roman" charset="0"/>
+                      </a:endParaRPr>
+                    </a:p>
+                  </a:txBody>
+                  <a:tcPr marL="91440" marR="91440" marT="45720" marB="45720" anchor="ctr">
+                    <a:lnL w="6350" cap="flat" cmpd="sng" algn="ctr">
+                      <a:solidFill>
+                        <a:srgbClr val="EFEAE3"/>
+                      </a:solidFill>
+                      <a:prstDash val="solid"/>
+                      <a:round/>
+                      <a:headEnd type="none" w="med" len="med"/>
+                      <a:tailEnd type="none" w="med" len="med"/>
+                    </a:lnL>
+                    <a:lnR w="6350" cap="flat" cmpd="sng" algn="ctr">
+                      <a:solidFill>
+                        <a:srgbClr val="EFEAE3"/>
+                      </a:solidFill>
+                      <a:prstDash val="solid"/>
+                      <a:round/>
+                      <a:headEnd type="none" w="med" len="med"/>
+                      <a:tailEnd type="none" w="med" len="med"/>
+                    </a:lnR>
+                    <a:lnT w="6350" cap="flat" cmpd="sng" algn="ctr">
+                      <a:solidFill>
+                        <a:srgbClr val="EFEAE3"/>
+                      </a:solidFill>
+                      <a:prstDash val="solid"/>
+                      <a:round/>
+                      <a:headEnd type="none" w="med" len="med"/>
+                      <a:tailEnd type="none" w="med" len="med"/>
+                    </a:lnT>
+                    <a:lnB w="6350" cap="flat" cmpd="sng" algn="ctr">
+                      <a:solidFill>
+                        <a:srgbClr val="EFEAE3"/>
+                      </a:solidFill>
+                      <a:prstDash val="solid"/>
+                      <a:round/>
+                      <a:headEnd type="none" w="med" len="med"/>
+                      <a:tailEnd type="none" w="med" len="med"/>
+                    </a:lnB>
+                    <a:solidFill>
+                      <a:srgbClr val="F8F4F0"/>
+                    </a:solidFill>
+                  </a:tcPr>
+                </a:tc>
+              </a:tr>
+              <a:tr h="594360">
+                <a:tc>
+                  <a:txBody>
+                    <a:bodyPr/>
+                    <a:lstStyle/>
+                    <a:p>
+                      <a:pPr algn="l" indent="0" marL="0">
+                        <a:buNone/>
+                      </a:pPr>
+                      <a:r>
+                        <a:rPr lang="en-US" sz="1400" dirty="0">
+                          <a:solidFill>
+                            <a:srgbClr val="2D2D3A"/>
+                          </a:solidFill>
+                          <a:latin typeface="Times New Roman" pitchFamily="34" charset="0"/>
+                          <a:ea typeface="Times New Roman" pitchFamily="34" charset="-122"/>
+                          <a:cs typeface="Times New Roman" pitchFamily="34" charset="-120"/>
+                        </a:rPr>
+                        <a:t>Размер кода (KLOC)</a:t>
+                      </a:r>
+                      <a:endParaRPr lang="en-US" sz="1400" dirty="0">
+                        <a:latin typeface="Times New Roman" charset="0"/>
+                        <a:ea typeface="Times New Roman" charset="0"/>
+                        <a:cs typeface="Times New Roman" charset="0"/>
+                      </a:endParaRPr>
+                    </a:p>
+                  </a:txBody>
+                  <a:tcPr marL="91440" marR="91440" marT="45720" marB="45720" anchor="ctr">
+                    <a:lnL w="6350" cap="flat" cmpd="sng" algn="ctr">
+                      <a:solidFill>
+                        <a:srgbClr val="EFEAE3"/>
+                      </a:solidFill>
+                      <a:prstDash val="solid"/>
+                      <a:round/>
+                      <a:headEnd type="none" w="med" len="med"/>
+                      <a:tailEnd type="none" w="med" len="med"/>
+                    </a:lnL>
+                    <a:lnR w="6350" cap="flat" cmpd="sng" algn="ctr">
+                      <a:solidFill>
+                        <a:srgbClr val="EFEAE3"/>
+                      </a:solidFill>
+                      <a:prstDash val="solid"/>
+                      <a:round/>
+                      <a:headEnd type="none" w="med" len="med"/>
+                      <a:tailEnd type="none" w="med" len="med"/>
+                    </a:lnR>
+                    <a:lnT w="6350" cap="flat" cmpd="sng" algn="ctr">
+                      <a:solidFill>
+                        <a:srgbClr val="EFEAE3"/>
+                      </a:solidFill>
+                      <a:prstDash val="solid"/>
+                      <a:round/>
+                      <a:headEnd type="none" w="med" len="med"/>
+                      <a:tailEnd type="none" w="med" len="med"/>
+                    </a:lnT>
+                    <a:lnB w="6350" cap="flat" cmpd="sng" algn="ctr">
+                      <a:solidFill>
+                        <a:srgbClr val="EFEAE3"/>
+                      </a:solidFill>
+                      <a:prstDash val="solid"/>
+                      <a:round/>
+                      <a:headEnd type="none" w="med" len="med"/>
+                      <a:tailEnd type="none" w="med" len="med"/>
+                    </a:lnB>
+                    <a:solidFill>
+                      <a:srgbClr val="FFFFFF"/>
+                    </a:solidFill>
+                  </a:tcPr>
+                </a:tc>
+                <a:tc>
+                  <a:txBody>
+                    <a:bodyPr/>
+                    <a:lstStyle/>
+                    <a:p>
+                      <a:pPr algn="l" indent="0" marL="0">
+                        <a:buNone/>
+                      </a:pPr>
+                      <a:r>
+                        <a:rPr lang="en-US" sz="1400" dirty="0">
+                          <a:solidFill>
+                            <a:srgbClr val="2D2D3A"/>
+                          </a:solidFill>
+                          <a:latin typeface="Times New Roman" pitchFamily="34" charset="0"/>
+                          <a:ea typeface="Times New Roman" pitchFamily="34" charset="-122"/>
+                          <a:cs typeface="Times New Roman" pitchFamily="34" charset="-120"/>
+                        </a:rPr>
+                        <a:t>5.94</a:t>
+                      </a:r>
+                      <a:endParaRPr lang="en-US" sz="1400" dirty="0">
+                        <a:latin typeface="Times New Roman" charset="0"/>
+                        <a:ea typeface="Times New Roman" charset="0"/>
+                        <a:cs typeface="Times New Roman" charset="0"/>
+                      </a:endParaRPr>
+                    </a:p>
+                  </a:txBody>
+                  <a:tcPr marL="91440" marR="91440" marT="45720" marB="45720" anchor="ctr">
+                    <a:lnL w="6350" cap="flat" cmpd="sng" algn="ctr">
+                      <a:solidFill>
+                        <a:srgbClr val="EFEAE3"/>
+                      </a:solidFill>
+                      <a:prstDash val="solid"/>
+                      <a:round/>
+                      <a:headEnd type="none" w="med" len="med"/>
+                      <a:tailEnd type="none" w="med" len="med"/>
+                    </a:lnL>
+                    <a:lnR w="6350" cap="flat" cmpd="sng" algn="ctr">
+                      <a:solidFill>
+                        <a:srgbClr val="EFEAE3"/>
+                      </a:solidFill>
+                      <a:prstDash val="solid"/>
+                      <a:round/>
+                      <a:headEnd type="none" w="med" len="med"/>
+                      <a:tailEnd type="none" w="med" len="med"/>
+                    </a:lnR>
+                    <a:lnT w="6350" cap="flat" cmpd="sng" algn="ctr">
+                      <a:solidFill>
+                        <a:srgbClr val="EFEAE3"/>
+                      </a:solidFill>
+                      <a:prstDash val="solid"/>
+                      <a:round/>
+                      <a:headEnd type="none" w="med" len="med"/>
+                      <a:tailEnd type="none" w="med" len="med"/>
+                    </a:lnT>
+                    <a:lnB w="6350" cap="flat" cmpd="sng" algn="ctr">
+                      <a:solidFill>
+                        <a:srgbClr val="EFEAE3"/>
+                      </a:solidFill>
+                      <a:prstDash val="solid"/>
+                      <a:round/>
+                      <a:headEnd type="none" w="med" len="med"/>
+                      <a:tailEnd type="none" w="med" len="med"/>
+                    </a:lnB>
+                    <a:solidFill>
+                      <a:srgbClr val="FFFFFF"/>
+                    </a:solidFill>
+                  </a:tcPr>
+                </a:tc>
+                <a:tc>
+                  <a:txBody>
+                    <a:bodyPr/>
+                    <a:lstStyle/>
+                    <a:p>
+                      <a:pPr algn="l" indent="0" marL="0">
+                        <a:buNone/>
+                      </a:pPr>
+                      <a:r>
+                        <a:rPr lang="en-US" sz="1400" dirty="0">
+                          <a:solidFill>
+                            <a:srgbClr val="2D2D3A"/>
+                          </a:solidFill>
+                          <a:latin typeface="Times New Roman" pitchFamily="34" charset="0"/>
+                          <a:ea typeface="Times New Roman" pitchFamily="34" charset="-122"/>
+                          <a:cs typeface="Times New Roman" pitchFamily="34" charset="-120"/>
+                        </a:rPr>
+                        <a:t>8.93</a:t>
+                      </a:r>
+                      <a:endParaRPr lang="en-US" sz="1400" dirty="0">
+                        <a:latin typeface="Times New Roman" charset="0"/>
+                        <a:ea typeface="Times New Roman" charset="0"/>
+                        <a:cs typeface="Times New Roman" charset="0"/>
+                      </a:endParaRPr>
+                    </a:p>
+                  </a:txBody>
+                  <a:tcPr marL="91440" marR="91440" marT="45720" marB="45720" anchor="ctr">
+                    <a:lnL w="6350" cap="flat" cmpd="sng" algn="ctr">
+                      <a:solidFill>
+                        <a:srgbClr val="EFEAE3"/>
+                      </a:solidFill>
+                      <a:prstDash val="solid"/>
+                      <a:round/>
+                      <a:headEnd type="none" w="med" len="med"/>
+                      <a:tailEnd type="none" w="med" len="med"/>
+                    </a:lnL>
+                    <a:lnR w="6350" cap="flat" cmpd="sng" algn="ctr">
+                      <a:solidFill>
+                        <a:srgbClr val="EFEAE3"/>
+                      </a:solidFill>
+                      <a:prstDash val="solid"/>
+                      <a:round/>
+                      <a:headEnd type="none" w="med" len="med"/>
+                      <a:tailEnd type="none" w="med" len="med"/>
+                    </a:lnR>
+                    <a:lnT w="6350" cap="flat" cmpd="sng" algn="ctr">
+                      <a:solidFill>
+                        <a:srgbClr val="EFEAE3"/>
+                      </a:solidFill>
+                      <a:prstDash val="solid"/>
+                      <a:round/>
+                      <a:headEnd type="none" w="med" len="med"/>
+                      <a:tailEnd type="none" w="med" len="med"/>
+                    </a:lnT>
+                    <a:lnB w="6350" cap="flat" cmpd="sng" algn="ctr">
+                      <a:solidFill>
+                        <a:srgbClr val="EFEAE3"/>
+                      </a:solidFill>
+                      <a:prstDash val="solid"/>
+                      <a:round/>
+                      <a:headEnd type="none" w="med" len="med"/>
+                      <a:tailEnd type="none" w="med" len="med"/>
+                    </a:lnB>
+                    <a:solidFill>
+                      <a:srgbClr val="FFFFFF"/>
+                    </a:solidFill>
+                  </a:tcPr>
+                </a:tc>
+                <a:tc>
+                  <a:txBody>
+                    <a:bodyPr/>
+                    <a:lstStyle/>
+                    <a:p>
+                      <a:pPr algn="l" indent="0" marL="0">
+                        <a:buNone/>
+                      </a:pPr>
+                      <a:r>
+                        <a:rPr lang="en-US" sz="1400" dirty="0">
+                          <a:solidFill>
+                            <a:srgbClr val="2D2D3A"/>
+                          </a:solidFill>
+                          <a:latin typeface="Times New Roman" pitchFamily="34" charset="0"/>
+                          <a:ea typeface="Times New Roman" pitchFamily="34" charset="-122"/>
+                          <a:cs typeface="Times New Roman" pitchFamily="34" charset="-120"/>
+                        </a:rPr>
+                        <a:t>+50.3%</a:t>
+                      </a:r>
+                      <a:endParaRPr lang="en-US" sz="1400" dirty="0">
+                        <a:latin typeface="Times New Roman" charset="0"/>
+                        <a:ea typeface="Times New Roman" charset="0"/>
+                        <a:cs typeface="Times New Roman" charset="0"/>
+                      </a:endParaRPr>
+                    </a:p>
+                  </a:txBody>
+                  <a:tcPr marL="91440" marR="91440" marT="45720" marB="45720" anchor="ctr">
+                    <a:lnL w="6350" cap="flat" cmpd="sng" algn="ctr">
+                      <a:solidFill>
+                        <a:srgbClr val="EFEAE3"/>
+                      </a:solidFill>
+                      <a:prstDash val="solid"/>
+                      <a:round/>
+                      <a:headEnd type="none" w="med" len="med"/>
+                      <a:tailEnd type="none" w="med" len="med"/>
+                    </a:lnL>
+                    <a:lnR w="6350" cap="flat" cmpd="sng" algn="ctr">
+                      <a:solidFill>
+                        <a:srgbClr val="EFEAE3"/>
+                      </a:solidFill>
+                      <a:prstDash val="solid"/>
+                      <a:round/>
+                      <a:headEnd type="none" w="med" len="med"/>
+                      <a:tailEnd type="none" w="med" len="med"/>
+                    </a:lnR>
+                    <a:lnT w="6350" cap="flat" cmpd="sng" algn="ctr">
+                      <a:solidFill>
+                        <a:srgbClr val="EFEAE3"/>
+                      </a:solidFill>
+                      <a:prstDash val="solid"/>
+                      <a:round/>
+                      <a:headEnd type="none" w="med" len="med"/>
+                      <a:tailEnd type="none" w="med" len="med"/>
+                    </a:lnT>
+                    <a:lnB w="6350" cap="flat" cmpd="sng" algn="ctr">
+                      <a:solidFill>
+                        <a:srgbClr val="EFEAE3"/>
+                      </a:solidFill>
+                      <a:prstDash val="solid"/>
+                      <a:round/>
+                      <a:headEnd type="none" w="med" len="med"/>
+                      <a:tailEnd type="none" w="med" len="med"/>
+                    </a:lnB>
+                    <a:solidFill>
+                      <a:srgbClr val="FFFFFF"/>
+                    </a:solidFill>
+                  </a:tcPr>
+                </a:tc>
+              </a:tr>
+              <a:tr h="594360">
+                <a:tc>
+                  <a:txBody>
+                    <a:bodyPr/>
+                    <a:lstStyle/>
+                    <a:p>
+                      <a:pPr algn="l" indent="0" marL="0">
+                        <a:buNone/>
+                      </a:pPr>
+                      <a:r>
+                        <a:rPr lang="en-US" sz="1400" dirty="0">
+                          <a:solidFill>
+                            <a:srgbClr val="2D2D3A"/>
+                          </a:solidFill>
+                          <a:latin typeface="Times New Roman" pitchFamily="34" charset="0"/>
+                          <a:ea typeface="Times New Roman" pitchFamily="34" charset="-122"/>
+                          <a:cs typeface="Times New Roman" pitchFamily="34" charset="-120"/>
+                        </a:rPr>
+                        <a:t>Трудоёмкость (чел.-мес)</a:t>
+                      </a:r>
+                      <a:endParaRPr lang="en-US" sz="1400" dirty="0">
+                        <a:latin typeface="Times New Roman" charset="0"/>
+                        <a:ea typeface="Times New Roman" charset="0"/>
+                        <a:cs typeface="Times New Roman" charset="0"/>
+                      </a:endParaRPr>
+                    </a:p>
+                  </a:txBody>
+                  <a:tcPr marL="91440" marR="91440" marT="45720" marB="45720" anchor="ctr">
+                    <a:lnL w="6350" cap="flat" cmpd="sng" algn="ctr">
+                      <a:solidFill>
+                        <a:srgbClr val="EFEAE3"/>
+                      </a:solidFill>
+                      <a:prstDash val="solid"/>
+                      <a:round/>
+                      <a:headEnd type="none" w="med" len="med"/>
+                      <a:tailEnd type="none" w="med" len="med"/>
+                    </a:lnL>
+                    <a:lnR w="6350" cap="flat" cmpd="sng" algn="ctr">
+                      <a:solidFill>
+                        <a:srgbClr val="EFEAE3"/>
+                      </a:solidFill>
+                      <a:prstDash val="solid"/>
+                      <a:round/>
+                      <a:headEnd type="none" w="med" len="med"/>
+                      <a:tailEnd type="none" w="med" len="med"/>
+                    </a:lnR>
+                    <a:lnT w="6350" cap="flat" cmpd="sng" algn="ctr">
+                      <a:solidFill>
+                        <a:srgbClr val="EFEAE3"/>
+                      </a:solidFill>
+                      <a:prstDash val="solid"/>
+                      <a:round/>
+                      <a:headEnd type="none" w="med" len="med"/>
+                      <a:tailEnd type="none" w="med" len="med"/>
+                    </a:lnT>
+                    <a:lnB w="6350" cap="flat" cmpd="sng" algn="ctr">
+                      <a:solidFill>
+                        <a:srgbClr val="EFEAE3"/>
+                      </a:solidFill>
+                      <a:prstDash val="solid"/>
+                      <a:round/>
+                      <a:headEnd type="none" w="med" len="med"/>
+                      <a:tailEnd type="none" w="med" len="med"/>
+                    </a:lnB>
+                    <a:solidFill>
+                      <a:srgbClr val="F8F4F0"/>
+                    </a:solidFill>
+                  </a:tcPr>
+                </a:tc>
+                <a:tc>
+                  <a:txBody>
+                    <a:bodyPr/>
+                    <a:lstStyle/>
+                    <a:p>
+                      <a:pPr algn="l" indent="0" marL="0">
+                        <a:buNone/>
+                      </a:pPr>
+                      <a:r>
+                        <a:rPr lang="en-US" sz="1400" dirty="0">
+                          <a:solidFill>
+                            <a:srgbClr val="2D2D3A"/>
+                          </a:solidFill>
+                          <a:latin typeface="Times New Roman" pitchFamily="34" charset="0"/>
+                          <a:ea typeface="Times New Roman" pitchFamily="34" charset="-122"/>
+                          <a:cs typeface="Times New Roman" pitchFamily="34" charset="-120"/>
+                        </a:rPr>
+                        <a:t>15.5</a:t>
+                      </a:r>
+                      <a:endParaRPr lang="en-US" sz="1400" dirty="0">
+                        <a:latin typeface="Times New Roman" charset="0"/>
+                        <a:ea typeface="Times New Roman" charset="0"/>
+                        <a:cs typeface="Times New Roman" charset="0"/>
+                      </a:endParaRPr>
+                    </a:p>
+                  </a:txBody>
+                  <a:tcPr marL="91440" marR="91440" marT="45720" marB="45720" anchor="ctr">
+                    <a:lnL w="6350" cap="flat" cmpd="sng" algn="ctr">
+                      <a:solidFill>
+                        <a:srgbClr val="EFEAE3"/>
+                      </a:solidFill>
+                      <a:prstDash val="solid"/>
+                      <a:round/>
+                      <a:headEnd type="none" w="med" len="med"/>
+                      <a:tailEnd type="none" w="med" len="med"/>
+                    </a:lnL>
+                    <a:lnR w="6350" cap="flat" cmpd="sng" algn="ctr">
+                      <a:solidFill>
+                        <a:srgbClr val="EFEAE3"/>
+                      </a:solidFill>
+                      <a:prstDash val="solid"/>
+                      <a:round/>
+                      <a:headEnd type="none" w="med" len="med"/>
+                      <a:tailEnd type="none" w="med" len="med"/>
+                    </a:lnR>
+                    <a:lnT w="6350" cap="flat" cmpd="sng" algn="ctr">
+                      <a:solidFill>
+                        <a:srgbClr val="EFEAE3"/>
+                      </a:solidFill>
+                      <a:prstDash val="solid"/>
+                      <a:round/>
+                      <a:headEnd type="none" w="med" len="med"/>
+                      <a:tailEnd type="none" w="med" len="med"/>
+                    </a:lnT>
+                    <a:lnB w="6350" cap="flat" cmpd="sng" algn="ctr">
+                      <a:solidFill>
+                        <a:srgbClr val="EFEAE3"/>
+                      </a:solidFill>
+                      <a:prstDash val="solid"/>
+                      <a:round/>
+                      <a:headEnd type="none" w="med" len="med"/>
+                      <a:tailEnd type="none" w="med" len="med"/>
+                    </a:lnB>
+                    <a:solidFill>
+                      <a:srgbClr val="F8F4F0"/>
+                    </a:solidFill>
+                  </a:tcPr>
+                </a:tc>
+                <a:tc>
+                  <a:txBody>
+                    <a:bodyPr/>
+                    <a:lstStyle/>
+                    <a:p>
+                      <a:pPr algn="l" indent="0" marL="0">
+                        <a:buNone/>
+                      </a:pPr>
+                      <a:r>
+                        <a:rPr lang="en-US" sz="1400" dirty="0">
+                          <a:solidFill>
+                            <a:srgbClr val="2D2D3A"/>
+                          </a:solidFill>
+                          <a:latin typeface="Times New Roman" pitchFamily="34" charset="0"/>
+                          <a:ea typeface="Times New Roman" pitchFamily="34" charset="-122"/>
+                          <a:cs typeface="Times New Roman" pitchFamily="34" charset="-120"/>
+                        </a:rPr>
+                        <a:t>3.94</a:t>
+                      </a:r>
+                      <a:endParaRPr lang="en-US" sz="1400" dirty="0">
+                        <a:latin typeface="Times New Roman" charset="0"/>
+                        <a:ea typeface="Times New Roman" charset="0"/>
+                        <a:cs typeface="Times New Roman" charset="0"/>
+                      </a:endParaRPr>
+                    </a:p>
+                  </a:txBody>
+                  <a:tcPr marL="91440" marR="91440" marT="45720" marB="45720" anchor="ctr">
+                    <a:lnL w="6350" cap="flat" cmpd="sng" algn="ctr">
+                      <a:solidFill>
+                        <a:srgbClr val="EFEAE3"/>
+                      </a:solidFill>
+                      <a:prstDash val="solid"/>
+                      <a:round/>
+                      <a:headEnd type="none" w="med" len="med"/>
+                      <a:tailEnd type="none" w="med" len="med"/>
+                    </a:lnL>
+                    <a:lnR w="6350" cap="flat" cmpd="sng" algn="ctr">
+                      <a:solidFill>
+                        <a:srgbClr val="EFEAE3"/>
+                      </a:solidFill>
+                      <a:prstDash val="solid"/>
+                      <a:round/>
+                      <a:headEnd type="none" w="med" len="med"/>
+                      <a:tailEnd type="none" w="med" len="med"/>
+                    </a:lnR>
+                    <a:lnT w="6350" cap="flat" cmpd="sng" algn="ctr">
+                      <a:solidFill>
+                        <a:srgbClr val="EFEAE3"/>
+                      </a:solidFill>
+                      <a:prstDash val="solid"/>
+                      <a:round/>
+                      <a:headEnd type="none" w="med" len="med"/>
+                      <a:tailEnd type="none" w="med" len="med"/>
+                    </a:lnT>
+                    <a:lnB w="6350" cap="flat" cmpd="sng" algn="ctr">
+                      <a:solidFill>
+                        <a:srgbClr val="EFEAE3"/>
+                      </a:solidFill>
+                      <a:prstDash val="solid"/>
+                      <a:round/>
+                      <a:headEnd type="none" w="med" len="med"/>
+                      <a:tailEnd type="none" w="med" len="med"/>
+                    </a:lnB>
+                    <a:solidFill>
+                      <a:srgbClr val="F8F4F0"/>
+                    </a:solidFill>
+                  </a:tcPr>
+                </a:tc>
+                <a:tc>
+                  <a:txBody>
+                    <a:bodyPr/>
+                    <a:lstStyle/>
+                    <a:p>
+                      <a:pPr algn="l" indent="0" marL="0">
+                        <a:buNone/>
+                      </a:pPr>
+                      <a:r>
+                        <a:rPr lang="en-US" sz="1400" dirty="0">
+                          <a:solidFill>
+                            <a:srgbClr val="2D2D3A"/>
+                          </a:solidFill>
+                          <a:latin typeface="Times New Roman" pitchFamily="34" charset="0"/>
+                          <a:ea typeface="Times New Roman" pitchFamily="34" charset="-122"/>
+                          <a:cs typeface="Times New Roman" pitchFamily="34" charset="-120"/>
+                        </a:rPr>
+                        <a:t>-74.6%</a:t>
+                      </a:r>
+                      <a:endParaRPr lang="en-US" sz="1400" dirty="0">
+                        <a:latin typeface="Times New Roman" charset="0"/>
+                        <a:ea typeface="Times New Roman" charset="0"/>
+                        <a:cs typeface="Times New Roman" charset="0"/>
+                      </a:endParaRPr>
+                    </a:p>
+                  </a:txBody>
+                  <a:tcPr marL="91440" marR="91440" marT="45720" marB="45720" anchor="ctr">
+                    <a:lnL w="6350" cap="flat" cmpd="sng" algn="ctr">
+                      <a:solidFill>
+                        <a:srgbClr val="EFEAE3"/>
+                      </a:solidFill>
+                      <a:prstDash val="solid"/>
+                      <a:round/>
+                      <a:headEnd type="none" w="med" len="med"/>
+                      <a:tailEnd type="none" w="med" len="med"/>
+                    </a:lnL>
+                    <a:lnR w="6350" cap="flat" cmpd="sng" algn="ctr">
+                      <a:solidFill>
+                        <a:srgbClr val="EFEAE3"/>
+                      </a:solidFill>
+                      <a:prstDash val="solid"/>
+                      <a:round/>
+                      <a:headEnd type="none" w="med" len="med"/>
+                      <a:tailEnd type="none" w="med" len="med"/>
+                    </a:lnR>
+                    <a:lnT w="6350" cap="flat" cmpd="sng" algn="ctr">
+                      <a:solidFill>
+                        <a:srgbClr val="EFEAE3"/>
+                      </a:solidFill>
+                      <a:prstDash val="solid"/>
+                      <a:round/>
+                      <a:headEnd type="none" w="med" len="med"/>
+                      <a:tailEnd type="none" w="med" len="med"/>
+                    </a:lnT>
+                    <a:lnB w="6350" cap="flat" cmpd="sng" algn="ctr">
+                      <a:solidFill>
+                        <a:srgbClr val="EFEAE3"/>
+                      </a:solidFill>
+                      <a:prstDash val="solid"/>
+                      <a:round/>
+                      <a:headEnd type="none" w="med" len="med"/>
+                      <a:tailEnd type="none" w="med" len="med"/>
+                    </a:lnB>
+                    <a:solidFill>
+                      <a:srgbClr val="F8F4F0"/>
+                    </a:solidFill>
+                  </a:tcPr>
+                </a:tc>
+              </a:tr>
+              <a:tr h="594360">
+                <a:tc>
+                  <a:txBody>
+                    <a:bodyPr/>
+                    <a:lstStyle/>
+                    <a:p>
+                      <a:pPr algn="l" indent="0" marL="0">
+                        <a:buNone/>
+                      </a:pPr>
+                      <a:r>
+                        <a:rPr lang="en-US" sz="1400" dirty="0">
+                          <a:solidFill>
+                            <a:srgbClr val="2D2D3A"/>
+                          </a:solidFill>
+                          <a:latin typeface="Times New Roman" pitchFamily="34" charset="0"/>
+                          <a:ea typeface="Times New Roman" pitchFamily="34" charset="-122"/>
+                          <a:cs typeface="Times New Roman" pitchFamily="34" charset="-120"/>
+                        </a:rPr>
+                        <a:t>Производительность кода (строк/час)</a:t>
+                      </a:r>
+                      <a:endParaRPr lang="en-US" sz="1400" dirty="0">
+                        <a:latin typeface="Times New Roman" charset="0"/>
+                        <a:ea typeface="Times New Roman" charset="0"/>
+                        <a:cs typeface="Times New Roman" charset="0"/>
+                      </a:endParaRPr>
+                    </a:p>
+                  </a:txBody>
+                  <a:tcPr marL="91440" marR="91440" marT="45720" marB="45720" anchor="ctr">
+                    <a:lnL w="6350" cap="flat" cmpd="sng" algn="ctr">
+                      <a:solidFill>
+                        <a:srgbClr val="EFEAE3"/>
+                      </a:solidFill>
+                      <a:prstDash val="solid"/>
+                      <a:round/>
+                      <a:headEnd type="none" w="med" len="med"/>
+                      <a:tailEnd type="none" w="med" len="med"/>
+                    </a:lnL>
+                    <a:lnR w="6350" cap="flat" cmpd="sng" algn="ctr">
+                      <a:solidFill>
+                        <a:srgbClr val="EFEAE3"/>
+                      </a:solidFill>
+                      <a:prstDash val="solid"/>
+                      <a:round/>
+                      <a:headEnd type="none" w="med" len="med"/>
+                      <a:tailEnd type="none" w="med" len="med"/>
+                    </a:lnR>
+                    <a:lnT w="6350" cap="flat" cmpd="sng" algn="ctr">
+                      <a:solidFill>
+                        <a:srgbClr val="EFEAE3"/>
+                      </a:solidFill>
+                      <a:prstDash val="solid"/>
+                      <a:round/>
+                      <a:headEnd type="none" w="med" len="med"/>
+                      <a:tailEnd type="none" w="med" len="med"/>
+                    </a:lnT>
+                    <a:lnB w="6350" cap="flat" cmpd="sng" algn="ctr">
+                      <a:solidFill>
+                        <a:srgbClr val="EFEAE3"/>
+                      </a:solidFill>
+                      <a:prstDash val="solid"/>
+                      <a:round/>
+                      <a:headEnd type="none" w="med" len="med"/>
+                      <a:tailEnd type="none" w="med" len="med"/>
+                    </a:lnB>
+                    <a:solidFill>
+                      <a:srgbClr val="FFFFFF"/>
+                    </a:solidFill>
+                  </a:tcPr>
+                </a:tc>
+                <a:tc>
+                  <a:txBody>
+                    <a:bodyPr/>
+                    <a:lstStyle/>
+                    <a:p>
+                      <a:pPr algn="l" indent="0" marL="0">
+                        <a:buNone/>
+                      </a:pPr>
+                      <a:r>
+                        <a:rPr lang="en-US" sz="1400" dirty="0">
+                          <a:solidFill>
+                            <a:srgbClr val="2D2D3A"/>
+                          </a:solidFill>
+                          <a:latin typeface="Times New Roman" pitchFamily="34" charset="0"/>
+                          <a:ea typeface="Times New Roman" pitchFamily="34" charset="-122"/>
+                          <a:cs typeface="Times New Roman" pitchFamily="34" charset="-120"/>
+                        </a:rPr>
+                        <a:t>~50 (среднее по отрасли)</a:t>
+                      </a:r>
+                      <a:endParaRPr lang="en-US" sz="1400" dirty="0">
+                        <a:latin typeface="Times New Roman" charset="0"/>
+                        <a:ea typeface="Times New Roman" charset="0"/>
+                        <a:cs typeface="Times New Roman" charset="0"/>
+                      </a:endParaRPr>
+                    </a:p>
+                  </a:txBody>
+                  <a:tcPr marL="91440" marR="91440" marT="45720" marB="45720" anchor="ctr">
+                    <a:lnL w="6350" cap="flat" cmpd="sng" algn="ctr">
+                      <a:solidFill>
+                        <a:srgbClr val="EFEAE3"/>
+                      </a:solidFill>
+                      <a:prstDash val="solid"/>
+                      <a:round/>
+                      <a:headEnd type="none" w="med" len="med"/>
+                      <a:tailEnd type="none" w="med" len="med"/>
+                    </a:lnL>
+                    <a:lnR w="6350" cap="flat" cmpd="sng" algn="ctr">
+                      <a:solidFill>
+                        <a:srgbClr val="EFEAE3"/>
+                      </a:solidFill>
+                      <a:prstDash val="solid"/>
+                      <a:round/>
+                      <a:headEnd type="none" w="med" len="med"/>
+                      <a:tailEnd type="none" w="med" len="med"/>
+                    </a:lnR>
+                    <a:lnT w="6350" cap="flat" cmpd="sng" algn="ctr">
+                      <a:solidFill>
+                        <a:srgbClr val="EFEAE3"/>
+                      </a:solidFill>
+                      <a:prstDash val="solid"/>
+                      <a:round/>
+                      <a:headEnd type="none" w="med" len="med"/>
+                      <a:tailEnd type="none" w="med" len="med"/>
+                    </a:lnT>
+                    <a:lnB w="6350" cap="flat" cmpd="sng" algn="ctr">
+                      <a:solidFill>
+                        <a:srgbClr val="EFEAE3"/>
+                      </a:solidFill>
+                      <a:prstDash val="solid"/>
+                      <a:round/>
+                      <a:headEnd type="none" w="med" len="med"/>
+                      <a:tailEnd type="none" w="med" len="med"/>
+                    </a:lnB>
+                    <a:solidFill>
+                      <a:srgbClr val="FFFFFF"/>
+                    </a:solidFill>
+                  </a:tcPr>
+                </a:tc>
+                <a:tc>
+                  <a:txBody>
+                    <a:bodyPr/>
+                    <a:lstStyle/>
+                    <a:p>
+                      <a:pPr algn="l" indent="0" marL="0">
+                        <a:buNone/>
+                      </a:pPr>
+                      <a:r>
+                        <a:rPr lang="en-US" sz="1400" dirty="0">
+                          <a:solidFill>
+                            <a:srgbClr val="2D2D3A"/>
+                          </a:solidFill>
+                          <a:latin typeface="Times New Roman" pitchFamily="34" charset="0"/>
+                          <a:ea typeface="Times New Roman" pitchFamily="34" charset="-122"/>
+                          <a:cs typeface="Times New Roman" pitchFamily="34" charset="-120"/>
+                        </a:rPr>
+                        <a:t>146.4</a:t>
+                      </a:r>
+                      <a:endParaRPr lang="en-US" sz="1400" dirty="0">
+                        <a:latin typeface="Times New Roman" charset="0"/>
+                        <a:ea typeface="Times New Roman" charset="0"/>
+                        <a:cs typeface="Times New Roman" charset="0"/>
+                      </a:endParaRPr>
+                    </a:p>
+                  </a:txBody>
+                  <a:tcPr marL="91440" marR="91440" marT="45720" marB="45720" anchor="ctr">
+                    <a:lnL w="6350" cap="flat" cmpd="sng" algn="ctr">
+                      <a:solidFill>
+                        <a:srgbClr val="EFEAE3"/>
+                      </a:solidFill>
+                      <a:prstDash val="solid"/>
+                      <a:round/>
+                      <a:headEnd type="none" w="med" len="med"/>
+                      <a:tailEnd type="none" w="med" len="med"/>
+                    </a:lnL>
+                    <a:lnR w="6350" cap="flat" cmpd="sng" algn="ctr">
+                      <a:solidFill>
+                        <a:srgbClr val="EFEAE3"/>
+                      </a:solidFill>
+                      <a:prstDash val="solid"/>
+                      <a:round/>
+                      <a:headEnd type="none" w="med" len="med"/>
+                      <a:tailEnd type="none" w="med" len="med"/>
+                    </a:lnR>
+                    <a:lnT w="6350" cap="flat" cmpd="sng" algn="ctr">
+                      <a:solidFill>
+                        <a:srgbClr val="EFEAE3"/>
+                      </a:solidFill>
+                      <a:prstDash val="solid"/>
+                      <a:round/>
+                      <a:headEnd type="none" w="med" len="med"/>
+                      <a:tailEnd type="none" w="med" len="med"/>
+                    </a:lnT>
+                    <a:lnB w="6350" cap="flat" cmpd="sng" algn="ctr">
+                      <a:solidFill>
+                        <a:srgbClr val="EFEAE3"/>
+                      </a:solidFill>
+                      <a:prstDash val="solid"/>
+                      <a:round/>
+                      <a:headEnd type="none" w="med" len="med"/>
+                      <a:tailEnd type="none" w="med" len="med"/>
+                    </a:lnB>
+                    <a:solidFill>
+                      <a:srgbClr val="FFFFFF"/>
+                    </a:solidFill>
+                  </a:tcPr>
+                </a:tc>
+                <a:tc>
+                  <a:txBody>
+                    <a:bodyPr/>
+                    <a:lstStyle/>
+                    <a:p>
+                      <a:pPr algn="l" indent="0" marL="0">
+                        <a:buNone/>
+                      </a:pPr>
+                      <a:r>
+                        <a:rPr lang="en-US" sz="1400" dirty="0">
+                          <a:solidFill>
+                            <a:srgbClr val="2D2D3A"/>
+                          </a:solidFill>
+                          <a:latin typeface="Times New Roman" pitchFamily="34" charset="0"/>
+                          <a:ea typeface="Times New Roman" pitchFamily="34" charset="-122"/>
+                          <a:cs typeface="Times New Roman" pitchFamily="34" charset="-120"/>
+                        </a:rPr>
+                        <a:t>+192.8%</a:t>
+                      </a:r>
+                      <a:endParaRPr lang="en-US" sz="1400" dirty="0">
+                        <a:latin typeface="Times New Roman" charset="0"/>
+                        <a:ea typeface="Times New Roman" charset="0"/>
+                        <a:cs typeface="Times New Roman" charset="0"/>
+                      </a:endParaRPr>
+                    </a:p>
+                  </a:txBody>
+                  <a:tcPr marL="91440" marR="91440" marT="45720" marB="45720" anchor="ctr">
+                    <a:lnL w="6350" cap="flat" cmpd="sng" algn="ctr">
+                      <a:solidFill>
+                        <a:srgbClr val="EFEAE3"/>
+                      </a:solidFill>
+                      <a:prstDash val="solid"/>
+                      <a:round/>
+                      <a:headEnd type="none" w="med" len="med"/>
+                      <a:tailEnd type="none" w="med" len="med"/>
+                    </a:lnL>
+                    <a:lnR w="6350" cap="flat" cmpd="sng" algn="ctr">
+                      <a:solidFill>
+                        <a:srgbClr val="EFEAE3"/>
+                      </a:solidFill>
+                      <a:prstDash val="solid"/>
+                      <a:round/>
+                      <a:headEnd type="none" w="med" len="med"/>
+                      <a:tailEnd type="none" w="med" len="med"/>
+                    </a:lnR>
+                    <a:lnT w="6350" cap="flat" cmpd="sng" algn="ctr">
+                      <a:solidFill>
+                        <a:srgbClr val="EFEAE3"/>
+                      </a:solidFill>
+                      <a:prstDash val="solid"/>
+                      <a:round/>
+                      <a:headEnd type="none" w="med" len="med"/>
+                      <a:tailEnd type="none" w="med" len="med"/>
+                    </a:lnT>
+                    <a:lnB w="6350" cap="flat" cmpd="sng" algn="ctr">
+                      <a:solidFill>
+                        <a:srgbClr val="EFEAE3"/>
+                      </a:solidFill>
+                      <a:prstDash val="solid"/>
+                      <a:round/>
+                      <a:headEnd type="none" w="med" len="med"/>
+                      <a:tailEnd type="none" w="med" len="med"/>
+                    </a:lnB>
+                    <a:solidFill>
+                      <a:srgbClr val="FFFFFF"/>
+                    </a:solidFill>
+                  </a:tcPr>
+                </a:tc>
+              </a:tr>
+              <a:tr h="594360">
+                <a:tc>
+                  <a:txBody>
+                    <a:bodyPr/>
+                    <a:lstStyle/>
+                    <a:p>
+                      <a:pPr algn="l" indent="0" marL="0">
+                        <a:buNone/>
+                      </a:pPr>
+                      <a:r>
+                        <a:rPr lang="en-US" sz="1400" dirty="0">
+                          <a:solidFill>
+                            <a:srgbClr val="2D2D3A"/>
+                          </a:solidFill>
+                          <a:latin typeface="Times New Roman" pitchFamily="34" charset="0"/>
+                          <a:ea typeface="Times New Roman" pitchFamily="34" charset="-122"/>
+                          <a:cs typeface="Times New Roman" pitchFamily="34" charset="-120"/>
+                        </a:rPr>
+                        <a:t>Производительность документации (слов/час)</a:t>
+                      </a:r>
+                      <a:endParaRPr lang="en-US" sz="1400" dirty="0">
+                        <a:latin typeface="Times New Roman" charset="0"/>
+                        <a:ea typeface="Times New Roman" charset="0"/>
+                        <a:cs typeface="Times New Roman" charset="0"/>
+                      </a:endParaRPr>
+                    </a:p>
+                  </a:txBody>
+                  <a:tcPr marL="91440" marR="91440" marT="45720" marB="45720" anchor="ctr">
+                    <a:lnL w="6350" cap="flat" cmpd="sng" algn="ctr">
+                      <a:solidFill>
+                        <a:srgbClr val="EFEAE3"/>
+                      </a:solidFill>
+                      <a:prstDash val="solid"/>
+                      <a:round/>
+                      <a:headEnd type="none" w="med" len="med"/>
+                      <a:tailEnd type="none" w="med" len="med"/>
+                    </a:lnL>
+                    <a:lnR w="6350" cap="flat" cmpd="sng" algn="ctr">
+                      <a:solidFill>
+                        <a:srgbClr val="EFEAE3"/>
+                      </a:solidFill>
+                      <a:prstDash val="solid"/>
+                      <a:round/>
+                      <a:headEnd type="none" w="med" len="med"/>
+                      <a:tailEnd type="none" w="med" len="med"/>
+                    </a:lnR>
+                    <a:lnT w="6350" cap="flat" cmpd="sng" algn="ctr">
+                      <a:solidFill>
+                        <a:srgbClr val="EFEAE3"/>
+                      </a:solidFill>
+                      <a:prstDash val="solid"/>
+                      <a:round/>
+                      <a:headEnd type="none" w="med" len="med"/>
+                      <a:tailEnd type="none" w="med" len="med"/>
+                    </a:lnT>
+                    <a:lnB w="6350" cap="flat" cmpd="sng" algn="ctr">
+                      <a:solidFill>
+                        <a:srgbClr val="EFEAE3"/>
+                      </a:solidFill>
+                      <a:prstDash val="solid"/>
+                      <a:round/>
+                      <a:headEnd type="none" w="med" len="med"/>
+                      <a:tailEnd type="none" w="med" len="med"/>
+                    </a:lnB>
+                    <a:solidFill>
+                      <a:srgbClr val="F8F4F0"/>
+                    </a:solidFill>
+                  </a:tcPr>
+                </a:tc>
+                <a:tc>
+                  <a:txBody>
+                    <a:bodyPr/>
+                    <a:lstStyle/>
+                    <a:p>
+                      <a:pPr algn="l" indent="0" marL="0">
+                        <a:buNone/>
+                      </a:pPr>
+                      <a:r>
+                        <a:rPr lang="en-US" sz="1400" dirty="0">
+                          <a:solidFill>
+                            <a:srgbClr val="2D2D3A"/>
+                          </a:solidFill>
+                          <a:latin typeface="Times New Roman" pitchFamily="34" charset="0"/>
+                          <a:ea typeface="Times New Roman" pitchFamily="34" charset="-122"/>
+                          <a:cs typeface="Times New Roman" pitchFamily="34" charset="-120"/>
+                        </a:rPr>
+                        <a:t>~100 (среднее)</a:t>
+                      </a:r>
+                      <a:endParaRPr lang="en-US" sz="1400" dirty="0">
+                        <a:latin typeface="Times New Roman" charset="0"/>
+                        <a:ea typeface="Times New Roman" charset="0"/>
+                        <a:cs typeface="Times New Roman" charset="0"/>
+                      </a:endParaRPr>
+                    </a:p>
+                  </a:txBody>
+                  <a:tcPr marL="91440" marR="91440" marT="45720" marB="45720" anchor="ctr">
+                    <a:lnL w="6350" cap="flat" cmpd="sng" algn="ctr">
+                      <a:solidFill>
+                        <a:srgbClr val="EFEAE3"/>
+                      </a:solidFill>
+                      <a:prstDash val="solid"/>
+                      <a:round/>
+                      <a:headEnd type="none" w="med" len="med"/>
+                      <a:tailEnd type="none" w="med" len="med"/>
+                    </a:lnL>
+                    <a:lnR w="6350" cap="flat" cmpd="sng" algn="ctr">
+                      <a:solidFill>
+                        <a:srgbClr val="EFEAE3"/>
+                      </a:solidFill>
+                      <a:prstDash val="solid"/>
+                      <a:round/>
+                      <a:headEnd type="none" w="med" len="med"/>
+                      <a:tailEnd type="none" w="med" len="med"/>
+                    </a:lnR>
+                    <a:lnT w="6350" cap="flat" cmpd="sng" algn="ctr">
+                      <a:solidFill>
+                        <a:srgbClr val="EFEAE3"/>
+                      </a:solidFill>
+                      <a:prstDash val="solid"/>
+                      <a:round/>
+                      <a:headEnd type="none" w="med" len="med"/>
+                      <a:tailEnd type="none" w="med" len="med"/>
+                    </a:lnT>
+                    <a:lnB w="6350" cap="flat" cmpd="sng" algn="ctr">
+                      <a:solidFill>
+                        <a:srgbClr val="EFEAE3"/>
+                      </a:solidFill>
+                      <a:prstDash val="solid"/>
+                      <a:round/>
+                      <a:headEnd type="none" w="med" len="med"/>
+                      <a:tailEnd type="none" w="med" len="med"/>
+                    </a:lnB>
+                    <a:solidFill>
+                      <a:srgbClr val="F8F4F0"/>
+                    </a:solidFill>
+                  </a:tcPr>
+                </a:tc>
+                <a:tc>
+                  <a:txBody>
+                    <a:bodyPr/>
+                    <a:lstStyle/>
+                    <a:p>
+                      <a:pPr algn="l" indent="0" marL="0">
+                        <a:buNone/>
+                      </a:pPr>
+                      <a:r>
+                        <a:rPr lang="en-US" sz="1400" dirty="0">
+                          <a:solidFill>
+                            <a:srgbClr val="2D2D3A"/>
+                          </a:solidFill>
+                          <a:latin typeface="Times New Roman" pitchFamily="34" charset="0"/>
+                          <a:ea typeface="Times New Roman" pitchFamily="34" charset="-122"/>
+                          <a:cs typeface="Times New Roman" pitchFamily="34" charset="-120"/>
+                        </a:rPr>
+                        <a:t>115.0</a:t>
+                      </a:r>
+                      <a:endParaRPr lang="en-US" sz="1400" dirty="0">
+                        <a:latin typeface="Times New Roman" charset="0"/>
+                        <a:ea typeface="Times New Roman" charset="0"/>
+                        <a:cs typeface="Times New Roman" charset="0"/>
+                      </a:endParaRPr>
+                    </a:p>
+                  </a:txBody>
+                  <a:tcPr marL="91440" marR="91440" marT="45720" marB="45720" anchor="ctr">
+                    <a:lnL w="6350" cap="flat" cmpd="sng" algn="ctr">
+                      <a:solidFill>
+                        <a:srgbClr val="EFEAE3"/>
+                      </a:solidFill>
+                      <a:prstDash val="solid"/>
+                      <a:round/>
+                      <a:headEnd type="none" w="med" len="med"/>
+                      <a:tailEnd type="none" w="med" len="med"/>
+                    </a:lnL>
+                    <a:lnR w="6350" cap="flat" cmpd="sng" algn="ctr">
+                      <a:solidFill>
+                        <a:srgbClr val="EFEAE3"/>
+                      </a:solidFill>
+                      <a:prstDash val="solid"/>
+                      <a:round/>
+                      <a:headEnd type="none" w="med" len="med"/>
+                      <a:tailEnd type="none" w="med" len="med"/>
+                    </a:lnR>
+                    <a:lnT w="6350" cap="flat" cmpd="sng" algn="ctr">
+                      <a:solidFill>
+                        <a:srgbClr val="EFEAE3"/>
+                      </a:solidFill>
+                      <a:prstDash val="solid"/>
+                      <a:round/>
+                      <a:headEnd type="none" w="med" len="med"/>
+                      <a:tailEnd type="none" w="med" len="med"/>
+                    </a:lnT>
+                    <a:lnB w="6350" cap="flat" cmpd="sng" algn="ctr">
+                      <a:solidFill>
+                        <a:srgbClr val="EFEAE3"/>
+                      </a:solidFill>
+                      <a:prstDash val="solid"/>
+                      <a:round/>
+                      <a:headEnd type="none" w="med" len="med"/>
+                      <a:tailEnd type="none" w="med" len="med"/>
+                    </a:lnB>
+                    <a:solidFill>
+                      <a:srgbClr val="F8F4F0"/>
+                    </a:solidFill>
+                  </a:tcPr>
+                </a:tc>
+                <a:tc>
+                  <a:txBody>
+                    <a:bodyPr/>
+                    <a:lstStyle/>
+                    <a:p>
+                      <a:pPr algn="l" indent="0" marL="0">
+                        <a:buNone/>
+                      </a:pPr>
+                      <a:r>
+                        <a:rPr lang="en-US" sz="1400" dirty="0">
+                          <a:solidFill>
+                            <a:srgbClr val="2D2D3A"/>
+                          </a:solidFill>
+                          <a:latin typeface="Times New Roman" pitchFamily="34" charset="0"/>
+                          <a:ea typeface="Times New Roman" pitchFamily="34" charset="-122"/>
+                          <a:cs typeface="Times New Roman" pitchFamily="34" charset="-120"/>
+                        </a:rPr>
+                        <a:t>+15.0%</a:t>
+                      </a:r>
+                      <a:endParaRPr lang="en-US" sz="1400" dirty="0">
+                        <a:latin typeface="Times New Roman" charset="0"/>
+                        <a:ea typeface="Times New Roman" charset="0"/>
+                        <a:cs typeface="Times New Roman" charset="0"/>
+                      </a:endParaRPr>
+                    </a:p>
+                  </a:txBody>
+                  <a:tcPr marL="91440" marR="91440" marT="45720" marB="45720" anchor="ctr">
+                    <a:lnL w="6350" cap="flat" cmpd="sng" algn="ctr">
+                      <a:solidFill>
+                        <a:srgbClr val="EFEAE3"/>
+                      </a:solidFill>
+                      <a:prstDash val="solid"/>
+                      <a:round/>
+                      <a:headEnd type="none" w="med" len="med"/>
+                      <a:tailEnd type="none" w="med" len="med"/>
+                    </a:lnL>
+                    <a:lnR w="6350" cap="flat" cmpd="sng" algn="ctr">
+                      <a:solidFill>
+                        <a:srgbClr val="EFEAE3"/>
+                      </a:solidFill>
+                      <a:prstDash val="solid"/>
+                      <a:round/>
+                      <a:headEnd type="none" w="med" len="med"/>
+                      <a:tailEnd type="none" w="med" len="med"/>
+                    </a:lnR>
+                    <a:lnT w="6350" cap="flat" cmpd="sng" algn="ctr">
+                      <a:solidFill>
+                        <a:srgbClr val="EFEAE3"/>
+                      </a:solidFill>
+                      <a:prstDash val="solid"/>
+                      <a:round/>
+                      <a:headEnd type="none" w="med" len="med"/>
+                      <a:tailEnd type="none" w="med" len="med"/>
+                    </a:lnT>
+                    <a:lnB w="6350" cap="flat" cmpd="sng" algn="ctr">
+                      <a:solidFill>
+                        <a:srgbClr val="EFEAE3"/>
+                      </a:solidFill>
+                      <a:prstDash val="solid"/>
+                      <a:round/>
+                      <a:headEnd type="none" w="med" len="med"/>
+                      <a:tailEnd type="none" w="med" len="med"/>
+                    </a:lnB>
+                    <a:solidFill>
+                      <a:srgbClr val="F8F4F0"/>
+                    </a:solidFill>
+                  </a:tcPr>
+                </a:tc>
+              </a:tr>
+            </a:tbl>
+          </a:graphicData>
+        </a:graphic>
+      </p:graphicFrame>
       <p:sp>
         <p:nvSpPr>
-          <p:cNvPr id="5" name="Text 3"/>
+          <p:cNvPr id="6" name="Text 3"/>
           <p:cNvSpPr/>
           <p:nvPr/>
         </p:nvSpPr>
         <p:spPr>
           <a:xfrm>
-            <a:off x="548640" y="1417320"/>
-            <a:ext cx="8046720" cy="3296412"/>
+            <a:off x="548640" y="4576572"/>
+            <a:ext cx="8046720" cy="320040"/>
           </a:xfrm>
           <a:prstGeom prst="rect">
             <a:avLst/>
@@ -11026,7 +12678,7 @@
               <a:buNone/>
             </a:pPr>
             <a:r>
-              <a:rPr lang="en-US" sz="1600" dirty="0">
+              <a:rPr lang="en-US" sz="1400" dirty="0">
                 <a:solidFill>
                   <a:srgbClr val="2D2D3A"/>
                 </a:solidFill>
@@ -11034,49 +12686,9 @@
                 <a:ea typeface="Times New Roman" pitchFamily="34" charset="-122"/>
                 <a:cs typeface="Times New Roman" pitchFamily="34" charset="-120"/>
               </a:rPr>
-              <a:t>• Оценить трудоёмкость и сроки разработки клиентского портала.</a:t>
+              <a:t>Вывод: Фактический объём кода оказался на 50% больше оценённого по FP, однако трудоёмкость оказалась почти в 4 раза меньше за счёт высокой производительности команды (146 строк/час против средних 50). Документация также написана с производительностью выше средней.</a:t>
             </a:r>
-            <a:endParaRPr lang="en-US" sz="1600" dirty="0"/>
-          </a:p>
-          <a:p>
-            <a:pPr algn="l" indent="0" marL="0">
-              <a:buNone/>
-            </a:pPr>
-            <a:endParaRPr lang="en-US" sz="1600" dirty="0"/>
-          </a:p>
-          <a:p>
-            <a:pPr algn="l" indent="0" marL="0">
-              <a:buNone/>
-            </a:pPr>
-            <a:r>
-              <a:rPr lang="en-US" sz="1600" dirty="0">
-                <a:solidFill>
-                  <a:srgbClr val="2D2D3A"/>
-                </a:solidFill>
-                <a:latin typeface="Times New Roman" pitchFamily="34" charset="0"/>
-                <a:ea typeface="Times New Roman" pitchFamily="34" charset="-122"/>
-                <a:cs typeface="Times New Roman" pitchFamily="34" charset="-120"/>
-              </a:rPr>
-              <a:t>Конкретная задача моделирования:</a:t>
-            </a:r>
-            <a:endParaRPr lang="en-US" sz="1600" dirty="0"/>
-          </a:p>
-          <a:p>
-            <a:pPr algn="l" indent="0" marL="0">
-              <a:buNone/>
-            </a:pPr>
-            <a:r>
-              <a:rPr lang="en-US" sz="1600" dirty="0">
-                <a:solidFill>
-                  <a:srgbClr val="2D2D3A"/>
-                </a:solidFill>
-                <a:latin typeface="Times New Roman" pitchFamily="34" charset="0"/>
-                <a:ea typeface="Times New Roman" pitchFamily="34" charset="-122"/>
-                <a:cs typeface="Times New Roman" pitchFamily="34" charset="-120"/>
-              </a:rPr>
-              <a:t>• Применить метод функциональных точек (FPA) к реальным функциям проекта TPPO и получить обоснованную оценку объёма работ.</a:t>
-            </a:r>
-            <a:endParaRPr lang="en-US" sz="1600" dirty="0"/>
+            <a:endParaRPr lang="en-US" sz="1400" dirty="0"/>
           </a:p>
         </p:txBody>
       </p:sp>
@@ -11088,9 +12700,9 @@
 </p:sld>
 </file>
 
-<file path=ppt/slides/slide3.xml><?xml version="1.0" encoding="utf-8"?>
+<file path=ppt/slides/slide16.xml><?xml version="1.0" encoding="utf-8"?>
 <p:sld xmlns:a="http://schemas.openxmlformats.org/drawingml/2006/main" xmlns:r="http://schemas.openxmlformats.org/officeDocument/2006/relationships" xmlns:p="http://schemas.openxmlformats.org/presentationml/2006/main">
-  <p:cSld name="Slide 3">
+  <p:cSld name="Slide 16">
     <p:bg>
       <p:bgPr>
         <a:solidFill>
@@ -11145,7 +12757,120 @@
                 <a:ea typeface="Georgia" pitchFamily="34" charset="-122"/>
                 <a:cs typeface="Georgia" pitchFamily="34" charset="-120"/>
               </a:rPr>
-              <a:t>Что такое функциональные точки?</a:t>
+              <a:t>Выводы по теме</a:t>
+            </a:r>
+            <a:endParaRPr lang="en-US" sz="1600" dirty="0"/>
+          </a:p>
+        </p:txBody>
+      </p:sp>
+      <p:sp>
+        <p:nvSpPr>
+          <p:cNvPr id="3" name="Text 1"/>
+          <p:cNvSpPr/>
+          <p:nvPr/>
+        </p:nvSpPr>
+        <p:spPr>
+          <a:xfrm>
+            <a:off x="475488" y="868680"/>
+            <a:ext cx="8193024" cy="4027932"/>
+          </a:xfrm>
+          <a:prstGeom prst="rect">
+            <a:avLst/>
+          </a:prstGeom>
+          <a:noFill/>
+          <a:ln/>
+        </p:spPr>
+        <p:txBody>
+          <a:bodyPr wrap="square" rtlCol="0" anchor="t"/>
+          <a:lstStyle/>
+          <a:p>
+            <a:pPr algn="l" indent="0" marL="0">
+              <a:lnSpc>
+                <a:spcPts val="3200"/>
+              </a:lnSpc>
+              <a:buNone/>
+            </a:pPr>
+            <a:r>
+              <a:rPr lang="en-US" sz="1800" dirty="0">
+                <a:solidFill>
+                  <a:srgbClr val="2D2D3A"/>
+                </a:solidFill>
+                <a:latin typeface="Times New Roman" pitchFamily="34" charset="0"/>
+                <a:ea typeface="Times New Roman" pitchFamily="34" charset="-122"/>
+                <a:cs typeface="Times New Roman" pitchFamily="34" charset="-120"/>
+              </a:rPr>
+              <a:t>Использование модели функциональных точек (Function Point Analysis) и формул COCOMO II предоставило нашей команде научно обоснованный способ оценки масштаба и сроков проекта. Логический объем Личного кабинета составил 112 FP (что эквивалентно 5.9 KLOC). Расчеты трудоемкости доказали реализуемость проекта силами команды из 2 разработчиков за 7.8 месяцев реального времени, что полностью подтверждает взвешенный план-график проекта без допущения ошибок линейного деления.</a:t>
+            </a:r>
+            <a:endParaRPr lang="en-US" sz="1800" dirty="0"/>
+          </a:p>
+        </p:txBody>
+      </p:sp>
+    </p:spTree>
+  </p:cSld>
+  <p:clrMapOvr>
+    <a:masterClrMapping/>
+  </p:clrMapOvr>
+</p:sld>
+</file>
+
+<file path=ppt/slides/slide2.xml><?xml version="1.0" encoding="utf-8"?>
+<p:sld xmlns:a="http://schemas.openxmlformats.org/drawingml/2006/main" xmlns:r="http://schemas.openxmlformats.org/officeDocument/2006/relationships" xmlns:p="http://schemas.openxmlformats.org/presentationml/2006/main">
+  <p:cSld name="Slide 2">
+    <p:bg>
+      <p:bgPr>
+        <a:solidFill>
+          <a:srgbClr val="FFFFFF"/>
+        </a:solidFill>
+      </p:bgPr>
+    </p:bg>
+    <p:spTree>
+      <p:nvGrpSpPr>
+        <p:cNvPr id="1" name=""/>
+        <p:cNvGrpSpPr/>
+        <p:nvPr/>
+      </p:nvGrpSpPr>
+      <p:grpSpPr>
+        <a:xfrm>
+          <a:off x="0" y="0"/>
+          <a:ext cx="0" cy="0"/>
+          <a:chOff x="0" y="0"/>
+          <a:chExt cx="0" cy="0"/>
+        </a:xfrm>
+      </p:grpSpPr>
+      <p:sp>
+        <p:nvSpPr>
+          <p:cNvPr id="2" name="Text 0"/>
+          <p:cNvSpPr/>
+          <p:nvPr/>
+        </p:nvSpPr>
+        <p:spPr>
+          <a:xfrm>
+            <a:off x="384048" y="164592"/>
+            <a:ext cx="8375904" cy="548640"/>
+          </a:xfrm>
+          <a:prstGeom prst="rect">
+            <a:avLst/>
+          </a:prstGeom>
+          <a:noFill/>
+          <a:ln/>
+        </p:spPr>
+        <p:txBody>
+          <a:bodyPr wrap="square" rtlCol="0" anchor="b"/>
+          <a:lstStyle/>
+          <a:p>
+            <a:pPr algn="l" indent="0" marL="0">
+              <a:buNone/>
+            </a:pPr>
+            <a:r>
+              <a:rPr lang="en-US" sz="1600" b="1" dirty="0">
+                <a:solidFill>
+                  <a:srgbClr val="1A1A2E"/>
+                </a:solidFill>
+                <a:latin typeface="Georgia" pitchFamily="34" charset="0"/>
+                <a:ea typeface="Georgia" pitchFamily="34" charset="-122"/>
+                <a:cs typeface="Georgia" pitchFamily="34" charset="-120"/>
+              </a:rPr>
+              <a:t>Постановка задачи моделирования</a:t>
             </a:r>
             <a:endParaRPr lang="en-US" sz="1600" dirty="0"/>
           </a:p>
@@ -11210,7 +12935,7 @@
               <a:buNone/>
             </a:pPr>
             <a:r>
-              <a:rPr lang="en-US" sz="1200" b="1" dirty="0">
+              <a:rPr lang="en-US" sz="1400" b="1" dirty="0">
                 <a:solidFill>
                   <a:srgbClr val="1A1A2E"/>
                 </a:solidFill>
@@ -11218,9 +12943,9 @@
                 <a:ea typeface="Cambria" pitchFamily="34" charset="-122"/>
                 <a:cs typeface="Cambria" pitchFamily="34" charset="-120"/>
               </a:rPr>
-              <a:t>Сущность метода FPA и его применение</a:t>
+              <a:t>Постановка практической задачи</a:t>
             </a:r>
-            <a:endParaRPr lang="en-US" sz="1200" dirty="0"/>
+            <a:endParaRPr lang="en-US" sz="1400" dirty="0"/>
           </a:p>
         </p:txBody>
       </p:sp>
@@ -11249,7 +12974,7 @@
               <a:buNone/>
             </a:pPr>
             <a:r>
-              <a:rPr lang="en-US" sz="1600" dirty="0">
+              <a:rPr lang="en-US" sz="1800" dirty="0">
                 <a:solidFill>
                   <a:srgbClr val="2D2D3A"/>
                 </a:solidFill>
@@ -11257,22 +12982,22 @@
                 <a:ea typeface="Times New Roman" pitchFamily="34" charset="-122"/>
                 <a:cs typeface="Times New Roman" pitchFamily="34" charset="-120"/>
               </a:rPr>
-              <a:t>Метод функциональных точек (Function Point Analysis, FPA) по стандарту IFPUG — это методика измерения размера ПО с точки зрения логических функций, предоставляемых конечному пользователю.</a:t>
+              <a:t>• Оценить трудоёмкость и сроки разработки клиентского портала.</a:t>
             </a:r>
-            <a:endParaRPr lang="en-US" sz="1600" dirty="0"/>
+            <a:endParaRPr lang="en-US" sz="1800" dirty="0"/>
           </a:p>
           <a:p>
             <a:pPr algn="l" indent="0" marL="0">
               <a:buNone/>
             </a:pPr>
-            <a:endParaRPr lang="en-US" sz="1600" dirty="0"/>
+            <a:endParaRPr lang="en-US" sz="1800" dirty="0"/>
           </a:p>
           <a:p>
             <a:pPr algn="l" indent="0" marL="0">
               <a:buNone/>
             </a:pPr>
             <a:r>
-              <a:rPr lang="en-US" sz="1600" dirty="0">
+              <a:rPr lang="en-US" sz="1800" dirty="0">
                 <a:solidFill>
                   <a:srgbClr val="2D2D3A"/>
                 </a:solidFill>
@@ -11280,22 +13005,16 @@
                 <a:ea typeface="Times New Roman" pitchFamily="34" charset="-122"/>
                 <a:cs typeface="Times New Roman" pitchFamily="34" charset="-120"/>
               </a:rPr>
-              <a:t>В отличие от оценки в LOC (строках кода), FPA не зависит от языка программирования, фреймворков и опыта программистов.</a:t>
+              <a:t>Конкретная задача моделирования:</a:t>
             </a:r>
-            <a:endParaRPr lang="en-US" sz="1600" dirty="0"/>
-          </a:p>
-          <a:p>
-            <a:pPr algn="l" indent="0" marL="0">
-              <a:buNone/>
-            </a:pPr>
-            <a:endParaRPr lang="en-US" sz="1600" dirty="0"/>
+            <a:endParaRPr lang="en-US" sz="1800" dirty="0"/>
           </a:p>
           <a:p>
             <a:pPr algn="l" indent="0" marL="0">
               <a:buNone/>
             </a:pPr>
             <a:r>
-              <a:rPr lang="en-US" sz="1600" dirty="0">
+              <a:rPr lang="en-US" sz="1800" dirty="0">
                 <a:solidFill>
                   <a:srgbClr val="2D2D3A"/>
                 </a:solidFill>
@@ -11303,60 +13022,9 @@
                 <a:ea typeface="Times New Roman" pitchFamily="34" charset="-122"/>
                 <a:cs typeface="Times New Roman" pitchFamily="34" charset="-120"/>
               </a:rPr>
-              <a:t>Для чего применяется оценка?</a:t>
+              <a:t>• Применить метод функциональных точек (FPA) к реальным функциям проекта TPPO и получить обоснованную оценку объёма работ.</a:t>
             </a:r>
-            <a:endParaRPr lang="en-US" sz="1600" dirty="0"/>
-          </a:p>
-          <a:p>
-            <a:pPr algn="l" indent="0" marL="0">
-              <a:buNone/>
-            </a:pPr>
-            <a:r>
-              <a:rPr lang="en-US" sz="1600" dirty="0">
-                <a:solidFill>
-                  <a:srgbClr val="2D2D3A"/>
-                </a:solidFill>
-                <a:latin typeface="Times New Roman" pitchFamily="34" charset="0"/>
-                <a:ea typeface="Times New Roman" pitchFamily="34" charset="-122"/>
-                <a:cs typeface="Times New Roman" pitchFamily="34" charset="-120"/>
-              </a:rPr>
-              <a:t>• Объективная оценка объема работ на стадии ТЗ.</a:t>
-            </a:r>
-            <a:endParaRPr lang="en-US" sz="1600" dirty="0"/>
-          </a:p>
-          <a:p>
-            <a:pPr algn="l" indent="0" marL="0">
-              <a:buNone/>
-            </a:pPr>
-            <a:r>
-              <a:rPr lang="en-US" sz="1600" dirty="0">
-                <a:solidFill>
-                  <a:srgbClr val="2D2D3A"/>
-                </a:solidFill>
-                <a:latin typeface="Times New Roman" pitchFamily="34" charset="0"/>
-                <a:ea typeface="Times New Roman" pitchFamily="34" charset="-122"/>
-                <a:cs typeface="Times New Roman" pitchFamily="34" charset="-120"/>
-              </a:rPr>
-              <a:t>• Планирование бюджетов, сроков и численности команды.</a:t>
-            </a:r>
-            <a:endParaRPr lang="en-US" sz="1600" dirty="0"/>
-          </a:p>
-          <a:p>
-            <a:pPr algn="l" indent="0" marL="0">
-              <a:buNone/>
-            </a:pPr>
-            <a:r>
-              <a:rPr lang="en-US" sz="1600" dirty="0">
-                <a:solidFill>
-                  <a:srgbClr val="2D2D3A"/>
-                </a:solidFill>
-                <a:latin typeface="Times New Roman" pitchFamily="34" charset="0"/>
-                <a:ea typeface="Times New Roman" pitchFamily="34" charset="-122"/>
-                <a:cs typeface="Times New Roman" pitchFamily="34" charset="-120"/>
-              </a:rPr>
-              <a:t>• Сравнение производительности разных команд в компании.</a:t>
-            </a:r>
-            <a:endParaRPr lang="en-US" sz="1600" dirty="0"/>
+            <a:endParaRPr lang="en-US" sz="1800" dirty="0"/>
           </a:p>
         </p:txBody>
       </p:sp>
@@ -11368,9 +13036,9 @@
 </p:sld>
 </file>
 
-<file path=ppt/slides/slide4.xml><?xml version="1.0" encoding="utf-8"?>
+<file path=ppt/slides/slide3.xml><?xml version="1.0" encoding="utf-8"?>
 <p:sld xmlns:a="http://schemas.openxmlformats.org/drawingml/2006/main" xmlns:r="http://schemas.openxmlformats.org/officeDocument/2006/relationships" xmlns:p="http://schemas.openxmlformats.org/presentationml/2006/main">
-  <p:cSld name="Slide 4">
+  <p:cSld name="Slide 3">
     <p:bg>
       <p:bgPr>
         <a:solidFill>
@@ -11425,7 +13093,7 @@
                 <a:ea typeface="Georgia" pitchFamily="34" charset="-122"/>
                 <a:cs typeface="Georgia" pitchFamily="34" charset="-120"/>
               </a:rPr>
-              <a:t>Пять типов компонентов (IFPUG)</a:t>
+              <a:t>Что такое функциональные точки?</a:t>
             </a:r>
             <a:endParaRPr lang="en-US" sz="1600" dirty="0"/>
           </a:p>
@@ -11490,7 +13158,7 @@
               <a:buNone/>
             </a:pPr>
             <a:r>
-              <a:rPr lang="en-US" sz="1200" b="1" dirty="0">
+              <a:rPr lang="en-US" sz="1400" b="1" dirty="0">
                 <a:solidFill>
                   <a:srgbClr val="1A1A2E"/>
                 </a:solidFill>
@@ -11498,9 +13166,9 @@
                 <a:ea typeface="Cambria" pitchFamily="34" charset="-122"/>
                 <a:cs typeface="Cambria" pitchFamily="34" charset="-120"/>
               </a:rPr>
-              <a:t>Функции транзакций и функции данных</a:t>
+              <a:t>Сущность метода FPA и его применение</a:t>
             </a:r>
-            <a:endParaRPr lang="en-US" sz="1200" dirty="0"/>
+            <a:endParaRPr lang="en-US" sz="1400" dirty="0"/>
           </a:p>
         </p:txBody>
       </p:sp>
@@ -11529,7 +13197,7 @@
               <a:buNone/>
             </a:pPr>
             <a:r>
-              <a:rPr lang="en-US" sz="1600" dirty="0">
+              <a:rPr lang="en-US" sz="1800" dirty="0">
                 <a:solidFill>
                   <a:srgbClr val="2D2D3A"/>
                 </a:solidFill>
@@ -11537,16 +13205,22 @@
                 <a:ea typeface="Times New Roman" pitchFamily="34" charset="-122"/>
                 <a:cs typeface="Times New Roman" pitchFamily="34" charset="-120"/>
               </a:rPr>
-              <a:t>Функции транзакций:</a:t>
+              <a:t>Метод функциональных точек (Function Point Analysis, FPA) по стандарту IFPUG — это методика измерения размера ПО с точки зрения логических функций, предоставляемых конечному пользователю.</a:t>
             </a:r>
-            <a:endParaRPr lang="en-US" sz="1600" dirty="0"/>
+            <a:endParaRPr lang="en-US" sz="1800" dirty="0"/>
+          </a:p>
+          <a:p>
+            <a:pPr algn="l" indent="0" marL="0">
+              <a:buNone/>
+            </a:pPr>
+            <a:endParaRPr lang="en-US" sz="1800" dirty="0"/>
           </a:p>
           <a:p>
             <a:pPr algn="l" indent="0" marL="0">
               <a:buNone/>
             </a:pPr>
             <a:r>
-              <a:rPr lang="en-US" sz="1600" dirty="0">
+              <a:rPr lang="en-US" sz="1800" dirty="0">
                 <a:solidFill>
                   <a:srgbClr val="2D2D3A"/>
                 </a:solidFill>
@@ -11554,16 +13228,22 @@
                 <a:ea typeface="Times New Roman" pitchFamily="34" charset="-122"/>
                 <a:cs typeface="Times New Roman" pitchFamily="34" charset="-120"/>
               </a:rPr>
-              <a:t>• EI (External Inputs) — входящие транзакции: ввод или изменение данных пользователем.</a:t>
+              <a:t>В отличие от оценки в LOC (строках кода), FPA не зависит от языка программирования, фреймворков и опыта программистов.</a:t>
             </a:r>
-            <a:endParaRPr lang="en-US" sz="1600" dirty="0"/>
+            <a:endParaRPr lang="en-US" sz="1800" dirty="0"/>
+          </a:p>
+          <a:p>
+            <a:pPr algn="l" indent="0" marL="0">
+              <a:buNone/>
+            </a:pPr>
+            <a:endParaRPr lang="en-US" sz="1800" dirty="0"/>
           </a:p>
           <a:p>
             <a:pPr algn="l" indent="0" marL="0">
               <a:buNone/>
             </a:pPr>
             <a:r>
-              <a:rPr lang="en-US" sz="1600" dirty="0">
+              <a:rPr lang="en-US" sz="1800" dirty="0">
                 <a:solidFill>
                   <a:srgbClr val="2D2D3A"/>
                 </a:solidFill>
@@ -11571,16 +13251,16 @@
                 <a:ea typeface="Times New Roman" pitchFamily="34" charset="-122"/>
                 <a:cs typeface="Times New Roman" pitchFamily="34" charset="-120"/>
               </a:rPr>
-              <a:t>• EO (External Outputs) — выходящие транзакции: выдача данных с расчетом, обработкой или уведомлениями.</a:t>
+              <a:t>Для чего применяется оценка?</a:t>
             </a:r>
-            <a:endParaRPr lang="en-US" sz="1600" dirty="0"/>
+            <a:endParaRPr lang="en-US" sz="1800" dirty="0"/>
           </a:p>
           <a:p>
             <a:pPr algn="l" indent="0" marL="0">
               <a:buNone/>
             </a:pPr>
             <a:r>
-              <a:rPr lang="en-US" sz="1600" dirty="0">
+              <a:rPr lang="en-US" sz="1800" dirty="0">
                 <a:solidFill>
                   <a:srgbClr val="2D2D3A"/>
                 </a:solidFill>
@@ -11588,22 +13268,16 @@
                 <a:ea typeface="Times New Roman" pitchFamily="34" charset="-122"/>
                 <a:cs typeface="Times New Roman" pitchFamily="34" charset="-120"/>
               </a:rPr>
-              <a:t>• EQ (External Queries) — внешние запросы: просмотр и поиск без изменения базы данных.</a:t>
+              <a:t>• Объективная оценка объема работ на стадии ТЗ.</a:t>
             </a:r>
-            <a:endParaRPr lang="en-US" sz="1600" dirty="0"/>
-          </a:p>
-          <a:p>
-            <a:pPr algn="l" indent="0" marL="0">
-              <a:buNone/>
-            </a:pPr>
-            <a:endParaRPr lang="en-US" sz="1600" dirty="0"/>
+            <a:endParaRPr lang="en-US" sz="1800" dirty="0"/>
           </a:p>
           <a:p>
             <a:pPr algn="l" indent="0" marL="0">
               <a:buNone/>
             </a:pPr>
             <a:r>
-              <a:rPr lang="en-US" sz="1600" dirty="0">
+              <a:rPr lang="en-US" sz="1800" dirty="0">
                 <a:solidFill>
                   <a:srgbClr val="2D2D3A"/>
                 </a:solidFill>
@@ -11611,16 +13285,16 @@
                 <a:ea typeface="Times New Roman" pitchFamily="34" charset="-122"/>
                 <a:cs typeface="Times New Roman" pitchFamily="34" charset="-120"/>
               </a:rPr>
-              <a:t>Функции данных:</a:t>
+              <a:t>• Планирование бюджетов, сроков и численности команды.</a:t>
             </a:r>
-            <a:endParaRPr lang="en-US" sz="1600" dirty="0"/>
+            <a:endParaRPr lang="en-US" sz="1800" dirty="0"/>
           </a:p>
           <a:p>
             <a:pPr algn="l" indent="0" marL="0">
               <a:buNone/>
             </a:pPr>
             <a:r>
-              <a:rPr lang="en-US" sz="1600" dirty="0">
+              <a:rPr lang="en-US" sz="1800" dirty="0">
                 <a:solidFill>
                   <a:srgbClr val="2D2D3A"/>
                 </a:solidFill>
@@ -11628,26 +13302,9 @@
                 <a:ea typeface="Times New Roman" pitchFamily="34" charset="-122"/>
                 <a:cs typeface="Times New Roman" pitchFamily="34" charset="-120"/>
               </a:rPr>
-              <a:t>• ILF (Internal Logical Files) — внутренние логические группы данных, полностью управляемые нашей системой (таблицы СУБД).</a:t>
+              <a:t>• Сравнение производительности разных команд в компании.</a:t>
             </a:r>
-            <a:endParaRPr lang="en-US" sz="1600" dirty="0"/>
-          </a:p>
-          <a:p>
-            <a:pPr algn="l" indent="0" marL="0">
-              <a:buNone/>
-            </a:pPr>
-            <a:r>
-              <a:rPr lang="en-US" sz="1600" dirty="0">
-                <a:solidFill>
-                  <a:srgbClr val="2D2D3A"/>
-                </a:solidFill>
-                <a:latin typeface="Times New Roman" pitchFamily="34" charset="0"/>
-                <a:ea typeface="Times New Roman" pitchFamily="34" charset="-122"/>
-                <a:cs typeface="Times New Roman" pitchFamily="34" charset="-120"/>
-              </a:rPr>
-              <a:t>• EIF (External Interface Files) — внешние логические файлы, читаемые из сторонних систем (интеграционная реплика базы данных 1С).</a:t>
-            </a:r>
-            <a:endParaRPr lang="en-US" sz="1600" dirty="0"/>
+            <a:endParaRPr lang="en-US" sz="1800" dirty="0"/>
           </a:p>
         </p:txBody>
       </p:sp>
@@ -11659,9 +13316,9 @@
 </p:sld>
 </file>
 
-<file path=ppt/slides/slide5.xml><?xml version="1.0" encoding="utf-8"?>
+<file path=ppt/slides/slide4.xml><?xml version="1.0" encoding="utf-8"?>
 <p:sld xmlns:a="http://schemas.openxmlformats.org/drawingml/2006/main" xmlns:r="http://schemas.openxmlformats.org/officeDocument/2006/relationships" xmlns:p="http://schemas.openxmlformats.org/presentationml/2006/main">
-  <p:cSld name="Slide 5">
+  <p:cSld name="Slide 4">
     <p:bg>
       <p:bgPr>
         <a:solidFill>
@@ -11716,7 +13373,7 @@
                 <a:ea typeface="Georgia" pitchFamily="34" charset="-122"/>
                 <a:cs typeface="Georgia" pitchFamily="34" charset="-120"/>
               </a:rPr>
-              <a:t>EI (External Inputs): Вводы данных</a:t>
+              <a:t>Пять типов компонентов (IFPUG)</a:t>
             </a:r>
             <a:endParaRPr lang="en-US" sz="1600" dirty="0"/>
           </a:p>
@@ -11781,7 +13438,7 @@
               <a:buNone/>
             </a:pPr>
             <a:r>
-              <a:rPr lang="en-US" sz="1200" b="1" dirty="0">
+              <a:rPr lang="en-US" sz="1400" b="1" dirty="0">
                 <a:solidFill>
                   <a:srgbClr val="1A1A2E"/>
                 </a:solidFill>
@@ -11789,9 +13446,9 @@
                 <a:ea typeface="Cambria" pitchFamily="34" charset="-122"/>
                 <a:cs typeface="Cambria" pitchFamily="34" charset="-120"/>
               </a:rPr>
-              <a:t>Определение EI и примеры в client-portal</a:t>
+              <a:t>Функции транзакций и функции данных</a:t>
             </a:r>
-            <a:endParaRPr lang="en-US" sz="1200" dirty="0"/>
+            <a:endParaRPr lang="en-US" sz="1400" dirty="0"/>
           </a:p>
         </p:txBody>
       </p:sp>
@@ -11820,7 +13477,7 @@
               <a:buNone/>
             </a:pPr>
             <a:r>
-              <a:rPr lang="en-US" sz="1600" dirty="0">
+              <a:rPr lang="en-US" sz="1800" dirty="0">
                 <a:solidFill>
                   <a:srgbClr val="2D2D3A"/>
                 </a:solidFill>
@@ -11828,22 +13485,16 @@
                 <a:ea typeface="Times New Roman" pitchFamily="34" charset="-122"/>
                 <a:cs typeface="Times New Roman" pitchFamily="34" charset="-120"/>
               </a:rPr>
-              <a:t>Внешний ввод — это элементарный процесс, в котором данные пересекают границу системы извне для добавления, изменения или удаления записей в логических файлах ILF.</a:t>
+              <a:t>Функции транзакций:</a:t>
             </a:r>
-            <a:endParaRPr lang="en-US" sz="1600" dirty="0"/>
-          </a:p>
-          <a:p>
-            <a:pPr algn="l" indent="0" marL="0">
-              <a:buNone/>
-            </a:pPr>
-            <a:endParaRPr lang="en-US" sz="1600" dirty="0"/>
+            <a:endParaRPr lang="en-US" sz="1800" dirty="0"/>
           </a:p>
           <a:p>
             <a:pPr algn="l" indent="0" marL="0">
               <a:buNone/>
             </a:pPr>
             <a:r>
-              <a:rPr lang="en-US" sz="1600" dirty="0">
+              <a:rPr lang="en-US" sz="1800" dirty="0">
                 <a:solidFill>
                   <a:srgbClr val="2D2D3A"/>
                 </a:solidFill>
@@ -11851,16 +13502,16 @@
                 <a:ea typeface="Times New Roman" pitchFamily="34" charset="-122"/>
                 <a:cs typeface="Times New Roman" pitchFamily="34" charset="-120"/>
               </a:rPr>
-              <a:t>Примеры в client-portal:</a:t>
+              <a:t>• EI (External Inputs) — входящие транзакции: ввод или изменение данных пользователем.</a:t>
             </a:r>
-            <a:endParaRPr lang="en-US" sz="1600" dirty="0"/>
+            <a:endParaRPr lang="en-US" sz="1800" dirty="0"/>
           </a:p>
           <a:p>
             <a:pPr algn="l" indent="0" marL="0">
               <a:buNone/>
             </a:pPr>
             <a:r>
-              <a:rPr lang="en-US" sz="1600" dirty="0">
+              <a:rPr lang="en-US" sz="1800" dirty="0">
                 <a:solidFill>
                   <a:srgbClr val="2D2D3A"/>
                 </a:solidFill>
@@ -11868,16 +13519,16 @@
                 <a:ea typeface="Times New Roman" pitchFamily="34" charset="-122"/>
                 <a:cs typeface="Times New Roman" pitchFamily="34" charset="-120"/>
               </a:rPr>
-              <a:t>• Форма создания нового обращения клиентом (POST /api/tickets).</a:t>
+              <a:t>• EO (External Outputs) — выходящие транзакции: выдача данных с расчетом, обработкой или уведомлениями.</a:t>
             </a:r>
-            <a:endParaRPr lang="en-US" sz="1600" dirty="0"/>
+            <a:endParaRPr lang="en-US" sz="1800" dirty="0"/>
           </a:p>
           <a:p>
             <a:pPr algn="l" indent="0" marL="0">
               <a:buNone/>
             </a:pPr>
             <a:r>
-              <a:rPr lang="en-US" sz="1600" dirty="0">
+              <a:rPr lang="en-US" sz="1800" dirty="0">
                 <a:solidFill>
                   <a:srgbClr val="2D2D3A"/>
                 </a:solidFill>
@@ -11885,16 +13536,22 @@
                 <a:ea typeface="Times New Roman" pitchFamily="34" charset="-122"/>
                 <a:cs typeface="Times New Roman" pitchFamily="34" charset="-120"/>
               </a:rPr>
-              <a:t>• Форма верификации SMS-кода OTP при входе.</a:t>
+              <a:t>• EQ (External Queries) — внешние запросы: просмотр и поиск без изменения базы данных.</a:t>
             </a:r>
-            <a:endParaRPr lang="en-US" sz="1600" dirty="0"/>
+            <a:endParaRPr lang="en-US" sz="1800" dirty="0"/>
+          </a:p>
+          <a:p>
+            <a:pPr algn="l" indent="0" marL="0">
+              <a:buNone/>
+            </a:pPr>
+            <a:endParaRPr lang="en-US" sz="1800" dirty="0"/>
           </a:p>
           <a:p>
             <a:pPr algn="l" indent="0" marL="0">
               <a:buNone/>
             </a:pPr>
             <a:r>
-              <a:rPr lang="en-US" sz="1600" dirty="0">
+              <a:rPr lang="en-US" sz="1800" dirty="0">
                 <a:solidFill>
                   <a:srgbClr val="2D2D3A"/>
                 </a:solidFill>
@@ -11902,16 +13559,16 @@
                 <a:ea typeface="Times New Roman" pitchFamily="34" charset="-122"/>
                 <a:cs typeface="Times New Roman" pitchFamily="34" charset="-120"/>
               </a:rPr>
-              <a:t>• Отправка нового сообщения в чат тикета (POST /api/messages).</a:t>
+              <a:t>Функции данных:</a:t>
             </a:r>
-            <a:endParaRPr lang="en-US" sz="1600" dirty="0"/>
+            <a:endParaRPr lang="en-US" sz="1800" dirty="0"/>
           </a:p>
           <a:p>
             <a:pPr algn="l" indent="0" marL="0">
               <a:buNone/>
             </a:pPr>
             <a:r>
-              <a:rPr lang="en-US" sz="1600" dirty="0">
+              <a:rPr lang="en-US" sz="1800" dirty="0">
                 <a:solidFill>
                   <a:srgbClr val="2D2D3A"/>
                 </a:solidFill>
@@ -11919,9 +13576,26 @@
                 <a:ea typeface="Times New Roman" pitchFamily="34" charset="-122"/>
                 <a:cs typeface="Times New Roman" pitchFamily="34" charset="-120"/>
               </a:rPr>
-              <a:t>• Изменение личных данных пользователя в настройках профиля.</a:t>
+              <a:t>• ILF (Internal Logical Files) — внутренние логические группы данных, полностью управляемые нашей системой (таблицы СУБД).</a:t>
             </a:r>
-            <a:endParaRPr lang="en-US" sz="1600" dirty="0"/>
+            <a:endParaRPr lang="en-US" sz="1800" dirty="0"/>
+          </a:p>
+          <a:p>
+            <a:pPr algn="l" indent="0" marL="0">
+              <a:buNone/>
+            </a:pPr>
+            <a:r>
+              <a:rPr lang="en-US" sz="1800" dirty="0">
+                <a:solidFill>
+                  <a:srgbClr val="2D2D3A"/>
+                </a:solidFill>
+                <a:latin typeface="Times New Roman" pitchFamily="34" charset="0"/>
+                <a:ea typeface="Times New Roman" pitchFamily="34" charset="-122"/>
+                <a:cs typeface="Times New Roman" pitchFamily="34" charset="-120"/>
+              </a:rPr>
+              <a:t>• EIF (External Interface Files) — внешние логические файлы, читаемые из сторонних систем (интеграционная реплика базы данных 1С).</a:t>
+            </a:r>
+            <a:endParaRPr lang="en-US" sz="1800" dirty="0"/>
           </a:p>
         </p:txBody>
       </p:sp>
@@ -11933,9 +13607,9 @@
 </p:sld>
 </file>
 
-<file path=ppt/slides/slide6.xml><?xml version="1.0" encoding="utf-8"?>
+<file path=ppt/slides/slide5.xml><?xml version="1.0" encoding="utf-8"?>
 <p:sld xmlns:a="http://schemas.openxmlformats.org/drawingml/2006/main" xmlns:r="http://schemas.openxmlformats.org/officeDocument/2006/relationships" xmlns:p="http://schemas.openxmlformats.org/presentationml/2006/main">
-  <p:cSld name="Slide 6">
+  <p:cSld name="Slide 5">
     <p:bg>
       <p:bgPr>
         <a:solidFill>
@@ -11990,7 +13664,7 @@
                 <a:ea typeface="Georgia" pitchFamily="34" charset="-122"/>
                 <a:cs typeface="Georgia" pitchFamily="34" charset="-120"/>
               </a:rPr>
-              <a:t>EO (External Outputs): Выводы данных</a:t>
+              <a:t>EI (External Inputs): Вводы данных</a:t>
             </a:r>
             <a:endParaRPr lang="en-US" sz="1600" dirty="0"/>
           </a:p>
@@ -12055,7 +13729,7 @@
               <a:buNone/>
             </a:pPr>
             <a:r>
-              <a:rPr lang="en-US" sz="1200" b="1" dirty="0">
+              <a:rPr lang="en-US" sz="1400" b="1" dirty="0">
                 <a:solidFill>
                   <a:srgbClr val="1A1A2E"/>
                 </a:solidFill>
@@ -12063,9 +13737,9 @@
                 <a:ea typeface="Cambria" pitchFamily="34" charset="-122"/>
                 <a:cs typeface="Cambria" pitchFamily="34" charset="-120"/>
               </a:rPr>
-              <a:t>Определение EO и примеры в client-portal</a:t>
+              <a:t>Определение EI и примеры в client-portal</a:t>
             </a:r>
-            <a:endParaRPr lang="en-US" sz="1200" dirty="0"/>
+            <a:endParaRPr lang="en-US" sz="1400" dirty="0"/>
           </a:p>
         </p:txBody>
       </p:sp>
@@ -12094,7 +13768,7 @@
               <a:buNone/>
             </a:pPr>
             <a:r>
-              <a:rPr lang="en-US" sz="1600" dirty="0">
+              <a:rPr lang="en-US" sz="1800" dirty="0">
                 <a:solidFill>
                   <a:srgbClr val="2D2D3A"/>
                 </a:solidFill>
@@ -12102,22 +13776,22 @@
                 <a:ea typeface="Times New Roman" pitchFamily="34" charset="-122"/>
                 <a:cs typeface="Times New Roman" pitchFamily="34" charset="-120"/>
               </a:rPr>
-              <a:t>Внешний вывод — это процесс, отправляющий результаты расчетов или подготовленные данные за пределы системы. Логика обязательно должна содержать математические расчеты или изменение состояний.</a:t>
+              <a:t>Внешний ввод — это элементарный процесс, в котором данные пересекают границу системы извне для добавления, изменения или удаления записей в логических файлах ILF.</a:t>
             </a:r>
-            <a:endParaRPr lang="en-US" sz="1600" dirty="0"/>
+            <a:endParaRPr lang="en-US" sz="1800" dirty="0"/>
           </a:p>
           <a:p>
             <a:pPr algn="l" indent="0" marL="0">
               <a:buNone/>
             </a:pPr>
-            <a:endParaRPr lang="en-US" sz="1600" dirty="0"/>
+            <a:endParaRPr lang="en-US" sz="1800" dirty="0"/>
           </a:p>
           <a:p>
             <a:pPr algn="l" indent="0" marL="0">
               <a:buNone/>
             </a:pPr>
             <a:r>
-              <a:rPr lang="en-US" sz="1600" dirty="0">
+              <a:rPr lang="en-US" sz="1800" dirty="0">
                 <a:solidFill>
                   <a:srgbClr val="2D2D3A"/>
                 </a:solidFill>
@@ -12127,14 +13801,14 @@
               </a:rPr>
               <a:t>Примеры в client-portal:</a:t>
             </a:r>
-            <a:endParaRPr lang="en-US" sz="1600" dirty="0"/>
+            <a:endParaRPr lang="en-US" sz="1800" dirty="0"/>
           </a:p>
           <a:p>
             <a:pPr algn="l" indent="0" marL="0">
               <a:buNone/>
             </a:pPr>
             <a:r>
-              <a:rPr lang="en-US" sz="1600" dirty="0">
+              <a:rPr lang="en-US" sz="1800" dirty="0">
                 <a:solidFill>
                   <a:srgbClr val="2D2D3A"/>
                 </a:solidFill>
@@ -12142,16 +13816,16 @@
                 <a:ea typeface="Times New Roman" pitchFamily="34" charset="-122"/>
                 <a:cs typeface="Times New Roman" pitchFamily="34" charset="-120"/>
               </a:rPr>
-              <a:t>• Мгновенные оповещения в браузере о смене статусов обращений через WebSocket.</a:t>
+              <a:t>• Форма создания нового обращения клиентом (POST /api/tickets).</a:t>
             </a:r>
-            <a:endParaRPr lang="en-US" sz="1600" dirty="0"/>
+            <a:endParaRPr lang="en-US" sz="1800" dirty="0"/>
           </a:p>
           <a:p>
             <a:pPr algn="l" indent="0" marL="0">
               <a:buNone/>
             </a:pPr>
             <a:r>
-              <a:rPr lang="en-US" sz="1600" dirty="0">
+              <a:rPr lang="en-US" sz="1800" dirty="0">
                 <a:solidFill>
                   <a:srgbClr val="2D2D3A"/>
                 </a:solidFill>
@@ -12159,16 +13833,16 @@
                 <a:ea typeface="Times New Roman" pitchFamily="34" charset="-122"/>
                 <a:cs typeface="Times New Roman" pitchFamily="34" charset="-120"/>
               </a:rPr>
-              <a:t>• Формирование сводного PDF-отчета по затраченному времени на техподдержку.</a:t>
+              <a:t>• Форма верификации SMS-кода OTP при входе.</a:t>
             </a:r>
-            <a:endParaRPr lang="en-US" sz="1600" dirty="0"/>
+            <a:endParaRPr lang="en-US" sz="1800" dirty="0"/>
           </a:p>
           <a:p>
             <a:pPr algn="l" indent="0" marL="0">
               <a:buNone/>
             </a:pPr>
             <a:r>
-              <a:rPr lang="en-US" sz="1600" dirty="0">
+              <a:rPr lang="en-US" sz="1800" dirty="0">
                 <a:solidFill>
                   <a:srgbClr val="2D2D3A"/>
                 </a:solidFill>
@@ -12176,9 +13850,26 @@
                 <a:ea typeface="Times New Roman" pitchFamily="34" charset="-122"/>
                 <a:cs typeface="Times New Roman" pitchFamily="34" charset="-120"/>
               </a:rPr>
-              <a:t>• Автоматическая отправка уведомления клиенту о назначенном специалисте.</a:t>
+              <a:t>• Отправка нового сообщения в чат тикета (POST /api/messages).</a:t>
             </a:r>
-            <a:endParaRPr lang="en-US" sz="1600" dirty="0"/>
+            <a:endParaRPr lang="en-US" sz="1800" dirty="0"/>
+          </a:p>
+          <a:p>
+            <a:pPr algn="l" indent="0" marL="0">
+              <a:buNone/>
+            </a:pPr>
+            <a:r>
+              <a:rPr lang="en-US" sz="1800" dirty="0">
+                <a:solidFill>
+                  <a:srgbClr val="2D2D3A"/>
+                </a:solidFill>
+                <a:latin typeface="Times New Roman" pitchFamily="34" charset="0"/>
+                <a:ea typeface="Times New Roman" pitchFamily="34" charset="-122"/>
+                <a:cs typeface="Times New Roman" pitchFamily="34" charset="-120"/>
+              </a:rPr>
+              <a:t>• Изменение личных данных пользователя в настройках профиля.</a:t>
+            </a:r>
+            <a:endParaRPr lang="en-US" sz="1800" dirty="0"/>
           </a:p>
         </p:txBody>
       </p:sp>
@@ -12190,9 +13881,9 @@
 </p:sld>
 </file>
 
-<file path=ppt/slides/slide7.xml><?xml version="1.0" encoding="utf-8"?>
+<file path=ppt/slides/slide6.xml><?xml version="1.0" encoding="utf-8"?>
 <p:sld xmlns:a="http://schemas.openxmlformats.org/drawingml/2006/main" xmlns:r="http://schemas.openxmlformats.org/officeDocument/2006/relationships" xmlns:p="http://schemas.openxmlformats.org/presentationml/2006/main">
-  <p:cSld name="Slide 7">
+  <p:cSld name="Slide 6">
     <p:bg>
       <p:bgPr>
         <a:solidFill>
@@ -12247,7 +13938,7 @@
                 <a:ea typeface="Georgia" pitchFamily="34" charset="-122"/>
                 <a:cs typeface="Georgia" pitchFamily="34" charset="-120"/>
               </a:rPr>
-              <a:t>EQ (External Queries): Внешние запросы</a:t>
+              <a:t>EO (External Outputs): Выводы данных</a:t>
             </a:r>
             <a:endParaRPr lang="en-US" sz="1600" dirty="0"/>
           </a:p>
@@ -12312,7 +14003,7 @@
               <a:buNone/>
             </a:pPr>
             <a:r>
-              <a:rPr lang="en-US" sz="1200" b="1" dirty="0">
+              <a:rPr lang="en-US" sz="1400" b="1" dirty="0">
                 <a:solidFill>
                   <a:srgbClr val="1A1A2E"/>
                 </a:solidFill>
@@ -12320,9 +14011,9 @@
                 <a:ea typeface="Cambria" pitchFamily="34" charset="-122"/>
                 <a:cs typeface="Cambria" pitchFamily="34" charset="-120"/>
               </a:rPr>
-              <a:t>Определение EQ и примеры в client-portal</a:t>
+              <a:t>Определение EO и примеры в client-portal</a:t>
             </a:r>
-            <a:endParaRPr lang="en-US" sz="1200" dirty="0"/>
+            <a:endParaRPr lang="en-US" sz="1400" dirty="0"/>
           </a:p>
         </p:txBody>
       </p:sp>
@@ -12351,7 +14042,7 @@
               <a:buNone/>
             </a:pPr>
             <a:r>
-              <a:rPr lang="en-US" sz="1600" dirty="0">
+              <a:rPr lang="en-US" sz="1800" dirty="0">
                 <a:solidFill>
                   <a:srgbClr val="2D2D3A"/>
                 </a:solidFill>
@@ -12359,22 +14050,22 @@
                 <a:ea typeface="Times New Roman" pitchFamily="34" charset="-122"/>
                 <a:cs typeface="Times New Roman" pitchFamily="34" charset="-120"/>
               </a:rPr>
-              <a:t>Внешний запрос — это процесс вывода данных, который считывает записи из ILF/EIF, но не выполняет никаких математических расчетов, формул или изменений состояния.</a:t>
+              <a:t>Внешний вывод — это процесс, отправляющий результаты расчетов или подготовленные данные за пределы системы. Логика обязательно должна содержать математические расчеты или изменение состояний.</a:t>
             </a:r>
-            <a:endParaRPr lang="en-US" sz="1600" dirty="0"/>
+            <a:endParaRPr lang="en-US" sz="1800" dirty="0"/>
           </a:p>
           <a:p>
             <a:pPr algn="l" indent="0" marL="0">
               <a:buNone/>
             </a:pPr>
-            <a:endParaRPr lang="en-US" sz="1600" dirty="0"/>
+            <a:endParaRPr lang="en-US" sz="1800" dirty="0"/>
           </a:p>
           <a:p>
             <a:pPr algn="l" indent="0" marL="0">
               <a:buNone/>
             </a:pPr>
             <a:r>
-              <a:rPr lang="en-US" sz="1600" dirty="0">
+              <a:rPr lang="en-US" sz="1800" dirty="0">
                 <a:solidFill>
                   <a:srgbClr val="2D2D3A"/>
                 </a:solidFill>
@@ -12384,14 +14075,14 @@
               </a:rPr>
               <a:t>Примеры в client-portal:</a:t>
             </a:r>
-            <a:endParaRPr lang="en-US" sz="1600" dirty="0"/>
+            <a:endParaRPr lang="en-US" sz="1800" dirty="0"/>
           </a:p>
           <a:p>
             <a:pPr algn="l" indent="0" marL="0">
               <a:buNone/>
             </a:pPr>
             <a:r>
-              <a:rPr lang="en-US" sz="1600" dirty="0">
+              <a:rPr lang="en-US" sz="1800" dirty="0">
                 <a:solidFill>
                   <a:srgbClr val="2D2D3A"/>
                 </a:solidFill>
@@ -12399,16 +14090,16 @@
                 <a:ea typeface="Times New Roman" pitchFamily="34" charset="-122"/>
                 <a:cs typeface="Times New Roman" pitchFamily="34" charset="-120"/>
               </a:rPr>
-              <a:t>• Просмотр постраничного списка своих обращений с фильтрацией (GET /api/tickets).</a:t>
+              <a:t>• Мгновенные оповещения в браузере о смене статусов обращений через WebSocket.</a:t>
             </a:r>
-            <a:endParaRPr lang="en-US" sz="1600" dirty="0"/>
+            <a:endParaRPr lang="en-US" sz="1800" dirty="0"/>
           </a:p>
           <a:p>
             <a:pPr algn="l" indent="0" marL="0">
               <a:buNone/>
             </a:pPr>
             <a:r>
-              <a:rPr lang="en-US" sz="1600" dirty="0">
+              <a:rPr lang="en-US" sz="1800" dirty="0">
                 <a:solidFill>
                   <a:srgbClr val="2D2D3A"/>
                 </a:solidFill>
@@ -12416,16 +14107,16 @@
                 <a:ea typeface="Times New Roman" pitchFamily="34" charset="-122"/>
                 <a:cs typeface="Times New Roman" pitchFamily="34" charset="-120"/>
               </a:rPr>
-              <a:t>• Отображение карточки конкретного тикета с историей переписки.</a:t>
+              <a:t>• Формирование сводного PDF-отчета по затраченному времени на техподдержку.</a:t>
             </a:r>
-            <a:endParaRPr lang="en-US" sz="1600" dirty="0"/>
+            <a:endParaRPr lang="en-US" sz="1800" dirty="0"/>
           </a:p>
           <a:p>
             <a:pPr algn="l" indent="0" marL="0">
               <a:buNone/>
             </a:pPr>
             <a:r>
-              <a:rPr lang="en-US" sz="1600" dirty="0">
+              <a:rPr lang="en-US" sz="1800" dirty="0">
                 <a:solidFill>
                   <a:srgbClr val="2D2D3A"/>
                 </a:solidFill>
@@ -12433,26 +14124,9 @@
                 <a:ea typeface="Times New Roman" pitchFamily="34" charset="-122"/>
                 <a:cs typeface="Times New Roman" pitchFamily="34" charset="-120"/>
               </a:rPr>
-              <a:t>• Чтение настроек профиля и каналов уведомлений.</a:t>
+              <a:t>• Автоматическая отправка уведомления клиенту о назначенном специалисте.</a:t>
             </a:r>
-            <a:endParaRPr lang="en-US" sz="1600" dirty="0"/>
-          </a:p>
-          <a:p>
-            <a:pPr algn="l" indent="0" marL="0">
-              <a:buNone/>
-            </a:pPr>
-            <a:r>
-              <a:rPr lang="en-US" sz="1600" dirty="0">
-                <a:solidFill>
-                  <a:srgbClr val="2D2D3A"/>
-                </a:solidFill>
-                <a:latin typeface="Times New Roman" pitchFamily="34" charset="0"/>
-                <a:ea typeface="Times New Roman" pitchFamily="34" charset="-122"/>
-                <a:cs typeface="Times New Roman" pitchFamily="34" charset="-120"/>
-              </a:rPr>
-              <a:t>• Поиск по ключевым словам в справочнике конфигураций 1С.</a:t>
-            </a:r>
-            <a:endParaRPr lang="en-US" sz="1600" dirty="0"/>
+            <a:endParaRPr lang="en-US" sz="1800" dirty="0"/>
           </a:p>
         </p:txBody>
       </p:sp>
@@ -12464,9 +14138,9 @@
 </p:sld>
 </file>
 
-<file path=ppt/slides/slide8.xml><?xml version="1.0" encoding="utf-8"?>
+<file path=ppt/slides/slide7.xml><?xml version="1.0" encoding="utf-8"?>
 <p:sld xmlns:a="http://schemas.openxmlformats.org/drawingml/2006/main" xmlns:r="http://schemas.openxmlformats.org/officeDocument/2006/relationships" xmlns:p="http://schemas.openxmlformats.org/presentationml/2006/main">
-  <p:cSld name="Slide 8">
+  <p:cSld name="Slide 7">
     <p:bg>
       <p:bgPr>
         <a:solidFill>
@@ -12521,7 +14195,7 @@
                 <a:ea typeface="Georgia" pitchFamily="34" charset="-122"/>
                 <a:cs typeface="Georgia" pitchFamily="34" charset="-120"/>
               </a:rPr>
-              <a:t>ILF (Internal Logical Files): Внутренние файлы</a:t>
+              <a:t>EQ (External Queries): Внешние запросы</a:t>
             </a:r>
             <a:endParaRPr lang="en-US" sz="1600" dirty="0"/>
           </a:p>
@@ -12586,7 +14260,7 @@
               <a:buNone/>
             </a:pPr>
             <a:r>
-              <a:rPr lang="en-US" sz="1200" b="1" dirty="0">
+              <a:rPr lang="en-US" sz="1400" b="1" dirty="0">
                 <a:solidFill>
                   <a:srgbClr val="1A1A2E"/>
                 </a:solidFill>
@@ -12594,9 +14268,9 @@
                 <a:ea typeface="Cambria" pitchFamily="34" charset="-122"/>
                 <a:cs typeface="Cambria" pitchFamily="34" charset="-120"/>
               </a:rPr>
-              <a:t>Определение ILF и примеры в client-portal</a:t>
+              <a:t>Определение EQ и примеры в client-portal</a:t>
             </a:r>
-            <a:endParaRPr lang="en-US" sz="1200" dirty="0"/>
+            <a:endParaRPr lang="en-US" sz="1400" dirty="0"/>
           </a:p>
         </p:txBody>
       </p:sp>
@@ -12625,7 +14299,7 @@
               <a:buNone/>
             </a:pPr>
             <a:r>
-              <a:rPr lang="en-US" sz="1600" dirty="0">
+              <a:rPr lang="en-US" sz="1800" dirty="0">
                 <a:solidFill>
                   <a:srgbClr val="2D2D3A"/>
                 </a:solidFill>
@@ -12633,22 +14307,22 @@
                 <a:ea typeface="Times New Roman" pitchFamily="34" charset="-122"/>
                 <a:cs typeface="Times New Roman" pitchFamily="34" charset="-120"/>
               </a:rPr>
-              <a:t>Внутренний логический файл — это логически связанная группа данных, хранящаяся и изменяемая внутри нашей системы с помощью транзакций EI.</a:t>
+              <a:t>Внешний запрос — это процесс вывода данных, который считывает записи из ILF/EIF, но не выполняет никаких математических расчетов, формул или изменений состояния.</a:t>
             </a:r>
-            <a:endParaRPr lang="en-US" sz="1600" dirty="0"/>
+            <a:endParaRPr lang="en-US" sz="1800" dirty="0"/>
           </a:p>
           <a:p>
             <a:pPr algn="l" indent="0" marL="0">
               <a:buNone/>
             </a:pPr>
-            <a:endParaRPr lang="en-US" sz="1600" dirty="0"/>
+            <a:endParaRPr lang="en-US" sz="1800" dirty="0"/>
           </a:p>
           <a:p>
             <a:pPr algn="l" indent="0" marL="0">
               <a:buNone/>
             </a:pPr>
             <a:r>
-              <a:rPr lang="en-US" sz="1600" dirty="0">
+              <a:rPr lang="en-US" sz="1800" dirty="0">
                 <a:solidFill>
                   <a:srgbClr val="2D2D3A"/>
                 </a:solidFill>
@@ -12656,16 +14330,16 @@
                 <a:ea typeface="Times New Roman" pitchFamily="34" charset="-122"/>
                 <a:cs typeface="Times New Roman" pitchFamily="34" charset="-120"/>
               </a:rPr>
-              <a:t>Примеры в client-portal (Таблицы Postgres):</a:t>
+              <a:t>Примеры в client-portal:</a:t>
             </a:r>
-            <a:endParaRPr lang="en-US" sz="1600" dirty="0"/>
+            <a:endParaRPr lang="en-US" sz="1800" dirty="0"/>
           </a:p>
           <a:p>
             <a:pPr algn="l" indent="0" marL="0">
               <a:buNone/>
             </a:pPr>
             <a:r>
-              <a:rPr lang="en-US" sz="1600" dirty="0">
+              <a:rPr lang="en-US" sz="1800" dirty="0">
                 <a:solidFill>
                   <a:srgbClr val="2D2D3A"/>
                 </a:solidFill>
@@ -12673,16 +14347,16 @@
                 <a:ea typeface="Times New Roman" pitchFamily="34" charset="-122"/>
                 <a:cs typeface="Times New Roman" pitchFamily="34" charset="-120"/>
               </a:rPr>
-              <a:t>• Таблица `users` — учетные записи и роли.</a:t>
+              <a:t>• Просмотр постраничного списка своих обращений с фильтрацией (GET /api/tickets).</a:t>
             </a:r>
-            <a:endParaRPr lang="en-US" sz="1600" dirty="0"/>
+            <a:endParaRPr lang="en-US" sz="1800" dirty="0"/>
           </a:p>
           <a:p>
             <a:pPr algn="l" indent="0" marL="0">
               <a:buNone/>
             </a:pPr>
             <a:r>
-              <a:rPr lang="en-US" sz="1600" dirty="0">
+              <a:rPr lang="en-US" sz="1800" dirty="0">
                 <a:solidFill>
                   <a:srgbClr val="2D2D3A"/>
                 </a:solidFill>
@@ -12690,16 +14364,16 @@
                 <a:ea typeface="Times New Roman" pitchFamily="34" charset="-122"/>
                 <a:cs typeface="Times New Roman" pitchFamily="34" charset="-120"/>
               </a:rPr>
-              <a:t>• Таблица `tickets` — обращения, статусы, версии.</a:t>
+              <a:t>• Отображение карточки конкретного тикета с историей переписки.</a:t>
             </a:r>
-            <a:endParaRPr lang="en-US" sz="1600" dirty="0"/>
+            <a:endParaRPr lang="en-US" sz="1800" dirty="0"/>
           </a:p>
           <a:p>
             <a:pPr algn="l" indent="0" marL="0">
               <a:buNone/>
             </a:pPr>
             <a:r>
-              <a:rPr lang="en-US" sz="1600" dirty="0">
+              <a:rPr lang="en-US" sz="1800" dirty="0">
                 <a:solidFill>
                   <a:srgbClr val="2D2D3A"/>
                 </a:solidFill>
@@ -12707,16 +14381,16 @@
                 <a:ea typeface="Times New Roman" pitchFamily="34" charset="-122"/>
                 <a:cs typeface="Times New Roman" pitchFamily="34" charset="-120"/>
               </a:rPr>
-              <a:t>• Таблица `messages` — история чатов.</a:t>
+              <a:t>• Чтение настроек профиля и каналов уведомлений.</a:t>
             </a:r>
-            <a:endParaRPr lang="en-US" sz="1600" dirty="0"/>
+            <a:endParaRPr lang="en-US" sz="1800" dirty="0"/>
           </a:p>
           <a:p>
             <a:pPr algn="l" indent="0" marL="0">
               <a:buNone/>
             </a:pPr>
             <a:r>
-              <a:rPr lang="en-US" sz="1600" dirty="0">
+              <a:rPr lang="en-US" sz="1800" dirty="0">
                 <a:solidFill>
                   <a:srgbClr val="2D2D3A"/>
                 </a:solidFill>
@@ -12724,26 +14398,9 @@
                 <a:ea typeface="Times New Roman" pitchFamily="34" charset="-122"/>
                 <a:cs typeface="Times New Roman" pitchFamily="34" charset="-120"/>
               </a:rPr>
-              <a:t>• Таблица `attachments` — метаданные файлов в MinIO.</a:t>
+              <a:t>• Поиск по ключевым словам в справочнике конфигураций 1С.</a:t>
             </a:r>
-            <a:endParaRPr lang="en-US" sz="1600" dirty="0"/>
-          </a:p>
-          <a:p>
-            <a:pPr algn="l" indent="0" marL="0">
-              <a:buNone/>
-            </a:pPr>
-            <a:r>
-              <a:rPr lang="en-US" sz="1600" dirty="0">
-                <a:solidFill>
-                  <a:srgbClr val="2D2D3A"/>
-                </a:solidFill>
-                <a:latin typeface="Times New Roman" pitchFamily="34" charset="0"/>
-                <a:ea typeface="Times New Roman" pitchFamily="34" charset="-122"/>
-                <a:cs typeface="Times New Roman" pitchFamily="34" charset="-120"/>
-              </a:rPr>
-              <a:t>• Таблица `outbox` — очередь интеграционных событий для 1С.</a:t>
-            </a:r>
-            <a:endParaRPr lang="en-US" sz="1600" dirty="0"/>
+            <a:endParaRPr lang="en-US" sz="1800" dirty="0"/>
           </a:p>
         </p:txBody>
       </p:sp>
@@ -12755,9 +14412,9 @@
 </p:sld>
 </file>
 
-<file path=ppt/slides/slide9.xml><?xml version="1.0" encoding="utf-8"?>
+<file path=ppt/slides/slide8.xml><?xml version="1.0" encoding="utf-8"?>
 <p:sld xmlns:a="http://schemas.openxmlformats.org/drawingml/2006/main" xmlns:r="http://schemas.openxmlformats.org/officeDocument/2006/relationships" xmlns:p="http://schemas.openxmlformats.org/presentationml/2006/main">
-  <p:cSld name="Slide 9">
+  <p:cSld name="Slide 8">
     <p:bg>
       <p:bgPr>
         <a:solidFill>
@@ -12812,7 +14469,7 @@
                 <a:ea typeface="Georgia" pitchFamily="34" charset="-122"/>
                 <a:cs typeface="Georgia" pitchFamily="34" charset="-120"/>
               </a:rPr>
-              <a:t>EIF (External Interface Files): Внешние файлы</a:t>
+              <a:t>ILF (Internal Logical Files): Внутренние файлы</a:t>
             </a:r>
             <a:endParaRPr lang="en-US" sz="1600" dirty="0"/>
           </a:p>
@@ -12877,7 +14534,7 @@
               <a:buNone/>
             </a:pPr>
             <a:r>
-              <a:rPr lang="en-US" sz="1200" b="1" dirty="0">
+              <a:rPr lang="en-US" sz="1400" b="1" dirty="0">
                 <a:solidFill>
                   <a:srgbClr val="1A1A2E"/>
                 </a:solidFill>
@@ -12885,9 +14542,9 @@
                 <a:ea typeface="Cambria" pitchFamily="34" charset="-122"/>
                 <a:cs typeface="Cambria" pitchFamily="34" charset="-120"/>
               </a:rPr>
-              <a:t>Определение EIF и примеры в client-portal</a:t>
+              <a:t>Определение ILF и примеры в client-portal</a:t>
             </a:r>
-            <a:endParaRPr lang="en-US" sz="1200" dirty="0"/>
+            <a:endParaRPr lang="en-US" sz="1400" dirty="0"/>
           </a:p>
         </p:txBody>
       </p:sp>
@@ -12916,7 +14573,298 @@
               <a:buNone/>
             </a:pPr>
             <a:r>
-              <a:rPr lang="en-US" sz="1600" dirty="0">
+              <a:rPr lang="en-US" sz="1800" dirty="0">
+                <a:solidFill>
+                  <a:srgbClr val="2D2D3A"/>
+                </a:solidFill>
+                <a:latin typeface="Times New Roman" pitchFamily="34" charset="0"/>
+                <a:ea typeface="Times New Roman" pitchFamily="34" charset="-122"/>
+                <a:cs typeface="Times New Roman" pitchFamily="34" charset="-120"/>
+              </a:rPr>
+              <a:t>Внутренний логический файл — это логически связанная группа данных, хранящаяся и изменяемая внутри нашей системы с помощью транзакций EI.</a:t>
+            </a:r>
+            <a:endParaRPr lang="en-US" sz="1800" dirty="0"/>
+          </a:p>
+          <a:p>
+            <a:pPr algn="l" indent="0" marL="0">
+              <a:buNone/>
+            </a:pPr>
+            <a:endParaRPr lang="en-US" sz="1800" dirty="0"/>
+          </a:p>
+          <a:p>
+            <a:pPr algn="l" indent="0" marL="0">
+              <a:buNone/>
+            </a:pPr>
+            <a:r>
+              <a:rPr lang="en-US" sz="1800" dirty="0">
+                <a:solidFill>
+                  <a:srgbClr val="2D2D3A"/>
+                </a:solidFill>
+                <a:latin typeface="Times New Roman" pitchFamily="34" charset="0"/>
+                <a:ea typeface="Times New Roman" pitchFamily="34" charset="-122"/>
+                <a:cs typeface="Times New Roman" pitchFamily="34" charset="-120"/>
+              </a:rPr>
+              <a:t>Примеры в client-portal (Таблицы Postgres):</a:t>
+            </a:r>
+            <a:endParaRPr lang="en-US" sz="1800" dirty="0"/>
+          </a:p>
+          <a:p>
+            <a:pPr algn="l" indent="0" marL="0">
+              <a:buNone/>
+            </a:pPr>
+            <a:r>
+              <a:rPr lang="en-US" sz="1800" dirty="0">
+                <a:solidFill>
+                  <a:srgbClr val="2D2D3A"/>
+                </a:solidFill>
+                <a:latin typeface="Times New Roman" pitchFamily="34" charset="0"/>
+                <a:ea typeface="Times New Roman" pitchFamily="34" charset="-122"/>
+                <a:cs typeface="Times New Roman" pitchFamily="34" charset="-120"/>
+              </a:rPr>
+              <a:t>• Таблица `users` — учетные записи и роли.</a:t>
+            </a:r>
+            <a:endParaRPr lang="en-US" sz="1800" dirty="0"/>
+          </a:p>
+          <a:p>
+            <a:pPr algn="l" indent="0" marL="0">
+              <a:buNone/>
+            </a:pPr>
+            <a:r>
+              <a:rPr lang="en-US" sz="1800" dirty="0">
+                <a:solidFill>
+                  <a:srgbClr val="2D2D3A"/>
+                </a:solidFill>
+                <a:latin typeface="Times New Roman" pitchFamily="34" charset="0"/>
+                <a:ea typeface="Times New Roman" pitchFamily="34" charset="-122"/>
+                <a:cs typeface="Times New Roman" pitchFamily="34" charset="-120"/>
+              </a:rPr>
+              <a:t>• Таблица `tickets` — обращения, статусы, версии.</a:t>
+            </a:r>
+            <a:endParaRPr lang="en-US" sz="1800" dirty="0"/>
+          </a:p>
+          <a:p>
+            <a:pPr algn="l" indent="0" marL="0">
+              <a:buNone/>
+            </a:pPr>
+            <a:r>
+              <a:rPr lang="en-US" sz="1800" dirty="0">
+                <a:solidFill>
+                  <a:srgbClr val="2D2D3A"/>
+                </a:solidFill>
+                <a:latin typeface="Times New Roman" pitchFamily="34" charset="0"/>
+                <a:ea typeface="Times New Roman" pitchFamily="34" charset="-122"/>
+                <a:cs typeface="Times New Roman" pitchFamily="34" charset="-120"/>
+              </a:rPr>
+              <a:t>• Таблица `messages` — история чатов.</a:t>
+            </a:r>
+            <a:endParaRPr lang="en-US" sz="1800" dirty="0"/>
+          </a:p>
+          <a:p>
+            <a:pPr algn="l" indent="0" marL="0">
+              <a:buNone/>
+            </a:pPr>
+            <a:r>
+              <a:rPr lang="en-US" sz="1800" dirty="0">
+                <a:solidFill>
+                  <a:srgbClr val="2D2D3A"/>
+                </a:solidFill>
+                <a:latin typeface="Times New Roman" pitchFamily="34" charset="0"/>
+                <a:ea typeface="Times New Roman" pitchFamily="34" charset="-122"/>
+                <a:cs typeface="Times New Roman" pitchFamily="34" charset="-120"/>
+              </a:rPr>
+              <a:t>• Таблица `attachments` — метаданные файлов в MinIO.</a:t>
+            </a:r>
+            <a:endParaRPr lang="en-US" sz="1800" dirty="0"/>
+          </a:p>
+          <a:p>
+            <a:pPr algn="l" indent="0" marL="0">
+              <a:buNone/>
+            </a:pPr>
+            <a:r>
+              <a:rPr lang="en-US" sz="1800" dirty="0">
+                <a:solidFill>
+                  <a:srgbClr val="2D2D3A"/>
+                </a:solidFill>
+                <a:latin typeface="Times New Roman" pitchFamily="34" charset="0"/>
+                <a:ea typeface="Times New Roman" pitchFamily="34" charset="-122"/>
+                <a:cs typeface="Times New Roman" pitchFamily="34" charset="-120"/>
+              </a:rPr>
+              <a:t>• Таблица `outbox` — очередь интеграционных событий для 1С.</a:t>
+            </a:r>
+            <a:endParaRPr lang="en-US" sz="1800" dirty="0"/>
+          </a:p>
+        </p:txBody>
+      </p:sp>
+    </p:spTree>
+  </p:cSld>
+  <p:clrMapOvr>
+    <a:masterClrMapping/>
+  </p:clrMapOvr>
+</p:sld>
+</file>
+
+<file path=ppt/slides/slide9.xml><?xml version="1.0" encoding="utf-8"?>
+<p:sld xmlns:a="http://schemas.openxmlformats.org/drawingml/2006/main" xmlns:r="http://schemas.openxmlformats.org/officeDocument/2006/relationships" xmlns:p="http://schemas.openxmlformats.org/presentationml/2006/main">
+  <p:cSld name="Slide 9">
+    <p:bg>
+      <p:bgPr>
+        <a:solidFill>
+          <a:srgbClr val="FFFFFF"/>
+        </a:solidFill>
+      </p:bgPr>
+    </p:bg>
+    <p:spTree>
+      <p:nvGrpSpPr>
+        <p:cNvPr id="1" name=""/>
+        <p:cNvGrpSpPr/>
+        <p:nvPr/>
+      </p:nvGrpSpPr>
+      <p:grpSpPr>
+        <a:xfrm>
+          <a:off x="0" y="0"/>
+          <a:ext cx="0" cy="0"/>
+          <a:chOff x="0" y="0"/>
+          <a:chExt cx="0" cy="0"/>
+        </a:xfrm>
+      </p:grpSpPr>
+      <p:sp>
+        <p:nvSpPr>
+          <p:cNvPr id="2" name="Text 0"/>
+          <p:cNvSpPr/>
+          <p:nvPr/>
+        </p:nvSpPr>
+        <p:spPr>
+          <a:xfrm>
+            <a:off x="384048" y="164592"/>
+            <a:ext cx="8375904" cy="548640"/>
+          </a:xfrm>
+          <a:prstGeom prst="rect">
+            <a:avLst/>
+          </a:prstGeom>
+          <a:noFill/>
+          <a:ln/>
+        </p:spPr>
+        <p:txBody>
+          <a:bodyPr wrap="square" rtlCol="0" anchor="b"/>
+          <a:lstStyle/>
+          <a:p>
+            <a:pPr algn="l" indent="0" marL="0">
+              <a:buNone/>
+            </a:pPr>
+            <a:r>
+              <a:rPr lang="en-US" sz="1600" b="1" dirty="0">
+                <a:solidFill>
+                  <a:srgbClr val="1A1A2E"/>
+                </a:solidFill>
+                <a:latin typeface="Georgia" pitchFamily="34" charset="0"/>
+                <a:ea typeface="Georgia" pitchFamily="34" charset="-122"/>
+                <a:cs typeface="Georgia" pitchFamily="34" charset="-120"/>
+              </a:rPr>
+              <a:t>EIF (External Interface Files): Внешние файлы</a:t>
+            </a:r>
+            <a:endParaRPr lang="en-US" sz="1600" dirty="0"/>
+          </a:p>
+        </p:txBody>
+      </p:sp>
+      <p:sp>
+        <p:nvSpPr>
+          <p:cNvPr id="3" name="Shape 1"/>
+          <p:cNvSpPr/>
+          <p:nvPr/>
+        </p:nvSpPr>
+        <p:spPr>
+          <a:xfrm>
+            <a:off x="384048" y="822960"/>
+            <a:ext cx="8375904" cy="4119372"/>
+          </a:xfrm>
+          <a:prstGeom prst="roundRect">
+            <a:avLst>
+              <a:gd name="adj" fmla="val 2220"/>
+            </a:avLst>
+          </a:prstGeom>
+          <a:solidFill>
+            <a:srgbClr val="F8F4F0"/>
+          </a:solidFill>
+          <a:ln w="12700">
+            <a:solidFill>
+              <a:srgbClr val="EFEAE3"/>
+            </a:solidFill>
+            <a:prstDash val="solid"/>
+          </a:ln>
+          <a:effectLst>
+            <a:outerShdw sx="100000" sy="100000" kx="0" ky="0" algn="bl" rotWithShape="0" blurRad="152400" dist="38100" dir="2700000">
+              <a:srgbClr val="000000">
+                <a:alpha val="12000"/>
+              </a:srgbClr>
+            </a:outerShdw>
+          </a:effectLst>
+        </p:spPr>
+      </p:sp>
+      <p:sp>
+        <p:nvSpPr>
+          <p:cNvPr id="4" name="Text 2"/>
+          <p:cNvSpPr/>
+          <p:nvPr/>
+        </p:nvSpPr>
+        <p:spPr>
+          <a:xfrm>
+            <a:off x="548640" y="932688"/>
+            <a:ext cx="8046720" cy="411480"/>
+          </a:xfrm>
+          <a:prstGeom prst="rect">
+            <a:avLst/>
+          </a:prstGeom>
+          <a:noFill/>
+          <a:ln/>
+        </p:spPr>
+        <p:txBody>
+          <a:bodyPr wrap="square" rtlCol="0" anchor="ctr"/>
+          <a:lstStyle/>
+          <a:p>
+            <a:pPr indent="0" marL="0">
+              <a:buNone/>
+            </a:pPr>
+            <a:r>
+              <a:rPr lang="en-US" sz="1400" b="1" dirty="0">
+                <a:solidFill>
+                  <a:srgbClr val="1A1A2E"/>
+                </a:solidFill>
+                <a:latin typeface="Cambria" pitchFamily="34" charset="0"/>
+                <a:ea typeface="Cambria" pitchFamily="34" charset="-122"/>
+                <a:cs typeface="Cambria" pitchFamily="34" charset="-120"/>
+              </a:rPr>
+              <a:t>Определение EIF и примеры в client-portal</a:t>
+            </a:r>
+            <a:endParaRPr lang="en-US" sz="1400" dirty="0"/>
+          </a:p>
+        </p:txBody>
+      </p:sp>
+      <p:sp>
+        <p:nvSpPr>
+          <p:cNvPr id="5" name="Text 3"/>
+          <p:cNvSpPr/>
+          <p:nvPr/>
+        </p:nvSpPr>
+        <p:spPr>
+          <a:xfrm>
+            <a:off x="548640" y="1417320"/>
+            <a:ext cx="8046720" cy="3296412"/>
+          </a:xfrm>
+          <a:prstGeom prst="rect">
+            <a:avLst/>
+          </a:prstGeom>
+          <a:noFill/>
+          <a:ln/>
+        </p:spPr>
+        <p:txBody>
+          <a:bodyPr wrap="square" rtlCol="0" anchor="t"/>
+          <a:lstStyle/>
+          <a:p>
+            <a:pPr algn="l" indent="0" marL="0">
+              <a:buNone/>
+            </a:pPr>
+            <a:r>
+              <a:rPr lang="en-US" sz="1800" dirty="0">
                 <a:solidFill>
                   <a:srgbClr val="2D2D3A"/>
                 </a:solidFill>
@@ -12926,20 +14874,20 @@
               </a:rPr>
               <a:t>Внешний интерфейсный файл — это логически связанная группа данных, используемая нашей системой для ссылок и запросов, но полностью управляемая и изменяемая другой внешней системой.</a:t>
             </a:r>
-            <a:endParaRPr lang="en-US" sz="1600" dirty="0"/>
+            <a:endParaRPr lang="en-US" sz="1800" dirty="0"/>
           </a:p>
           <a:p>
             <a:pPr algn="l" indent="0" marL="0">
               <a:buNone/>
             </a:pPr>
-            <a:endParaRPr lang="en-US" sz="1600" dirty="0"/>
+            <a:endParaRPr lang="en-US" sz="1800" dirty="0"/>
           </a:p>
           <a:p>
             <a:pPr algn="l" indent="0" marL="0">
               <a:buNone/>
             </a:pPr>
             <a:r>
-              <a:rPr lang="en-US" sz="1600" dirty="0">
+              <a:rPr lang="en-US" sz="1800" dirty="0">
                 <a:solidFill>
                   <a:srgbClr val="2D2D3A"/>
                 </a:solidFill>
@@ -12949,14 +14897,14 @@
               </a:rPr>
               <a:t>Примеры в client-portal:</a:t>
             </a:r>
-            <a:endParaRPr lang="en-US" sz="1600" dirty="0"/>
+            <a:endParaRPr lang="en-US" sz="1800" dirty="0"/>
           </a:p>
           <a:p>
             <a:pPr algn="l" indent="0" marL="0">
               <a:buNone/>
             </a:pPr>
             <a:r>
-              <a:rPr lang="en-US" sz="1600" dirty="0">
+              <a:rPr lang="en-US" sz="1800" dirty="0">
                 <a:solidFill>
                   <a:srgbClr val="2D2D3A"/>
                 </a:solidFill>
@@ -12966,14 +14914,14 @@
               </a:rPr>
               <a:t>• Внешняя база реплики 1С (`neo_1c_replica`), которая хранит справочники официальных продуктов 1С и договоров на обслуживание клиентов.</a:t>
             </a:r>
-            <a:endParaRPr lang="en-US" sz="1600" dirty="0"/>
+            <a:endParaRPr lang="en-US" sz="1800" dirty="0"/>
           </a:p>
           <a:p>
             <a:pPr algn="l" indent="0" marL="0">
               <a:buNone/>
             </a:pPr>
             <a:r>
-              <a:rPr lang="en-US" sz="1600" dirty="0">
+              <a:rPr lang="en-US" sz="1800" dirty="0">
                 <a:solidFill>
                   <a:srgbClr val="2D2D3A"/>
                 </a:solidFill>
@@ -12983,7 +14931,7 @@
               </a:rPr>
               <a:t>• Наш портал лишь читает эти данные по мере синхронизации, но изменять договоры внутри портала категорически запрещено.</a:t>
             </a:r>
-            <a:endParaRPr lang="en-US" sz="1600" dirty="0"/>
+            <a:endParaRPr lang="en-US" sz="1800" dirty="0"/>
           </a:p>
         </p:txBody>
       </p:sp>
